--- a/03-课件PPT/讲次版/第4章-3-讲次 4-3 · Memory 体系.pptx
+++ b/03-课件PPT/讲次版/第4章-3-讲次 4-3 · Memory 体系.pptx
@@ -5014,14 +5014,1128 @@
       </p:sp>
       <p:sp>
         <p:nvSpPr>
-          <p:cNvPr id="5" name="TextBox 4"/>
+          <p:cNvPr id="5" name="Rectangle 4"/>
+          <p:cNvSpPr/>
+          <p:nvPr/>
+        </p:nvSpPr>
+        <p:spPr>
+          <a:xfrm>
+            <a:off x="1619250" y="3314700"/>
+            <a:ext cx="8953500" cy="38100"/>
+          </a:xfrm>
+          <a:prstGeom prst="rect">
+            <a:avLst/>
+          </a:prstGeom>
+          <a:solidFill>
+            <a:srgbClr val="DDE5EE"/>
+          </a:solidFill>
+          <a:ln>
+            <a:noFill/>
+          </a:ln>
+          <a:effectLst/>
+        </p:spPr>
+        <p:style>
+          <a:lnRef idx="1">
+            <a:schemeClr val="accent1"/>
+          </a:lnRef>
+          <a:fillRef idx="3">
+            <a:schemeClr val="accent1"/>
+          </a:fillRef>
+          <a:effectRef idx="2">
+            <a:schemeClr val="accent1"/>
+          </a:effectRef>
+          <a:fontRef idx="minor">
+            <a:schemeClr val="lt1"/>
+          </a:fontRef>
+        </p:style>
+        <p:txBody>
+          <a:bodyPr rtlCol="0" anchor="ctr"/>
+          <a:lstStyle/>
+          <a:p>
+            <a:pPr algn="ctr"/>
+          </a:p>
+        </p:txBody>
+      </p:sp>
+      <p:sp>
+        <p:nvSpPr>
+          <p:cNvPr id="6" name="Rounded Rectangle 5"/>
+          <p:cNvSpPr/>
+          <p:nvPr/>
+        </p:nvSpPr>
+        <p:spPr>
+          <a:xfrm>
+            <a:off x="1514475" y="3228975"/>
+            <a:ext cx="209550" cy="209550"/>
+          </a:xfrm>
+          <a:prstGeom prst="roundRect">
+            <a:avLst>
+              <a:gd name="adj" fmla="val 8000"/>
+            </a:avLst>
+          </a:prstGeom>
+          <a:solidFill>
+            <a:srgbClr val="2563EB"/>
+          </a:solidFill>
+          <a:ln>
+            <a:noFill/>
+          </a:ln>
+          <a:effectLst/>
+        </p:spPr>
+        <p:style>
+          <a:lnRef idx="1">
+            <a:schemeClr val="accent1"/>
+          </a:lnRef>
+          <a:fillRef idx="3">
+            <a:schemeClr val="accent1"/>
+          </a:fillRef>
+          <a:effectRef idx="2">
+            <a:schemeClr val="accent1"/>
+          </a:effectRef>
+          <a:fontRef idx="minor">
+            <a:schemeClr val="lt1"/>
+          </a:fontRef>
+        </p:style>
+        <p:txBody>
+          <a:bodyPr rtlCol="0" anchor="ctr"/>
+          <a:lstStyle/>
+          <a:p>
+            <a:pPr algn="ctr"/>
+          </a:p>
+        </p:txBody>
+      </p:sp>
+      <p:sp>
+        <p:nvSpPr>
+          <p:cNvPr id="7" name="Rounded Rectangle 6"/>
+          <p:cNvSpPr/>
+          <p:nvPr/>
+        </p:nvSpPr>
+        <p:spPr>
+          <a:xfrm>
+            <a:off x="190500" y="1905000"/>
+            <a:ext cx="2857500" cy="1123950"/>
+          </a:xfrm>
+          <a:prstGeom prst="roundRect">
+            <a:avLst>
+              <a:gd name="adj" fmla="val 8000"/>
+            </a:avLst>
+          </a:prstGeom>
+          <a:solidFill>
+            <a:srgbClr val="F1F5F9"/>
+          </a:solidFill>
+          <a:ln>
+            <a:noFill/>
+          </a:ln>
+          <a:effectLst/>
+        </p:spPr>
+        <p:style>
+          <a:lnRef idx="1">
+            <a:schemeClr val="accent1"/>
+          </a:lnRef>
+          <a:fillRef idx="3">
+            <a:schemeClr val="accent1"/>
+          </a:fillRef>
+          <a:effectRef idx="2">
+            <a:schemeClr val="accent1"/>
+          </a:effectRef>
+          <a:fontRef idx="minor">
+            <a:schemeClr val="lt1"/>
+          </a:fontRef>
+        </p:style>
+        <p:txBody>
+          <a:bodyPr rtlCol="0" anchor="ctr"/>
+          <a:lstStyle/>
+          <a:p>
+            <a:pPr algn="ctr"/>
+          </a:p>
+        </p:txBody>
+      </p:sp>
+      <p:sp>
+        <p:nvSpPr>
+          <p:cNvPr id="8" name="Rectangle 7"/>
+          <p:cNvSpPr/>
+          <p:nvPr/>
+        </p:nvSpPr>
+        <p:spPr>
+          <a:xfrm>
+            <a:off x="190500" y="1905000"/>
+            <a:ext cx="2857500" cy="38100"/>
+          </a:xfrm>
+          <a:prstGeom prst="rect">
+            <a:avLst/>
+          </a:prstGeom>
+          <a:solidFill>
+            <a:srgbClr val="2563EB"/>
+          </a:solidFill>
+          <a:ln>
+            <a:noFill/>
+          </a:ln>
+          <a:effectLst/>
+        </p:spPr>
+        <p:style>
+          <a:lnRef idx="1">
+            <a:schemeClr val="accent1"/>
+          </a:lnRef>
+          <a:fillRef idx="3">
+            <a:schemeClr val="accent1"/>
+          </a:fillRef>
+          <a:effectRef idx="2">
+            <a:schemeClr val="accent1"/>
+          </a:effectRef>
+          <a:fontRef idx="minor">
+            <a:schemeClr val="lt1"/>
+          </a:fontRef>
+        </p:style>
+        <p:txBody>
+          <a:bodyPr rtlCol="0" anchor="ctr"/>
+          <a:lstStyle/>
+          <a:p>
+            <a:pPr algn="ctr"/>
+          </a:p>
+        </p:txBody>
+      </p:sp>
+      <p:sp>
+        <p:nvSpPr>
+          <p:cNvPr id="9" name="TextBox 8"/>
           <p:cNvSpPr txBox="1"/>
           <p:nvPr/>
         </p:nvSpPr>
         <p:spPr>
           <a:xfrm>
-            <a:off x="9334500" y="0"/>
-            <a:ext cx="2667000" cy="704850"/>
+            <a:off x="285750" y="2000250"/>
+            <a:ext cx="2667000" cy="285750"/>
+          </a:xfrm>
+          <a:prstGeom prst="rect">
+            <a:avLst/>
+          </a:prstGeom>
+          <a:noFill/>
+        </p:spPr>
+        <p:txBody>
+          <a:bodyPr wrap="square" anchor="ctr">
+            <a:spAutoFit/>
+          </a:bodyPr>
+          <a:lstStyle/>
+          <a:p>
+            <a:pPr algn="ctr">
+              <a:lnSpc>
+                <a:spcPct val="100000"/>
+              </a:lnSpc>
+            </a:pPr>
+            <a:r>
+              <a:rPr sz="1400" b="1">
+                <a:solidFill>
+                  <a:srgbClr val="2563EB"/>
+                </a:solidFill>
+                <a:latin typeface="PingFang SC"/>
+              </a:rPr>
+              <a:t>任务完成</a:t>
+            </a:r>
+          </a:p>
+        </p:txBody>
+      </p:sp>
+      <p:sp>
+        <p:nvSpPr>
+          <p:cNvPr id="10" name="TextBox 9"/>
+          <p:cNvSpPr txBox="1"/>
+          <p:nvPr/>
+        </p:nvSpPr>
+        <p:spPr>
+          <a:xfrm>
+            <a:off x="285750" y="2305050"/>
+            <a:ext cx="2667000" cy="666750"/>
+          </a:xfrm>
+          <a:prstGeom prst="rect">
+            <a:avLst/>
+          </a:prstGeom>
+          <a:noFill/>
+        </p:spPr>
+        <p:txBody>
+          <a:bodyPr wrap="square" anchor="ctr">
+            <a:spAutoFit/>
+          </a:bodyPr>
+          <a:lstStyle/>
+          <a:p>
+            <a:pPr algn="l">
+              <a:lnSpc>
+                <a:spcPct val="105000"/>
+              </a:lnSpc>
+            </a:pPr>
+            <a:r>
+              <a:rPr sz="1050" b="0">
+                <a:solidFill>
+                  <a:srgbClr val="475569"/>
+                </a:solidFill>
+                <a:latin typeface="PingFang SC"/>
+              </a:rPr>
+              <a:t>提取候选</a:t>
+            </a:r>
+          </a:p>
+        </p:txBody>
+      </p:sp>
+      <p:sp>
+        <p:nvSpPr>
+          <p:cNvPr id="11" name="Rounded Rectangle 10"/>
+          <p:cNvSpPr/>
+          <p:nvPr/>
+        </p:nvSpPr>
+        <p:spPr>
+          <a:xfrm>
+            <a:off x="3752850" y="3228975"/>
+            <a:ext cx="209550" cy="209550"/>
+          </a:xfrm>
+          <a:prstGeom prst="roundRect">
+            <a:avLst>
+              <a:gd name="adj" fmla="val 8000"/>
+            </a:avLst>
+          </a:prstGeom>
+          <a:solidFill>
+            <a:srgbClr val="14B8A6"/>
+          </a:solidFill>
+          <a:ln>
+            <a:noFill/>
+          </a:ln>
+          <a:effectLst/>
+        </p:spPr>
+        <p:style>
+          <a:lnRef idx="1">
+            <a:schemeClr val="accent1"/>
+          </a:lnRef>
+          <a:fillRef idx="3">
+            <a:schemeClr val="accent1"/>
+          </a:fillRef>
+          <a:effectRef idx="2">
+            <a:schemeClr val="accent1"/>
+          </a:effectRef>
+          <a:fontRef idx="minor">
+            <a:schemeClr val="lt1"/>
+          </a:fontRef>
+        </p:style>
+        <p:txBody>
+          <a:bodyPr rtlCol="0" anchor="ctr"/>
+          <a:lstStyle/>
+          <a:p>
+            <a:pPr algn="ctr"/>
+          </a:p>
+        </p:txBody>
+      </p:sp>
+      <p:sp>
+        <p:nvSpPr>
+          <p:cNvPr id="12" name="Rounded Rectangle 11"/>
+          <p:cNvSpPr/>
+          <p:nvPr/>
+        </p:nvSpPr>
+        <p:spPr>
+          <a:xfrm>
+            <a:off x="2428875" y="3619500"/>
+            <a:ext cx="2857500" cy="1123950"/>
+          </a:xfrm>
+          <a:prstGeom prst="roundRect">
+            <a:avLst>
+              <a:gd name="adj" fmla="val 8000"/>
+            </a:avLst>
+          </a:prstGeom>
+          <a:solidFill>
+            <a:srgbClr val="F1F5F9"/>
+          </a:solidFill>
+          <a:ln>
+            <a:noFill/>
+          </a:ln>
+          <a:effectLst/>
+        </p:spPr>
+        <p:style>
+          <a:lnRef idx="1">
+            <a:schemeClr val="accent1"/>
+          </a:lnRef>
+          <a:fillRef idx="3">
+            <a:schemeClr val="accent1"/>
+          </a:fillRef>
+          <a:effectRef idx="2">
+            <a:schemeClr val="accent1"/>
+          </a:effectRef>
+          <a:fontRef idx="minor">
+            <a:schemeClr val="lt1"/>
+          </a:fontRef>
+        </p:style>
+        <p:txBody>
+          <a:bodyPr rtlCol="0" anchor="ctr"/>
+          <a:lstStyle/>
+          <a:p>
+            <a:pPr algn="ctr"/>
+          </a:p>
+        </p:txBody>
+      </p:sp>
+      <p:sp>
+        <p:nvSpPr>
+          <p:cNvPr id="13" name="Rectangle 12"/>
+          <p:cNvSpPr/>
+          <p:nvPr/>
+        </p:nvSpPr>
+        <p:spPr>
+          <a:xfrm>
+            <a:off x="2428875" y="3619500"/>
+            <a:ext cx="2857500" cy="38100"/>
+          </a:xfrm>
+          <a:prstGeom prst="rect">
+            <a:avLst/>
+          </a:prstGeom>
+          <a:solidFill>
+            <a:srgbClr val="14B8A6"/>
+          </a:solidFill>
+          <a:ln>
+            <a:noFill/>
+          </a:ln>
+          <a:effectLst/>
+        </p:spPr>
+        <p:style>
+          <a:lnRef idx="1">
+            <a:schemeClr val="accent1"/>
+          </a:lnRef>
+          <a:fillRef idx="3">
+            <a:schemeClr val="accent1"/>
+          </a:fillRef>
+          <a:effectRef idx="2">
+            <a:schemeClr val="accent1"/>
+          </a:effectRef>
+          <a:fontRef idx="minor">
+            <a:schemeClr val="lt1"/>
+          </a:fontRef>
+        </p:style>
+        <p:txBody>
+          <a:bodyPr rtlCol="0" anchor="ctr"/>
+          <a:lstStyle/>
+          <a:p>
+            <a:pPr algn="ctr"/>
+          </a:p>
+        </p:txBody>
+      </p:sp>
+      <p:sp>
+        <p:nvSpPr>
+          <p:cNvPr id="14" name="TextBox 13"/>
+          <p:cNvSpPr txBox="1"/>
+          <p:nvPr/>
+        </p:nvSpPr>
+        <p:spPr>
+          <a:xfrm>
+            <a:off x="2524125" y="3714750"/>
+            <a:ext cx="2667000" cy="285750"/>
+          </a:xfrm>
+          <a:prstGeom prst="rect">
+            <a:avLst/>
+          </a:prstGeom>
+          <a:noFill/>
+        </p:spPr>
+        <p:txBody>
+          <a:bodyPr wrap="square" anchor="ctr">
+            <a:spAutoFit/>
+          </a:bodyPr>
+          <a:lstStyle/>
+          <a:p>
+            <a:pPr algn="ctr">
+              <a:lnSpc>
+                <a:spcPct val="100000"/>
+              </a:lnSpc>
+            </a:pPr>
+            <a:r>
+              <a:rPr sz="1400" b="1">
+                <a:solidFill>
+                  <a:srgbClr val="14B8A6"/>
+                </a:solidFill>
+                <a:latin typeface="PingFang SC"/>
+              </a:rPr>
+              <a:t>写入校验</a:t>
+            </a:r>
+          </a:p>
+        </p:txBody>
+      </p:sp>
+      <p:sp>
+        <p:nvSpPr>
+          <p:cNvPr id="15" name="TextBox 14"/>
+          <p:cNvSpPr txBox="1"/>
+          <p:nvPr/>
+        </p:nvSpPr>
+        <p:spPr>
+          <a:xfrm>
+            <a:off x="2524125" y="4019550"/>
+            <a:ext cx="2667000" cy="666750"/>
+          </a:xfrm>
+          <a:prstGeom prst="rect">
+            <a:avLst/>
+          </a:prstGeom>
+          <a:noFill/>
+        </p:spPr>
+        <p:txBody>
+          <a:bodyPr wrap="square" anchor="ctr">
+            <a:spAutoFit/>
+          </a:bodyPr>
+          <a:lstStyle/>
+          <a:p>
+            <a:pPr algn="l">
+              <a:lnSpc>
+                <a:spcPct val="105000"/>
+              </a:lnSpc>
+            </a:pPr>
+            <a:r>
+              <a:rPr sz="1050" b="0">
+                <a:solidFill>
+                  <a:srgbClr val="475569"/>
+                </a:solidFill>
+                <a:latin typeface="PingFang SC"/>
+              </a:rPr>
+              <a:t>防污染(置信+来源)</a:t>
+            </a:r>
+          </a:p>
+        </p:txBody>
+      </p:sp>
+      <p:sp>
+        <p:nvSpPr>
+          <p:cNvPr id="16" name="Rounded Rectangle 15"/>
+          <p:cNvSpPr/>
+          <p:nvPr/>
+        </p:nvSpPr>
+        <p:spPr>
+          <a:xfrm>
+            <a:off x="5991225" y="3228975"/>
+            <a:ext cx="209550" cy="209550"/>
+          </a:xfrm>
+          <a:prstGeom prst="roundRect">
+            <a:avLst>
+              <a:gd name="adj" fmla="val 8000"/>
+            </a:avLst>
+          </a:prstGeom>
+          <a:solidFill>
+            <a:srgbClr val="8B5CF6"/>
+          </a:solidFill>
+          <a:ln>
+            <a:noFill/>
+          </a:ln>
+          <a:effectLst/>
+        </p:spPr>
+        <p:style>
+          <a:lnRef idx="1">
+            <a:schemeClr val="accent1"/>
+          </a:lnRef>
+          <a:fillRef idx="3">
+            <a:schemeClr val="accent1"/>
+          </a:fillRef>
+          <a:effectRef idx="2">
+            <a:schemeClr val="accent1"/>
+          </a:effectRef>
+          <a:fontRef idx="minor">
+            <a:schemeClr val="lt1"/>
+          </a:fontRef>
+        </p:style>
+        <p:txBody>
+          <a:bodyPr rtlCol="0" anchor="ctr"/>
+          <a:lstStyle/>
+          <a:p>
+            <a:pPr algn="ctr"/>
+          </a:p>
+        </p:txBody>
+      </p:sp>
+      <p:sp>
+        <p:nvSpPr>
+          <p:cNvPr id="17" name="Rounded Rectangle 16"/>
+          <p:cNvSpPr/>
+          <p:nvPr/>
+        </p:nvSpPr>
+        <p:spPr>
+          <a:xfrm>
+            <a:off x="4667250" y="1905000"/>
+            <a:ext cx="2857500" cy="1123950"/>
+          </a:xfrm>
+          <a:prstGeom prst="roundRect">
+            <a:avLst>
+              <a:gd name="adj" fmla="val 8000"/>
+            </a:avLst>
+          </a:prstGeom>
+          <a:solidFill>
+            <a:srgbClr val="F1F5F9"/>
+          </a:solidFill>
+          <a:ln>
+            <a:noFill/>
+          </a:ln>
+          <a:effectLst/>
+        </p:spPr>
+        <p:style>
+          <a:lnRef idx="1">
+            <a:schemeClr val="accent1"/>
+          </a:lnRef>
+          <a:fillRef idx="3">
+            <a:schemeClr val="accent1"/>
+          </a:fillRef>
+          <a:effectRef idx="2">
+            <a:schemeClr val="accent1"/>
+          </a:effectRef>
+          <a:fontRef idx="minor">
+            <a:schemeClr val="lt1"/>
+          </a:fontRef>
+        </p:style>
+        <p:txBody>
+          <a:bodyPr rtlCol="0" anchor="ctr"/>
+          <a:lstStyle/>
+          <a:p>
+            <a:pPr algn="ctr"/>
+          </a:p>
+        </p:txBody>
+      </p:sp>
+      <p:sp>
+        <p:nvSpPr>
+          <p:cNvPr id="18" name="Rectangle 17"/>
+          <p:cNvSpPr/>
+          <p:nvPr/>
+        </p:nvSpPr>
+        <p:spPr>
+          <a:xfrm>
+            <a:off x="4667250" y="1905000"/>
+            <a:ext cx="2857500" cy="38100"/>
+          </a:xfrm>
+          <a:prstGeom prst="rect">
+            <a:avLst/>
+          </a:prstGeom>
+          <a:solidFill>
+            <a:srgbClr val="8B5CF6"/>
+          </a:solidFill>
+          <a:ln>
+            <a:noFill/>
+          </a:ln>
+          <a:effectLst/>
+        </p:spPr>
+        <p:style>
+          <a:lnRef idx="1">
+            <a:schemeClr val="accent1"/>
+          </a:lnRef>
+          <a:fillRef idx="3">
+            <a:schemeClr val="accent1"/>
+          </a:fillRef>
+          <a:effectRef idx="2">
+            <a:schemeClr val="accent1"/>
+          </a:effectRef>
+          <a:fontRef idx="minor">
+            <a:schemeClr val="lt1"/>
+          </a:fontRef>
+        </p:style>
+        <p:txBody>
+          <a:bodyPr rtlCol="0" anchor="ctr"/>
+          <a:lstStyle/>
+          <a:p>
+            <a:pPr algn="ctr"/>
+          </a:p>
+        </p:txBody>
+      </p:sp>
+      <p:sp>
+        <p:nvSpPr>
+          <p:cNvPr id="19" name="TextBox 18"/>
+          <p:cNvSpPr txBox="1"/>
+          <p:nvPr/>
+        </p:nvSpPr>
+        <p:spPr>
+          <a:xfrm>
+            <a:off x="4762500" y="2000250"/>
+            <a:ext cx="2667000" cy="285750"/>
+          </a:xfrm>
+          <a:prstGeom prst="rect">
+            <a:avLst/>
+          </a:prstGeom>
+          <a:noFill/>
+        </p:spPr>
+        <p:txBody>
+          <a:bodyPr wrap="square" anchor="ctr">
+            <a:spAutoFit/>
+          </a:bodyPr>
+          <a:lstStyle/>
+          <a:p>
+            <a:pPr algn="ctr">
+              <a:lnSpc>
+                <a:spcPct val="100000"/>
+              </a:lnSpc>
+            </a:pPr>
+            <a:r>
+              <a:rPr sz="1400" b="1">
+                <a:solidFill>
+                  <a:srgbClr val="8B5CF6"/>
+                </a:solidFill>
+                <a:latin typeface="PingFang SC"/>
+              </a:rPr>
+              <a:t>检索召回</a:t>
+            </a:r>
+          </a:p>
+        </p:txBody>
+      </p:sp>
+      <p:sp>
+        <p:nvSpPr>
+          <p:cNvPr id="20" name="TextBox 19"/>
+          <p:cNvSpPr txBox="1"/>
+          <p:nvPr/>
+        </p:nvSpPr>
+        <p:spPr>
+          <a:xfrm>
+            <a:off x="4762500" y="2305050"/>
+            <a:ext cx="2667000" cy="666750"/>
+          </a:xfrm>
+          <a:prstGeom prst="rect">
+            <a:avLst/>
+          </a:prstGeom>
+          <a:noFill/>
+        </p:spPr>
+        <p:txBody>
+          <a:bodyPr wrap="square" anchor="ctr">
+            <a:spAutoFit/>
+          </a:bodyPr>
+          <a:lstStyle/>
+          <a:p>
+            <a:pPr algn="l">
+              <a:lnSpc>
+                <a:spcPct val="105000"/>
+              </a:lnSpc>
+            </a:pPr>
+            <a:r>
+              <a:rPr sz="1050" b="0">
+                <a:solidFill>
+                  <a:srgbClr val="475569"/>
+                </a:solidFill>
+                <a:latin typeface="PingFang SC"/>
+              </a:rPr>
+              <a:t>关键词/相似</a:t>
+            </a:r>
+          </a:p>
+        </p:txBody>
+      </p:sp>
+      <p:sp>
+        <p:nvSpPr>
+          <p:cNvPr id="21" name="Rounded Rectangle 20"/>
+          <p:cNvSpPr/>
+          <p:nvPr/>
+        </p:nvSpPr>
+        <p:spPr>
+          <a:xfrm>
+            <a:off x="8229600" y="3228975"/>
+            <a:ext cx="209550" cy="209550"/>
+          </a:xfrm>
+          <a:prstGeom prst="roundRect">
+            <a:avLst>
+              <a:gd name="adj" fmla="val 8000"/>
+            </a:avLst>
+          </a:prstGeom>
+          <a:solidFill>
+            <a:srgbClr val="F59E0B"/>
+          </a:solidFill>
+          <a:ln>
+            <a:noFill/>
+          </a:ln>
+          <a:effectLst/>
+        </p:spPr>
+        <p:style>
+          <a:lnRef idx="1">
+            <a:schemeClr val="accent1"/>
+          </a:lnRef>
+          <a:fillRef idx="3">
+            <a:schemeClr val="accent1"/>
+          </a:fillRef>
+          <a:effectRef idx="2">
+            <a:schemeClr val="accent1"/>
+          </a:effectRef>
+          <a:fontRef idx="minor">
+            <a:schemeClr val="lt1"/>
+          </a:fontRef>
+        </p:style>
+        <p:txBody>
+          <a:bodyPr rtlCol="0" anchor="ctr"/>
+          <a:lstStyle/>
+          <a:p>
+            <a:pPr algn="ctr"/>
+          </a:p>
+        </p:txBody>
+      </p:sp>
+      <p:sp>
+        <p:nvSpPr>
+          <p:cNvPr id="22" name="Rounded Rectangle 21"/>
+          <p:cNvSpPr/>
+          <p:nvPr/>
+        </p:nvSpPr>
+        <p:spPr>
+          <a:xfrm>
+            <a:off x="6905625" y="3619500"/>
+            <a:ext cx="2857500" cy="1123950"/>
+          </a:xfrm>
+          <a:prstGeom prst="roundRect">
+            <a:avLst>
+              <a:gd name="adj" fmla="val 8000"/>
+            </a:avLst>
+          </a:prstGeom>
+          <a:solidFill>
+            <a:srgbClr val="F1F5F9"/>
+          </a:solidFill>
+          <a:ln>
+            <a:noFill/>
+          </a:ln>
+          <a:effectLst/>
+        </p:spPr>
+        <p:style>
+          <a:lnRef idx="1">
+            <a:schemeClr val="accent1"/>
+          </a:lnRef>
+          <a:fillRef idx="3">
+            <a:schemeClr val="accent1"/>
+          </a:fillRef>
+          <a:effectRef idx="2">
+            <a:schemeClr val="accent1"/>
+          </a:effectRef>
+          <a:fontRef idx="minor">
+            <a:schemeClr val="lt1"/>
+          </a:fontRef>
+        </p:style>
+        <p:txBody>
+          <a:bodyPr rtlCol="0" anchor="ctr"/>
+          <a:lstStyle/>
+          <a:p>
+            <a:pPr algn="ctr"/>
+          </a:p>
+        </p:txBody>
+      </p:sp>
+      <p:sp>
+        <p:nvSpPr>
+          <p:cNvPr id="23" name="Rectangle 22"/>
+          <p:cNvSpPr/>
+          <p:nvPr/>
+        </p:nvSpPr>
+        <p:spPr>
+          <a:xfrm>
+            <a:off x="6905625" y="3619500"/>
+            <a:ext cx="2857500" cy="38100"/>
+          </a:xfrm>
+          <a:prstGeom prst="rect">
+            <a:avLst/>
+          </a:prstGeom>
+          <a:solidFill>
+            <a:srgbClr val="F59E0B"/>
+          </a:solidFill>
+          <a:ln>
+            <a:noFill/>
+          </a:ln>
+          <a:effectLst/>
+        </p:spPr>
+        <p:style>
+          <a:lnRef idx="1">
+            <a:schemeClr val="accent1"/>
+          </a:lnRef>
+          <a:fillRef idx="3">
+            <a:schemeClr val="accent1"/>
+          </a:fillRef>
+          <a:effectRef idx="2">
+            <a:schemeClr val="accent1"/>
+          </a:effectRef>
+          <a:fontRef idx="minor">
+            <a:schemeClr val="lt1"/>
+          </a:fontRef>
+        </p:style>
+        <p:txBody>
+          <a:bodyPr rtlCol="0" anchor="ctr"/>
+          <a:lstStyle/>
+          <a:p>
+            <a:pPr algn="ctr"/>
+          </a:p>
+        </p:txBody>
+      </p:sp>
+      <p:sp>
+        <p:nvSpPr>
+          <p:cNvPr id="24" name="TextBox 23"/>
+          <p:cNvSpPr txBox="1"/>
+          <p:nvPr/>
+        </p:nvSpPr>
+        <p:spPr>
+          <a:xfrm>
+            <a:off x="7000875" y="3714750"/>
+            <a:ext cx="2667000" cy="285750"/>
+          </a:xfrm>
+          <a:prstGeom prst="rect">
+            <a:avLst/>
+          </a:prstGeom>
+          <a:noFill/>
+        </p:spPr>
+        <p:txBody>
+          <a:bodyPr wrap="square" anchor="ctr">
+            <a:spAutoFit/>
+          </a:bodyPr>
+          <a:lstStyle/>
+          <a:p>
+            <a:pPr algn="ctr">
+              <a:lnSpc>
+                <a:spcPct val="100000"/>
+              </a:lnSpc>
+            </a:pPr>
+            <a:r>
+              <a:rPr sz="1400" b="1">
+                <a:solidFill>
+                  <a:srgbClr val="F59E0B"/>
+                </a:solidFill>
+                <a:latin typeface="PingFang SC"/>
+              </a:rPr>
+              <a:t>失败触发</a:t>
+            </a:r>
+          </a:p>
+        </p:txBody>
+      </p:sp>
+      <p:sp>
+        <p:nvSpPr>
+          <p:cNvPr id="25" name="TextBox 24"/>
+          <p:cNvSpPr txBox="1"/>
+          <p:nvPr/>
+        </p:nvSpPr>
+        <p:spPr>
+          <a:xfrm>
+            <a:off x="7000875" y="4019550"/>
+            <a:ext cx="2667000" cy="666750"/>
+          </a:xfrm>
+          <a:prstGeom prst="rect">
+            <a:avLst/>
+          </a:prstGeom>
+          <a:noFill/>
+        </p:spPr>
+        <p:txBody>
+          <a:bodyPr wrap="square" anchor="ctr">
+            <a:spAutoFit/>
+          </a:bodyPr>
+          <a:lstStyle/>
+          <a:p>
+            <a:pPr algn="l">
+              <a:lnSpc>
+                <a:spcPct val="105000"/>
+              </a:lnSpc>
+            </a:pPr>
+            <a:r>
+              <a:rPr sz="1050" b="0">
+                <a:solidFill>
+                  <a:srgbClr val="475569"/>
+                </a:solidFill>
+                <a:latin typeface="PingFang SC"/>
+              </a:rPr>
+              <a:t>更新过期条目</a:t>
+            </a:r>
+          </a:p>
+        </p:txBody>
+      </p:sp>
+      <p:sp>
+        <p:nvSpPr>
+          <p:cNvPr id="26" name="Rounded Rectangle 25"/>
+          <p:cNvSpPr/>
+          <p:nvPr/>
+        </p:nvSpPr>
+        <p:spPr>
+          <a:xfrm>
+            <a:off x="10467975" y="3228975"/>
+            <a:ext cx="209550" cy="209550"/>
+          </a:xfrm>
+          <a:prstGeom prst="roundRect">
+            <a:avLst>
+              <a:gd name="adj" fmla="val 8000"/>
+            </a:avLst>
+          </a:prstGeom>
+          <a:solidFill>
+            <a:srgbClr val="34D399"/>
+          </a:solidFill>
+          <a:ln>
+            <a:noFill/>
+          </a:ln>
+          <a:effectLst/>
+        </p:spPr>
+        <p:style>
+          <a:lnRef idx="1">
+            <a:schemeClr val="accent1"/>
+          </a:lnRef>
+          <a:fillRef idx="3">
+            <a:schemeClr val="accent1"/>
+          </a:fillRef>
+          <a:effectRef idx="2">
+            <a:schemeClr val="accent1"/>
+          </a:effectRef>
+          <a:fontRef idx="minor">
+            <a:schemeClr val="lt1"/>
+          </a:fontRef>
+        </p:style>
+        <p:txBody>
+          <a:bodyPr rtlCol="0" anchor="ctr"/>
+          <a:lstStyle/>
+          <a:p>
+            <a:pPr algn="ctr"/>
+          </a:p>
+        </p:txBody>
+      </p:sp>
+      <p:sp>
+        <p:nvSpPr>
+          <p:cNvPr id="27" name="Rounded Rectangle 26"/>
+          <p:cNvSpPr/>
+          <p:nvPr/>
+        </p:nvSpPr>
+        <p:spPr>
+          <a:xfrm>
+            <a:off x="9144000" y="1905000"/>
+            <a:ext cx="2857500" cy="1123950"/>
+          </a:xfrm>
+          <a:prstGeom prst="roundRect">
+            <a:avLst>
+              <a:gd name="adj" fmla="val 8000"/>
+            </a:avLst>
+          </a:prstGeom>
+          <a:solidFill>
+            <a:srgbClr val="F1F5F9"/>
+          </a:solidFill>
+          <a:ln>
+            <a:noFill/>
+          </a:ln>
+          <a:effectLst/>
+        </p:spPr>
+        <p:style>
+          <a:lnRef idx="1">
+            <a:schemeClr val="accent1"/>
+          </a:lnRef>
+          <a:fillRef idx="3">
+            <a:schemeClr val="accent1"/>
+          </a:fillRef>
+          <a:effectRef idx="2">
+            <a:schemeClr val="accent1"/>
+          </a:effectRef>
+          <a:fontRef idx="minor">
+            <a:schemeClr val="lt1"/>
+          </a:fontRef>
+        </p:style>
+        <p:txBody>
+          <a:bodyPr rtlCol="0" anchor="ctr"/>
+          <a:lstStyle/>
+          <a:p>
+            <a:pPr algn="ctr"/>
+          </a:p>
+        </p:txBody>
+      </p:sp>
+      <p:sp>
+        <p:nvSpPr>
+          <p:cNvPr id="28" name="Rectangle 27"/>
+          <p:cNvSpPr/>
+          <p:nvPr/>
+        </p:nvSpPr>
+        <p:spPr>
+          <a:xfrm>
+            <a:off x="9144000" y="1905000"/>
+            <a:ext cx="2857500" cy="38100"/>
+          </a:xfrm>
+          <a:prstGeom prst="rect">
+            <a:avLst/>
+          </a:prstGeom>
+          <a:solidFill>
+            <a:srgbClr val="34D399"/>
+          </a:solidFill>
+          <a:ln>
+            <a:noFill/>
+          </a:ln>
+          <a:effectLst/>
+        </p:spPr>
+        <p:style>
+          <a:lnRef idx="1">
+            <a:schemeClr val="accent1"/>
+          </a:lnRef>
+          <a:fillRef idx="3">
+            <a:schemeClr val="accent1"/>
+          </a:fillRef>
+          <a:effectRef idx="2">
+            <a:schemeClr val="accent1"/>
+          </a:effectRef>
+          <a:fontRef idx="minor">
+            <a:schemeClr val="lt1"/>
+          </a:fontRef>
+        </p:style>
+        <p:txBody>
+          <a:bodyPr rtlCol="0" anchor="ctr"/>
+          <a:lstStyle/>
+          <a:p>
+            <a:pPr algn="ctr"/>
+          </a:p>
+        </p:txBody>
+      </p:sp>
+      <p:sp>
+        <p:nvSpPr>
+          <p:cNvPr id="29" name="TextBox 28"/>
+          <p:cNvSpPr txBox="1"/>
+          <p:nvPr/>
+        </p:nvSpPr>
+        <p:spPr>
+          <a:xfrm>
+            <a:off x="9239250" y="2000250"/>
+            <a:ext cx="2667000" cy="285750"/>
+          </a:xfrm>
+          <a:prstGeom prst="rect">
+            <a:avLst/>
+          </a:prstGeom>
+          <a:noFill/>
+        </p:spPr>
+        <p:txBody>
+          <a:bodyPr wrap="square" anchor="ctr">
+            <a:spAutoFit/>
+          </a:bodyPr>
+          <a:lstStyle/>
+          <a:p>
+            <a:pPr algn="ctr">
+              <a:lnSpc>
+                <a:spcPct val="100000"/>
+              </a:lnSpc>
+            </a:pPr>
+            <a:r>
+              <a:rPr sz="1400" b="1">
+                <a:solidFill>
+                  <a:srgbClr val="34D399"/>
+                </a:solidFill>
+                <a:latin typeface="PingFang SC"/>
+              </a:rPr>
+              <a:t>定期运营</a:t>
+            </a:r>
+          </a:p>
+        </p:txBody>
+      </p:sp>
+      <p:sp>
+        <p:nvSpPr>
+          <p:cNvPr id="30" name="TextBox 29"/>
+          <p:cNvSpPr txBox="1"/>
+          <p:nvPr/>
+        </p:nvSpPr>
+        <p:spPr>
+          <a:xfrm>
+            <a:off x="9239250" y="2305050"/>
+            <a:ext cx="2667000" cy="666750"/>
+          </a:xfrm>
+          <a:prstGeom prst="rect">
+            <a:avLst/>
+          </a:prstGeom>
+          <a:noFill/>
+        </p:spPr>
+        <p:txBody>
+          <a:bodyPr wrap="square" anchor="ctr">
+            <a:spAutoFit/>
+          </a:bodyPr>
+          <a:lstStyle/>
+          <a:p>
+            <a:pPr algn="l">
+              <a:lnSpc>
+                <a:spcPct val="105000"/>
+              </a:lnSpc>
+            </a:pPr>
+            <a:r>
+              <a:rPr sz="1050" b="0">
+                <a:solidFill>
+                  <a:srgbClr val="475569"/>
+                </a:solidFill>
+                <a:latin typeface="PingFang SC"/>
+              </a:rPr>
+              <a:t>清理低质</a:t>
+            </a:r>
+          </a:p>
+        </p:txBody>
+      </p:sp>
+      <p:sp>
+        <p:nvSpPr>
+          <p:cNvPr id="31" name="TextBox 30"/>
+          <p:cNvSpPr txBox="1"/>
+          <p:nvPr/>
+        </p:nvSpPr>
+        <p:spPr>
+          <a:xfrm>
+            <a:off x="10287000" y="6534150"/>
+            <a:ext cx="1619250" cy="266700"/>
           </a:xfrm>
           <a:prstGeom prst="rect">
             <a:avLst/>
@@ -5040,1159 +6154,6 @@
               </a:lnSpc>
             </a:pPr>
             <a:r>
-              <a:rPr sz="1100" b="0">
-                <a:solidFill>
-                  <a:srgbClr val="94A3B8"/>
-                </a:solidFill>
-                <a:latin typeface="PingFang SC"/>
-              </a:rPr>
-              <a:t>任务完成:提取候选;写入校验:防污染(置信+来源);检索召回:关键词/相似;失败触发:更新过期条目;定期运营:清理低质|记忆是运营出来的</a:t>
-            </a:r>
-          </a:p>
-        </p:txBody>
-      </p:sp>
-      <p:sp>
-        <p:nvSpPr>
-          <p:cNvPr id="6" name="Rectangle 5"/>
-          <p:cNvSpPr/>
-          <p:nvPr/>
-        </p:nvSpPr>
-        <p:spPr>
-          <a:xfrm>
-            <a:off x="1619250" y="3314700"/>
-            <a:ext cx="8953500" cy="38100"/>
-          </a:xfrm>
-          <a:prstGeom prst="rect">
-            <a:avLst/>
-          </a:prstGeom>
-          <a:solidFill>
-            <a:srgbClr val="DDE5EE"/>
-          </a:solidFill>
-          <a:ln>
-            <a:noFill/>
-          </a:ln>
-          <a:effectLst/>
-        </p:spPr>
-        <p:style>
-          <a:lnRef idx="1">
-            <a:schemeClr val="accent1"/>
-          </a:lnRef>
-          <a:fillRef idx="3">
-            <a:schemeClr val="accent1"/>
-          </a:fillRef>
-          <a:effectRef idx="2">
-            <a:schemeClr val="accent1"/>
-          </a:effectRef>
-          <a:fontRef idx="minor">
-            <a:schemeClr val="lt1"/>
-          </a:fontRef>
-        </p:style>
-        <p:txBody>
-          <a:bodyPr rtlCol="0" anchor="ctr"/>
-          <a:lstStyle/>
-          <a:p>
-            <a:pPr algn="ctr"/>
-          </a:p>
-        </p:txBody>
-      </p:sp>
-      <p:sp>
-        <p:nvSpPr>
-          <p:cNvPr id="7" name="Rounded Rectangle 6"/>
-          <p:cNvSpPr/>
-          <p:nvPr/>
-        </p:nvSpPr>
-        <p:spPr>
-          <a:xfrm>
-            <a:off x="1514475" y="3228975"/>
-            <a:ext cx="209550" cy="209550"/>
-          </a:xfrm>
-          <a:prstGeom prst="roundRect">
-            <a:avLst>
-              <a:gd name="adj" fmla="val 8000"/>
-            </a:avLst>
-          </a:prstGeom>
-          <a:solidFill>
-            <a:srgbClr val="2563EB"/>
-          </a:solidFill>
-          <a:ln>
-            <a:noFill/>
-          </a:ln>
-          <a:effectLst/>
-        </p:spPr>
-        <p:style>
-          <a:lnRef idx="1">
-            <a:schemeClr val="accent1"/>
-          </a:lnRef>
-          <a:fillRef idx="3">
-            <a:schemeClr val="accent1"/>
-          </a:fillRef>
-          <a:effectRef idx="2">
-            <a:schemeClr val="accent1"/>
-          </a:effectRef>
-          <a:fontRef idx="minor">
-            <a:schemeClr val="lt1"/>
-          </a:fontRef>
-        </p:style>
-        <p:txBody>
-          <a:bodyPr rtlCol="0" anchor="ctr"/>
-          <a:lstStyle/>
-          <a:p>
-            <a:pPr algn="ctr"/>
-          </a:p>
-        </p:txBody>
-      </p:sp>
-      <p:sp>
-        <p:nvSpPr>
-          <p:cNvPr id="8" name="Rounded Rectangle 7"/>
-          <p:cNvSpPr/>
-          <p:nvPr/>
-        </p:nvSpPr>
-        <p:spPr>
-          <a:xfrm>
-            <a:off x="190500" y="1905000"/>
-            <a:ext cx="2857500" cy="1123950"/>
-          </a:xfrm>
-          <a:prstGeom prst="roundRect">
-            <a:avLst>
-              <a:gd name="adj" fmla="val 8000"/>
-            </a:avLst>
-          </a:prstGeom>
-          <a:solidFill>
-            <a:srgbClr val="F1F5F9"/>
-          </a:solidFill>
-          <a:ln>
-            <a:noFill/>
-          </a:ln>
-          <a:effectLst/>
-        </p:spPr>
-        <p:style>
-          <a:lnRef idx="1">
-            <a:schemeClr val="accent1"/>
-          </a:lnRef>
-          <a:fillRef idx="3">
-            <a:schemeClr val="accent1"/>
-          </a:fillRef>
-          <a:effectRef idx="2">
-            <a:schemeClr val="accent1"/>
-          </a:effectRef>
-          <a:fontRef idx="minor">
-            <a:schemeClr val="lt1"/>
-          </a:fontRef>
-        </p:style>
-        <p:txBody>
-          <a:bodyPr rtlCol="0" anchor="ctr"/>
-          <a:lstStyle/>
-          <a:p>
-            <a:pPr algn="ctr"/>
-          </a:p>
-        </p:txBody>
-      </p:sp>
-      <p:sp>
-        <p:nvSpPr>
-          <p:cNvPr id="9" name="Rectangle 8"/>
-          <p:cNvSpPr/>
-          <p:nvPr/>
-        </p:nvSpPr>
-        <p:spPr>
-          <a:xfrm>
-            <a:off x="190500" y="1905000"/>
-            <a:ext cx="2857500" cy="38100"/>
-          </a:xfrm>
-          <a:prstGeom prst="rect">
-            <a:avLst/>
-          </a:prstGeom>
-          <a:solidFill>
-            <a:srgbClr val="2563EB"/>
-          </a:solidFill>
-          <a:ln>
-            <a:noFill/>
-          </a:ln>
-          <a:effectLst/>
-        </p:spPr>
-        <p:style>
-          <a:lnRef idx="1">
-            <a:schemeClr val="accent1"/>
-          </a:lnRef>
-          <a:fillRef idx="3">
-            <a:schemeClr val="accent1"/>
-          </a:fillRef>
-          <a:effectRef idx="2">
-            <a:schemeClr val="accent1"/>
-          </a:effectRef>
-          <a:fontRef idx="minor">
-            <a:schemeClr val="lt1"/>
-          </a:fontRef>
-        </p:style>
-        <p:txBody>
-          <a:bodyPr rtlCol="0" anchor="ctr"/>
-          <a:lstStyle/>
-          <a:p>
-            <a:pPr algn="ctr"/>
-          </a:p>
-        </p:txBody>
-      </p:sp>
-      <p:sp>
-        <p:nvSpPr>
-          <p:cNvPr id="10" name="TextBox 9"/>
-          <p:cNvSpPr txBox="1"/>
-          <p:nvPr/>
-        </p:nvSpPr>
-        <p:spPr>
-          <a:xfrm>
-            <a:off x="285750" y="2000250"/>
-            <a:ext cx="2667000" cy="285750"/>
-          </a:xfrm>
-          <a:prstGeom prst="rect">
-            <a:avLst/>
-          </a:prstGeom>
-          <a:noFill/>
-        </p:spPr>
-        <p:txBody>
-          <a:bodyPr wrap="square" anchor="ctr">
-            <a:spAutoFit/>
-          </a:bodyPr>
-          <a:lstStyle/>
-          <a:p>
-            <a:pPr algn="ctr">
-              <a:lnSpc>
-                <a:spcPct val="100000"/>
-              </a:lnSpc>
-            </a:pPr>
-            <a:r>
-              <a:rPr sz="1400" b="1">
-                <a:solidFill>
-                  <a:srgbClr val="2563EB"/>
-                </a:solidFill>
-                <a:latin typeface="PingFang SC"/>
-              </a:rPr>
-              <a:t>任务完成</a:t>
-            </a:r>
-          </a:p>
-        </p:txBody>
-      </p:sp>
-      <p:sp>
-        <p:nvSpPr>
-          <p:cNvPr id="11" name="TextBox 10"/>
-          <p:cNvSpPr txBox="1"/>
-          <p:nvPr/>
-        </p:nvSpPr>
-        <p:spPr>
-          <a:xfrm>
-            <a:off x="285750" y="2305050"/>
-            <a:ext cx="2667000" cy="666750"/>
-          </a:xfrm>
-          <a:prstGeom prst="rect">
-            <a:avLst/>
-          </a:prstGeom>
-          <a:noFill/>
-        </p:spPr>
-        <p:txBody>
-          <a:bodyPr wrap="square" anchor="ctr">
-            <a:spAutoFit/>
-          </a:bodyPr>
-          <a:lstStyle/>
-          <a:p>
-            <a:pPr algn="l">
-              <a:lnSpc>
-                <a:spcPct val="105000"/>
-              </a:lnSpc>
-            </a:pPr>
-            <a:r>
-              <a:rPr sz="1050" b="0">
-                <a:solidFill>
-                  <a:srgbClr val="475569"/>
-                </a:solidFill>
-                <a:latin typeface="PingFang SC"/>
-              </a:rPr>
-              <a:t>提取候选</a:t>
-            </a:r>
-          </a:p>
-        </p:txBody>
-      </p:sp>
-      <p:sp>
-        <p:nvSpPr>
-          <p:cNvPr id="12" name="Rounded Rectangle 11"/>
-          <p:cNvSpPr/>
-          <p:nvPr/>
-        </p:nvSpPr>
-        <p:spPr>
-          <a:xfrm>
-            <a:off x="3752850" y="3228975"/>
-            <a:ext cx="209550" cy="209550"/>
-          </a:xfrm>
-          <a:prstGeom prst="roundRect">
-            <a:avLst>
-              <a:gd name="adj" fmla="val 8000"/>
-            </a:avLst>
-          </a:prstGeom>
-          <a:solidFill>
-            <a:srgbClr val="14B8A6"/>
-          </a:solidFill>
-          <a:ln>
-            <a:noFill/>
-          </a:ln>
-          <a:effectLst/>
-        </p:spPr>
-        <p:style>
-          <a:lnRef idx="1">
-            <a:schemeClr val="accent1"/>
-          </a:lnRef>
-          <a:fillRef idx="3">
-            <a:schemeClr val="accent1"/>
-          </a:fillRef>
-          <a:effectRef idx="2">
-            <a:schemeClr val="accent1"/>
-          </a:effectRef>
-          <a:fontRef idx="minor">
-            <a:schemeClr val="lt1"/>
-          </a:fontRef>
-        </p:style>
-        <p:txBody>
-          <a:bodyPr rtlCol="0" anchor="ctr"/>
-          <a:lstStyle/>
-          <a:p>
-            <a:pPr algn="ctr"/>
-          </a:p>
-        </p:txBody>
-      </p:sp>
-      <p:sp>
-        <p:nvSpPr>
-          <p:cNvPr id="13" name="Rounded Rectangle 12"/>
-          <p:cNvSpPr/>
-          <p:nvPr/>
-        </p:nvSpPr>
-        <p:spPr>
-          <a:xfrm>
-            <a:off x="2428875" y="3619500"/>
-            <a:ext cx="2857500" cy="1123950"/>
-          </a:xfrm>
-          <a:prstGeom prst="roundRect">
-            <a:avLst>
-              <a:gd name="adj" fmla="val 8000"/>
-            </a:avLst>
-          </a:prstGeom>
-          <a:solidFill>
-            <a:srgbClr val="F1F5F9"/>
-          </a:solidFill>
-          <a:ln>
-            <a:noFill/>
-          </a:ln>
-          <a:effectLst/>
-        </p:spPr>
-        <p:style>
-          <a:lnRef idx="1">
-            <a:schemeClr val="accent1"/>
-          </a:lnRef>
-          <a:fillRef idx="3">
-            <a:schemeClr val="accent1"/>
-          </a:fillRef>
-          <a:effectRef idx="2">
-            <a:schemeClr val="accent1"/>
-          </a:effectRef>
-          <a:fontRef idx="minor">
-            <a:schemeClr val="lt1"/>
-          </a:fontRef>
-        </p:style>
-        <p:txBody>
-          <a:bodyPr rtlCol="0" anchor="ctr"/>
-          <a:lstStyle/>
-          <a:p>
-            <a:pPr algn="ctr"/>
-          </a:p>
-        </p:txBody>
-      </p:sp>
-      <p:sp>
-        <p:nvSpPr>
-          <p:cNvPr id="14" name="Rectangle 13"/>
-          <p:cNvSpPr/>
-          <p:nvPr/>
-        </p:nvSpPr>
-        <p:spPr>
-          <a:xfrm>
-            <a:off x="2428875" y="3619500"/>
-            <a:ext cx="2857500" cy="38100"/>
-          </a:xfrm>
-          <a:prstGeom prst="rect">
-            <a:avLst/>
-          </a:prstGeom>
-          <a:solidFill>
-            <a:srgbClr val="14B8A6"/>
-          </a:solidFill>
-          <a:ln>
-            <a:noFill/>
-          </a:ln>
-          <a:effectLst/>
-        </p:spPr>
-        <p:style>
-          <a:lnRef idx="1">
-            <a:schemeClr val="accent1"/>
-          </a:lnRef>
-          <a:fillRef idx="3">
-            <a:schemeClr val="accent1"/>
-          </a:fillRef>
-          <a:effectRef idx="2">
-            <a:schemeClr val="accent1"/>
-          </a:effectRef>
-          <a:fontRef idx="minor">
-            <a:schemeClr val="lt1"/>
-          </a:fontRef>
-        </p:style>
-        <p:txBody>
-          <a:bodyPr rtlCol="0" anchor="ctr"/>
-          <a:lstStyle/>
-          <a:p>
-            <a:pPr algn="ctr"/>
-          </a:p>
-        </p:txBody>
-      </p:sp>
-      <p:sp>
-        <p:nvSpPr>
-          <p:cNvPr id="15" name="TextBox 14"/>
-          <p:cNvSpPr txBox="1"/>
-          <p:nvPr/>
-        </p:nvSpPr>
-        <p:spPr>
-          <a:xfrm>
-            <a:off x="2524125" y="3714750"/>
-            <a:ext cx="2667000" cy="285750"/>
-          </a:xfrm>
-          <a:prstGeom prst="rect">
-            <a:avLst/>
-          </a:prstGeom>
-          <a:noFill/>
-        </p:spPr>
-        <p:txBody>
-          <a:bodyPr wrap="square" anchor="ctr">
-            <a:spAutoFit/>
-          </a:bodyPr>
-          <a:lstStyle/>
-          <a:p>
-            <a:pPr algn="ctr">
-              <a:lnSpc>
-                <a:spcPct val="100000"/>
-              </a:lnSpc>
-            </a:pPr>
-            <a:r>
-              <a:rPr sz="1400" b="1">
-                <a:solidFill>
-                  <a:srgbClr val="14B8A6"/>
-                </a:solidFill>
-                <a:latin typeface="PingFang SC"/>
-              </a:rPr>
-              <a:t>写入校验</a:t>
-            </a:r>
-          </a:p>
-        </p:txBody>
-      </p:sp>
-      <p:sp>
-        <p:nvSpPr>
-          <p:cNvPr id="16" name="TextBox 15"/>
-          <p:cNvSpPr txBox="1"/>
-          <p:nvPr/>
-        </p:nvSpPr>
-        <p:spPr>
-          <a:xfrm>
-            <a:off x="2524125" y="4019550"/>
-            <a:ext cx="2667000" cy="666750"/>
-          </a:xfrm>
-          <a:prstGeom prst="rect">
-            <a:avLst/>
-          </a:prstGeom>
-          <a:noFill/>
-        </p:spPr>
-        <p:txBody>
-          <a:bodyPr wrap="square" anchor="ctr">
-            <a:spAutoFit/>
-          </a:bodyPr>
-          <a:lstStyle/>
-          <a:p>
-            <a:pPr algn="l">
-              <a:lnSpc>
-                <a:spcPct val="105000"/>
-              </a:lnSpc>
-            </a:pPr>
-            <a:r>
-              <a:rPr sz="1050" b="0">
-                <a:solidFill>
-                  <a:srgbClr val="475569"/>
-                </a:solidFill>
-                <a:latin typeface="PingFang SC"/>
-              </a:rPr>
-              <a:t>防污染(置信+来源)</a:t>
-            </a:r>
-          </a:p>
-        </p:txBody>
-      </p:sp>
-      <p:sp>
-        <p:nvSpPr>
-          <p:cNvPr id="17" name="Rounded Rectangle 16"/>
-          <p:cNvSpPr/>
-          <p:nvPr/>
-        </p:nvSpPr>
-        <p:spPr>
-          <a:xfrm>
-            <a:off x="5991225" y="3228975"/>
-            <a:ext cx="209550" cy="209550"/>
-          </a:xfrm>
-          <a:prstGeom prst="roundRect">
-            <a:avLst>
-              <a:gd name="adj" fmla="val 8000"/>
-            </a:avLst>
-          </a:prstGeom>
-          <a:solidFill>
-            <a:srgbClr val="8B5CF6"/>
-          </a:solidFill>
-          <a:ln>
-            <a:noFill/>
-          </a:ln>
-          <a:effectLst/>
-        </p:spPr>
-        <p:style>
-          <a:lnRef idx="1">
-            <a:schemeClr val="accent1"/>
-          </a:lnRef>
-          <a:fillRef idx="3">
-            <a:schemeClr val="accent1"/>
-          </a:fillRef>
-          <a:effectRef idx="2">
-            <a:schemeClr val="accent1"/>
-          </a:effectRef>
-          <a:fontRef idx="minor">
-            <a:schemeClr val="lt1"/>
-          </a:fontRef>
-        </p:style>
-        <p:txBody>
-          <a:bodyPr rtlCol="0" anchor="ctr"/>
-          <a:lstStyle/>
-          <a:p>
-            <a:pPr algn="ctr"/>
-          </a:p>
-        </p:txBody>
-      </p:sp>
-      <p:sp>
-        <p:nvSpPr>
-          <p:cNvPr id="18" name="Rounded Rectangle 17"/>
-          <p:cNvSpPr/>
-          <p:nvPr/>
-        </p:nvSpPr>
-        <p:spPr>
-          <a:xfrm>
-            <a:off x="4667250" y="1905000"/>
-            <a:ext cx="2857500" cy="1123950"/>
-          </a:xfrm>
-          <a:prstGeom prst="roundRect">
-            <a:avLst>
-              <a:gd name="adj" fmla="val 8000"/>
-            </a:avLst>
-          </a:prstGeom>
-          <a:solidFill>
-            <a:srgbClr val="F1F5F9"/>
-          </a:solidFill>
-          <a:ln>
-            <a:noFill/>
-          </a:ln>
-          <a:effectLst/>
-        </p:spPr>
-        <p:style>
-          <a:lnRef idx="1">
-            <a:schemeClr val="accent1"/>
-          </a:lnRef>
-          <a:fillRef idx="3">
-            <a:schemeClr val="accent1"/>
-          </a:fillRef>
-          <a:effectRef idx="2">
-            <a:schemeClr val="accent1"/>
-          </a:effectRef>
-          <a:fontRef idx="minor">
-            <a:schemeClr val="lt1"/>
-          </a:fontRef>
-        </p:style>
-        <p:txBody>
-          <a:bodyPr rtlCol="0" anchor="ctr"/>
-          <a:lstStyle/>
-          <a:p>
-            <a:pPr algn="ctr"/>
-          </a:p>
-        </p:txBody>
-      </p:sp>
-      <p:sp>
-        <p:nvSpPr>
-          <p:cNvPr id="19" name="Rectangle 18"/>
-          <p:cNvSpPr/>
-          <p:nvPr/>
-        </p:nvSpPr>
-        <p:spPr>
-          <a:xfrm>
-            <a:off x="4667250" y="1905000"/>
-            <a:ext cx="2857500" cy="38100"/>
-          </a:xfrm>
-          <a:prstGeom prst="rect">
-            <a:avLst/>
-          </a:prstGeom>
-          <a:solidFill>
-            <a:srgbClr val="8B5CF6"/>
-          </a:solidFill>
-          <a:ln>
-            <a:noFill/>
-          </a:ln>
-          <a:effectLst/>
-        </p:spPr>
-        <p:style>
-          <a:lnRef idx="1">
-            <a:schemeClr val="accent1"/>
-          </a:lnRef>
-          <a:fillRef idx="3">
-            <a:schemeClr val="accent1"/>
-          </a:fillRef>
-          <a:effectRef idx="2">
-            <a:schemeClr val="accent1"/>
-          </a:effectRef>
-          <a:fontRef idx="minor">
-            <a:schemeClr val="lt1"/>
-          </a:fontRef>
-        </p:style>
-        <p:txBody>
-          <a:bodyPr rtlCol="0" anchor="ctr"/>
-          <a:lstStyle/>
-          <a:p>
-            <a:pPr algn="ctr"/>
-          </a:p>
-        </p:txBody>
-      </p:sp>
-      <p:sp>
-        <p:nvSpPr>
-          <p:cNvPr id="20" name="TextBox 19"/>
-          <p:cNvSpPr txBox="1"/>
-          <p:nvPr/>
-        </p:nvSpPr>
-        <p:spPr>
-          <a:xfrm>
-            <a:off x="4762500" y="2000250"/>
-            <a:ext cx="2667000" cy="285750"/>
-          </a:xfrm>
-          <a:prstGeom prst="rect">
-            <a:avLst/>
-          </a:prstGeom>
-          <a:noFill/>
-        </p:spPr>
-        <p:txBody>
-          <a:bodyPr wrap="square" anchor="ctr">
-            <a:spAutoFit/>
-          </a:bodyPr>
-          <a:lstStyle/>
-          <a:p>
-            <a:pPr algn="ctr">
-              <a:lnSpc>
-                <a:spcPct val="100000"/>
-              </a:lnSpc>
-            </a:pPr>
-            <a:r>
-              <a:rPr sz="1400" b="1">
-                <a:solidFill>
-                  <a:srgbClr val="8B5CF6"/>
-                </a:solidFill>
-                <a:latin typeface="PingFang SC"/>
-              </a:rPr>
-              <a:t>检索召回</a:t>
-            </a:r>
-          </a:p>
-        </p:txBody>
-      </p:sp>
-      <p:sp>
-        <p:nvSpPr>
-          <p:cNvPr id="21" name="TextBox 20"/>
-          <p:cNvSpPr txBox="1"/>
-          <p:nvPr/>
-        </p:nvSpPr>
-        <p:spPr>
-          <a:xfrm>
-            <a:off x="4762500" y="2305050"/>
-            <a:ext cx="2667000" cy="666750"/>
-          </a:xfrm>
-          <a:prstGeom prst="rect">
-            <a:avLst/>
-          </a:prstGeom>
-          <a:noFill/>
-        </p:spPr>
-        <p:txBody>
-          <a:bodyPr wrap="square" anchor="ctr">
-            <a:spAutoFit/>
-          </a:bodyPr>
-          <a:lstStyle/>
-          <a:p>
-            <a:pPr algn="l">
-              <a:lnSpc>
-                <a:spcPct val="105000"/>
-              </a:lnSpc>
-            </a:pPr>
-            <a:r>
-              <a:rPr sz="1050" b="0">
-                <a:solidFill>
-                  <a:srgbClr val="475569"/>
-                </a:solidFill>
-                <a:latin typeface="PingFang SC"/>
-              </a:rPr>
-              <a:t>关键词/相似</a:t>
-            </a:r>
-          </a:p>
-        </p:txBody>
-      </p:sp>
-      <p:sp>
-        <p:nvSpPr>
-          <p:cNvPr id="22" name="Rounded Rectangle 21"/>
-          <p:cNvSpPr/>
-          <p:nvPr/>
-        </p:nvSpPr>
-        <p:spPr>
-          <a:xfrm>
-            <a:off x="8229600" y="3228975"/>
-            <a:ext cx="209550" cy="209550"/>
-          </a:xfrm>
-          <a:prstGeom prst="roundRect">
-            <a:avLst>
-              <a:gd name="adj" fmla="val 8000"/>
-            </a:avLst>
-          </a:prstGeom>
-          <a:solidFill>
-            <a:srgbClr val="F59E0B"/>
-          </a:solidFill>
-          <a:ln>
-            <a:noFill/>
-          </a:ln>
-          <a:effectLst/>
-        </p:spPr>
-        <p:style>
-          <a:lnRef idx="1">
-            <a:schemeClr val="accent1"/>
-          </a:lnRef>
-          <a:fillRef idx="3">
-            <a:schemeClr val="accent1"/>
-          </a:fillRef>
-          <a:effectRef idx="2">
-            <a:schemeClr val="accent1"/>
-          </a:effectRef>
-          <a:fontRef idx="minor">
-            <a:schemeClr val="lt1"/>
-          </a:fontRef>
-        </p:style>
-        <p:txBody>
-          <a:bodyPr rtlCol="0" anchor="ctr"/>
-          <a:lstStyle/>
-          <a:p>
-            <a:pPr algn="ctr"/>
-          </a:p>
-        </p:txBody>
-      </p:sp>
-      <p:sp>
-        <p:nvSpPr>
-          <p:cNvPr id="23" name="Rounded Rectangle 22"/>
-          <p:cNvSpPr/>
-          <p:nvPr/>
-        </p:nvSpPr>
-        <p:spPr>
-          <a:xfrm>
-            <a:off x="6905625" y="3619500"/>
-            <a:ext cx="2857500" cy="1123950"/>
-          </a:xfrm>
-          <a:prstGeom prst="roundRect">
-            <a:avLst>
-              <a:gd name="adj" fmla="val 8000"/>
-            </a:avLst>
-          </a:prstGeom>
-          <a:solidFill>
-            <a:srgbClr val="F1F5F9"/>
-          </a:solidFill>
-          <a:ln>
-            <a:noFill/>
-          </a:ln>
-          <a:effectLst/>
-        </p:spPr>
-        <p:style>
-          <a:lnRef idx="1">
-            <a:schemeClr val="accent1"/>
-          </a:lnRef>
-          <a:fillRef idx="3">
-            <a:schemeClr val="accent1"/>
-          </a:fillRef>
-          <a:effectRef idx="2">
-            <a:schemeClr val="accent1"/>
-          </a:effectRef>
-          <a:fontRef idx="minor">
-            <a:schemeClr val="lt1"/>
-          </a:fontRef>
-        </p:style>
-        <p:txBody>
-          <a:bodyPr rtlCol="0" anchor="ctr"/>
-          <a:lstStyle/>
-          <a:p>
-            <a:pPr algn="ctr"/>
-          </a:p>
-        </p:txBody>
-      </p:sp>
-      <p:sp>
-        <p:nvSpPr>
-          <p:cNvPr id="24" name="Rectangle 23"/>
-          <p:cNvSpPr/>
-          <p:nvPr/>
-        </p:nvSpPr>
-        <p:spPr>
-          <a:xfrm>
-            <a:off x="6905625" y="3619500"/>
-            <a:ext cx="2857500" cy="38100"/>
-          </a:xfrm>
-          <a:prstGeom prst="rect">
-            <a:avLst/>
-          </a:prstGeom>
-          <a:solidFill>
-            <a:srgbClr val="F59E0B"/>
-          </a:solidFill>
-          <a:ln>
-            <a:noFill/>
-          </a:ln>
-          <a:effectLst/>
-        </p:spPr>
-        <p:style>
-          <a:lnRef idx="1">
-            <a:schemeClr val="accent1"/>
-          </a:lnRef>
-          <a:fillRef idx="3">
-            <a:schemeClr val="accent1"/>
-          </a:fillRef>
-          <a:effectRef idx="2">
-            <a:schemeClr val="accent1"/>
-          </a:effectRef>
-          <a:fontRef idx="minor">
-            <a:schemeClr val="lt1"/>
-          </a:fontRef>
-        </p:style>
-        <p:txBody>
-          <a:bodyPr rtlCol="0" anchor="ctr"/>
-          <a:lstStyle/>
-          <a:p>
-            <a:pPr algn="ctr"/>
-          </a:p>
-        </p:txBody>
-      </p:sp>
-      <p:sp>
-        <p:nvSpPr>
-          <p:cNvPr id="25" name="TextBox 24"/>
-          <p:cNvSpPr txBox="1"/>
-          <p:nvPr/>
-        </p:nvSpPr>
-        <p:spPr>
-          <a:xfrm>
-            <a:off x="7000875" y="3714750"/>
-            <a:ext cx="2667000" cy="285750"/>
-          </a:xfrm>
-          <a:prstGeom prst="rect">
-            <a:avLst/>
-          </a:prstGeom>
-          <a:noFill/>
-        </p:spPr>
-        <p:txBody>
-          <a:bodyPr wrap="square" anchor="ctr">
-            <a:spAutoFit/>
-          </a:bodyPr>
-          <a:lstStyle/>
-          <a:p>
-            <a:pPr algn="ctr">
-              <a:lnSpc>
-                <a:spcPct val="100000"/>
-              </a:lnSpc>
-            </a:pPr>
-            <a:r>
-              <a:rPr sz="1400" b="1">
-                <a:solidFill>
-                  <a:srgbClr val="F59E0B"/>
-                </a:solidFill>
-                <a:latin typeface="PingFang SC"/>
-              </a:rPr>
-              <a:t>失败触发</a:t>
-            </a:r>
-          </a:p>
-        </p:txBody>
-      </p:sp>
-      <p:sp>
-        <p:nvSpPr>
-          <p:cNvPr id="26" name="TextBox 25"/>
-          <p:cNvSpPr txBox="1"/>
-          <p:nvPr/>
-        </p:nvSpPr>
-        <p:spPr>
-          <a:xfrm>
-            <a:off x="7000875" y="4019550"/>
-            <a:ext cx="2667000" cy="666750"/>
-          </a:xfrm>
-          <a:prstGeom prst="rect">
-            <a:avLst/>
-          </a:prstGeom>
-          <a:noFill/>
-        </p:spPr>
-        <p:txBody>
-          <a:bodyPr wrap="square" anchor="ctr">
-            <a:spAutoFit/>
-          </a:bodyPr>
-          <a:lstStyle/>
-          <a:p>
-            <a:pPr algn="l">
-              <a:lnSpc>
-                <a:spcPct val="105000"/>
-              </a:lnSpc>
-            </a:pPr>
-            <a:r>
-              <a:rPr sz="1050" b="0">
-                <a:solidFill>
-                  <a:srgbClr val="475569"/>
-                </a:solidFill>
-                <a:latin typeface="PingFang SC"/>
-              </a:rPr>
-              <a:t>更新过期条目</a:t>
-            </a:r>
-          </a:p>
-        </p:txBody>
-      </p:sp>
-      <p:sp>
-        <p:nvSpPr>
-          <p:cNvPr id="27" name="Rounded Rectangle 26"/>
-          <p:cNvSpPr/>
-          <p:nvPr/>
-        </p:nvSpPr>
-        <p:spPr>
-          <a:xfrm>
-            <a:off x="10467975" y="3228975"/>
-            <a:ext cx="209550" cy="209550"/>
-          </a:xfrm>
-          <a:prstGeom prst="roundRect">
-            <a:avLst>
-              <a:gd name="adj" fmla="val 8000"/>
-            </a:avLst>
-          </a:prstGeom>
-          <a:solidFill>
-            <a:srgbClr val="34D399"/>
-          </a:solidFill>
-          <a:ln>
-            <a:noFill/>
-          </a:ln>
-          <a:effectLst/>
-        </p:spPr>
-        <p:style>
-          <a:lnRef idx="1">
-            <a:schemeClr val="accent1"/>
-          </a:lnRef>
-          <a:fillRef idx="3">
-            <a:schemeClr val="accent1"/>
-          </a:fillRef>
-          <a:effectRef idx="2">
-            <a:schemeClr val="accent1"/>
-          </a:effectRef>
-          <a:fontRef idx="minor">
-            <a:schemeClr val="lt1"/>
-          </a:fontRef>
-        </p:style>
-        <p:txBody>
-          <a:bodyPr rtlCol="0" anchor="ctr"/>
-          <a:lstStyle/>
-          <a:p>
-            <a:pPr algn="ctr"/>
-          </a:p>
-        </p:txBody>
-      </p:sp>
-      <p:sp>
-        <p:nvSpPr>
-          <p:cNvPr id="28" name="Rounded Rectangle 27"/>
-          <p:cNvSpPr/>
-          <p:nvPr/>
-        </p:nvSpPr>
-        <p:spPr>
-          <a:xfrm>
-            <a:off x="9144000" y="1905000"/>
-            <a:ext cx="2857500" cy="1123950"/>
-          </a:xfrm>
-          <a:prstGeom prst="roundRect">
-            <a:avLst>
-              <a:gd name="adj" fmla="val 8000"/>
-            </a:avLst>
-          </a:prstGeom>
-          <a:solidFill>
-            <a:srgbClr val="F1F5F9"/>
-          </a:solidFill>
-          <a:ln>
-            <a:noFill/>
-          </a:ln>
-          <a:effectLst/>
-        </p:spPr>
-        <p:style>
-          <a:lnRef idx="1">
-            <a:schemeClr val="accent1"/>
-          </a:lnRef>
-          <a:fillRef idx="3">
-            <a:schemeClr val="accent1"/>
-          </a:fillRef>
-          <a:effectRef idx="2">
-            <a:schemeClr val="accent1"/>
-          </a:effectRef>
-          <a:fontRef idx="minor">
-            <a:schemeClr val="lt1"/>
-          </a:fontRef>
-        </p:style>
-        <p:txBody>
-          <a:bodyPr rtlCol="0" anchor="ctr"/>
-          <a:lstStyle/>
-          <a:p>
-            <a:pPr algn="ctr"/>
-          </a:p>
-        </p:txBody>
-      </p:sp>
-      <p:sp>
-        <p:nvSpPr>
-          <p:cNvPr id="29" name="Rectangle 28"/>
-          <p:cNvSpPr/>
-          <p:nvPr/>
-        </p:nvSpPr>
-        <p:spPr>
-          <a:xfrm>
-            <a:off x="9144000" y="1905000"/>
-            <a:ext cx="2857500" cy="38100"/>
-          </a:xfrm>
-          <a:prstGeom prst="rect">
-            <a:avLst/>
-          </a:prstGeom>
-          <a:solidFill>
-            <a:srgbClr val="34D399"/>
-          </a:solidFill>
-          <a:ln>
-            <a:noFill/>
-          </a:ln>
-          <a:effectLst/>
-        </p:spPr>
-        <p:style>
-          <a:lnRef idx="1">
-            <a:schemeClr val="accent1"/>
-          </a:lnRef>
-          <a:fillRef idx="3">
-            <a:schemeClr val="accent1"/>
-          </a:fillRef>
-          <a:effectRef idx="2">
-            <a:schemeClr val="accent1"/>
-          </a:effectRef>
-          <a:fontRef idx="minor">
-            <a:schemeClr val="lt1"/>
-          </a:fontRef>
-        </p:style>
-        <p:txBody>
-          <a:bodyPr rtlCol="0" anchor="ctr"/>
-          <a:lstStyle/>
-          <a:p>
-            <a:pPr algn="ctr"/>
-          </a:p>
-        </p:txBody>
-      </p:sp>
-      <p:sp>
-        <p:nvSpPr>
-          <p:cNvPr id="30" name="TextBox 29"/>
-          <p:cNvSpPr txBox="1"/>
-          <p:nvPr/>
-        </p:nvSpPr>
-        <p:spPr>
-          <a:xfrm>
-            <a:off x="9239250" y="2000250"/>
-            <a:ext cx="2667000" cy="285750"/>
-          </a:xfrm>
-          <a:prstGeom prst="rect">
-            <a:avLst/>
-          </a:prstGeom>
-          <a:noFill/>
-        </p:spPr>
-        <p:txBody>
-          <a:bodyPr wrap="square" anchor="ctr">
-            <a:spAutoFit/>
-          </a:bodyPr>
-          <a:lstStyle/>
-          <a:p>
-            <a:pPr algn="ctr">
-              <a:lnSpc>
-                <a:spcPct val="100000"/>
-              </a:lnSpc>
-            </a:pPr>
-            <a:r>
-              <a:rPr sz="1400" b="1">
-                <a:solidFill>
-                  <a:srgbClr val="34D399"/>
-                </a:solidFill>
-                <a:latin typeface="PingFang SC"/>
-              </a:rPr>
-              <a:t>定期运营</a:t>
-            </a:r>
-          </a:p>
-        </p:txBody>
-      </p:sp>
-      <p:sp>
-        <p:nvSpPr>
-          <p:cNvPr id="31" name="TextBox 30"/>
-          <p:cNvSpPr txBox="1"/>
-          <p:nvPr/>
-        </p:nvSpPr>
-        <p:spPr>
-          <a:xfrm>
-            <a:off x="9239250" y="2305050"/>
-            <a:ext cx="2667000" cy="666750"/>
-          </a:xfrm>
-          <a:prstGeom prst="rect">
-            <a:avLst/>
-          </a:prstGeom>
-          <a:noFill/>
-        </p:spPr>
-        <p:txBody>
-          <a:bodyPr wrap="square" anchor="ctr">
-            <a:spAutoFit/>
-          </a:bodyPr>
-          <a:lstStyle/>
-          <a:p>
-            <a:pPr algn="l">
-              <a:lnSpc>
-                <a:spcPct val="105000"/>
-              </a:lnSpc>
-            </a:pPr>
-            <a:r>
-              <a:rPr sz="1050" b="0">
-                <a:solidFill>
-                  <a:srgbClr val="475569"/>
-                </a:solidFill>
-                <a:latin typeface="PingFang SC"/>
-              </a:rPr>
-              <a:t>清理低质|记忆是运营出来的</a:t>
-            </a:r>
-          </a:p>
-        </p:txBody>
-      </p:sp>
-      <p:sp>
-        <p:nvSpPr>
-          <p:cNvPr id="32" name="TextBox 31"/>
-          <p:cNvSpPr txBox="1"/>
-          <p:nvPr/>
-        </p:nvSpPr>
-        <p:spPr>
-          <a:xfrm>
-            <a:off x="10287000" y="6534150"/>
-            <a:ext cx="1619250" cy="266700"/>
-          </a:xfrm>
-          <a:prstGeom prst="rect">
-            <a:avLst/>
-          </a:prstGeom>
-          <a:noFill/>
-        </p:spPr>
-        <p:txBody>
-          <a:bodyPr wrap="square" anchor="ctr">
-            <a:spAutoFit/>
-          </a:bodyPr>
-          <a:lstStyle/>
-          <a:p>
-            <a:pPr algn="r">
-              <a:lnSpc>
-                <a:spcPct val="100000"/>
-              </a:lnSpc>
-            </a:pPr>
-            <a:r>
               <a:rPr sz="900" b="0">
                 <a:solidFill>
                   <a:srgbClr val="94A3B8"/>
@@ -6206,7 +6167,7 @@
       </p:sp>
       <p:sp>
         <p:nvSpPr>
-          <p:cNvPr id="33" name="TextBox 32"/>
+          <p:cNvPr id="32" name="TextBox 31"/>
           <p:cNvSpPr txBox="1"/>
           <p:nvPr/>
         </p:nvSpPr>
@@ -11574,21 +11535,375 @@
                 </a:solidFill>
                 <a:latin typeface="PingFang SC"/>
               </a:rPr>
-              <a:t>search_long 检索实测,$ mem.add_long("项目约定:测试用 pytest", "wiki");$ mem.search_long("pytest");LongTermMemory(content='项目约定:测试用 pytest',confidence=0.8);# 命中按子串,生产换向量</a:t>
-            </a:r>
-          </a:p>
-        </p:txBody>
-      </p:sp>
-      <p:sp>
-        <p:nvSpPr>
-          <p:cNvPr id="5" name="TextBox 4"/>
+              <a:t>search_long 检索实测</a:t>
+            </a:r>
+          </a:p>
+        </p:txBody>
+      </p:sp>
+      <p:sp>
+        <p:nvSpPr>
+          <p:cNvPr id="5" name="Rounded Rectangle 4"/>
+          <p:cNvSpPr/>
+          <p:nvPr/>
+        </p:nvSpPr>
+        <p:spPr>
+          <a:xfrm>
+            <a:off x="1333500" y="1047750"/>
+            <a:ext cx="9525000" cy="2381250"/>
+          </a:xfrm>
+          <a:prstGeom prst="roundRect">
+            <a:avLst>
+              <a:gd name="adj" fmla="val 8000"/>
+            </a:avLst>
+          </a:prstGeom>
+          <a:solidFill>
+            <a:srgbClr val="0D1117"/>
+          </a:solidFill>
+          <a:ln>
+            <a:noFill/>
+          </a:ln>
+          <a:effectLst/>
+        </p:spPr>
+        <p:style>
+          <a:lnRef idx="1">
+            <a:schemeClr val="accent1"/>
+          </a:lnRef>
+          <a:fillRef idx="3">
+            <a:schemeClr val="accent1"/>
+          </a:fillRef>
+          <a:effectRef idx="2">
+            <a:schemeClr val="accent1"/>
+          </a:effectRef>
+          <a:fontRef idx="minor">
+            <a:schemeClr val="lt1"/>
+          </a:fontRef>
+        </p:style>
+        <p:txBody>
+          <a:bodyPr rtlCol="0" anchor="ctr"/>
+          <a:lstStyle/>
+          <a:p>
+            <a:pPr algn="ctr"/>
+          </a:p>
+        </p:txBody>
+      </p:sp>
+      <p:sp>
+        <p:nvSpPr>
+          <p:cNvPr id="6" name="Rectangle 5"/>
+          <p:cNvSpPr/>
+          <p:nvPr/>
+        </p:nvSpPr>
+        <p:spPr>
+          <a:xfrm>
+            <a:off x="1333500" y="1047750"/>
+            <a:ext cx="9525000" cy="381000"/>
+          </a:xfrm>
+          <a:prstGeom prst="rect">
+            <a:avLst/>
+          </a:prstGeom>
+          <a:solidFill>
+            <a:srgbClr val="1F2937"/>
+          </a:solidFill>
+          <a:ln>
+            <a:noFill/>
+          </a:ln>
+          <a:effectLst/>
+        </p:spPr>
+        <p:style>
+          <a:lnRef idx="1">
+            <a:schemeClr val="accent1"/>
+          </a:lnRef>
+          <a:fillRef idx="3">
+            <a:schemeClr val="accent1"/>
+          </a:fillRef>
+          <a:effectRef idx="2">
+            <a:schemeClr val="accent1"/>
+          </a:effectRef>
+          <a:fontRef idx="minor">
+            <a:schemeClr val="lt1"/>
+          </a:fontRef>
+        </p:style>
+        <p:txBody>
+          <a:bodyPr rtlCol="0" anchor="ctr"/>
+          <a:lstStyle/>
+          <a:p>
+            <a:pPr algn="ctr"/>
+          </a:p>
+        </p:txBody>
+      </p:sp>
+      <p:sp>
+        <p:nvSpPr>
+          <p:cNvPr id="7" name="Rounded Rectangle 6"/>
+          <p:cNvSpPr/>
+          <p:nvPr/>
+        </p:nvSpPr>
+        <p:spPr>
+          <a:xfrm>
+            <a:off x="1504950" y="1181100"/>
+            <a:ext cx="123825" cy="123825"/>
+          </a:xfrm>
+          <a:prstGeom prst="roundRect">
+            <a:avLst>
+              <a:gd name="adj" fmla="val 8000"/>
+            </a:avLst>
+          </a:prstGeom>
+          <a:solidFill>
+            <a:srgbClr val="F87171"/>
+          </a:solidFill>
+          <a:ln>
+            <a:noFill/>
+          </a:ln>
+          <a:effectLst/>
+        </p:spPr>
+        <p:style>
+          <a:lnRef idx="1">
+            <a:schemeClr val="accent1"/>
+          </a:lnRef>
+          <a:fillRef idx="3">
+            <a:schemeClr val="accent1"/>
+          </a:fillRef>
+          <a:effectRef idx="2">
+            <a:schemeClr val="accent1"/>
+          </a:effectRef>
+          <a:fontRef idx="minor">
+            <a:schemeClr val="lt1"/>
+          </a:fontRef>
+        </p:style>
+        <p:txBody>
+          <a:bodyPr rtlCol="0" anchor="ctr"/>
+          <a:lstStyle/>
+          <a:p>
+            <a:pPr algn="ctr"/>
+          </a:p>
+        </p:txBody>
+      </p:sp>
+      <p:sp>
+        <p:nvSpPr>
+          <p:cNvPr id="8" name="Rounded Rectangle 7"/>
+          <p:cNvSpPr/>
+          <p:nvPr/>
+        </p:nvSpPr>
+        <p:spPr>
+          <a:xfrm>
+            <a:off x="1752600" y="1181100"/>
+            <a:ext cx="123825" cy="123825"/>
+          </a:xfrm>
+          <a:prstGeom prst="roundRect">
+            <a:avLst>
+              <a:gd name="adj" fmla="val 8000"/>
+            </a:avLst>
+          </a:prstGeom>
+          <a:solidFill>
+            <a:srgbClr val="F59E0B"/>
+          </a:solidFill>
+          <a:ln>
+            <a:noFill/>
+          </a:ln>
+          <a:effectLst/>
+        </p:spPr>
+        <p:style>
+          <a:lnRef idx="1">
+            <a:schemeClr val="accent1"/>
+          </a:lnRef>
+          <a:fillRef idx="3">
+            <a:schemeClr val="accent1"/>
+          </a:fillRef>
+          <a:effectRef idx="2">
+            <a:schemeClr val="accent1"/>
+          </a:effectRef>
+          <a:fontRef idx="minor">
+            <a:schemeClr val="lt1"/>
+          </a:fontRef>
+        </p:style>
+        <p:txBody>
+          <a:bodyPr rtlCol="0" anchor="ctr"/>
+          <a:lstStyle/>
+          <a:p>
+            <a:pPr algn="ctr"/>
+          </a:p>
+        </p:txBody>
+      </p:sp>
+      <p:sp>
+        <p:nvSpPr>
+          <p:cNvPr id="9" name="Rounded Rectangle 8"/>
+          <p:cNvSpPr/>
+          <p:nvPr/>
+        </p:nvSpPr>
+        <p:spPr>
+          <a:xfrm>
+            <a:off x="2000250" y="1181100"/>
+            <a:ext cx="123825" cy="123825"/>
+          </a:xfrm>
+          <a:prstGeom prst="roundRect">
+            <a:avLst>
+              <a:gd name="adj" fmla="val 8000"/>
+            </a:avLst>
+          </a:prstGeom>
+          <a:solidFill>
+            <a:srgbClr val="34D399"/>
+          </a:solidFill>
+          <a:ln>
+            <a:noFill/>
+          </a:ln>
+          <a:effectLst/>
+        </p:spPr>
+        <p:style>
+          <a:lnRef idx="1">
+            <a:schemeClr val="accent1"/>
+          </a:lnRef>
+          <a:fillRef idx="3">
+            <a:schemeClr val="accent1"/>
+          </a:fillRef>
+          <a:effectRef idx="2">
+            <a:schemeClr val="accent1"/>
+          </a:effectRef>
+          <a:fontRef idx="minor">
+            <a:schemeClr val="lt1"/>
+          </a:fontRef>
+        </p:style>
+        <p:txBody>
+          <a:bodyPr rtlCol="0" anchor="ctr"/>
+          <a:lstStyle/>
+          <a:p>
+            <a:pPr algn="ctr"/>
+          </a:p>
+        </p:txBody>
+      </p:sp>
+      <p:sp>
+        <p:nvSpPr>
+          <p:cNvPr id="10" name="TextBox 9"/>
           <p:cNvSpPr txBox="1"/>
           <p:nvPr/>
         </p:nvSpPr>
         <p:spPr>
           <a:xfrm>
-            <a:off x="9334500" y="0"/>
-            <a:ext cx="2667000" cy="704850"/>
+            <a:off x="2381250" y="1047750"/>
+            <a:ext cx="8286750" cy="381000"/>
+          </a:xfrm>
+          <a:prstGeom prst="rect">
+            <a:avLst/>
+          </a:prstGeom>
+          <a:noFill/>
+        </p:spPr>
+        <p:txBody>
+          <a:bodyPr wrap="square" anchor="ctr">
+            <a:spAutoFit/>
+          </a:bodyPr>
+          <a:lstStyle/>
+          <a:p>
+            <a:pPr algn="l">
+              <a:lnSpc>
+                <a:spcPct val="100000"/>
+              </a:lnSpc>
+            </a:pPr>
+            <a:r>
+              <a:rPr sz="1100" b="0">
+                <a:solidFill>
+                  <a:srgbClr val="94A3B8"/>
+                </a:solidFill>
+                <a:latin typeface="PingFang SC"/>
+              </a:rPr>
+              <a:t>terminal — 平台实测</a:t>
+            </a:r>
+          </a:p>
+        </p:txBody>
+      </p:sp>
+      <p:sp>
+        <p:nvSpPr>
+          <p:cNvPr id="11" name="TextBox 10"/>
+          <p:cNvSpPr txBox="1"/>
+          <p:nvPr/>
+        </p:nvSpPr>
+        <p:spPr>
+          <a:xfrm>
+            <a:off x="1562100" y="1581150"/>
+            <a:ext cx="9067800" cy="1714500"/>
+          </a:xfrm>
+          <a:prstGeom prst="rect">
+            <a:avLst/>
+          </a:prstGeom>
+          <a:noFill/>
+        </p:spPr>
+        <p:txBody>
+          <a:bodyPr wrap="square">
+            <a:spAutoFit/>
+          </a:bodyPr>
+          <a:lstStyle/>
+          <a:p>
+            <a:pPr>
+              <a:lnSpc>
+                <a:spcPct val="115000"/>
+              </a:lnSpc>
+            </a:pPr>
+            <a:r>
+              <a:rPr sz="1300" b="1">
+                <a:solidFill>
+                  <a:srgbClr val="34D399"/>
+                </a:solidFill>
+                <a:latin typeface="Menlo"/>
+              </a:rPr>
+              <a:t>$ mem.add_long("项目约定:测试用 pytest", "wiki")</a:t>
+            </a:r>
+          </a:p>
+          <a:p>
+            <a:pPr>
+              <a:lnSpc>
+                <a:spcPct val="115000"/>
+              </a:lnSpc>
+            </a:pPr>
+            <a:r>
+              <a:rPr sz="1300" b="1">
+                <a:solidFill>
+                  <a:srgbClr val="34D399"/>
+                </a:solidFill>
+                <a:latin typeface="Menlo"/>
+              </a:rPr>
+              <a:t>$ mem.search_long("pytest")</a:t>
+            </a:r>
+          </a:p>
+          <a:p>
+            <a:pPr>
+              <a:lnSpc>
+                <a:spcPct val="115000"/>
+              </a:lnSpc>
+            </a:pPr>
+            <a:r>
+              <a:rPr sz="1300">
+                <a:solidFill>
+                  <a:srgbClr val="CBD5E1"/>
+                </a:solidFill>
+                <a:latin typeface="Menlo"/>
+              </a:rPr>
+              <a:t>LongTermMemory(content='项目约定:测试用 pytest',confidence=0.8)</a:t>
+            </a:r>
+          </a:p>
+          <a:p>
+            <a:pPr>
+              <a:lnSpc>
+                <a:spcPct val="115000"/>
+              </a:lnSpc>
+            </a:pPr>
+            <a:r>
+              <a:rPr sz="1300">
+                <a:solidFill>
+                  <a:srgbClr val="94A3B8"/>
+                </a:solidFill>
+                <a:latin typeface="Menlo"/>
+              </a:rPr>
+              <a:t># 命中按子串,生产换向量</a:t>
+            </a:r>
+          </a:p>
+        </p:txBody>
+      </p:sp>
+      <p:sp>
+        <p:nvSpPr>
+          <p:cNvPr id="12" name="TextBox 11"/>
+          <p:cNvSpPr txBox="1"/>
+          <p:nvPr/>
+        </p:nvSpPr>
+        <p:spPr>
+          <a:xfrm>
+            <a:off x="10287000" y="6534150"/>
+            <a:ext cx="1619250" cy="266700"/>
           </a:xfrm>
           <a:prstGeom prst="rect">
             <a:avLst/>
@@ -11607,351 +11922,6 @@
               </a:lnSpc>
             </a:pPr>
             <a:r>
-              <a:rPr sz="1100" b="0">
-                <a:solidFill>
-                  <a:srgbClr val="94A3B8"/>
-                </a:solidFill>
-                <a:latin typeface="PingFang SC"/>
-              </a:rPr>
-              <a:t>tests 真实输出</a:t>
-            </a:r>
-          </a:p>
-        </p:txBody>
-      </p:sp>
-      <p:sp>
-        <p:nvSpPr>
-          <p:cNvPr id="6" name="Rounded Rectangle 5"/>
-          <p:cNvSpPr/>
-          <p:nvPr/>
-        </p:nvSpPr>
-        <p:spPr>
-          <a:xfrm>
-            <a:off x="1333500" y="952500"/>
-            <a:ext cx="9525000" cy="5048250"/>
-          </a:xfrm>
-          <a:prstGeom prst="roundRect">
-            <a:avLst>
-              <a:gd name="adj" fmla="val 8000"/>
-            </a:avLst>
-          </a:prstGeom>
-          <a:solidFill>
-            <a:srgbClr val="0D1117"/>
-          </a:solidFill>
-          <a:ln>
-            <a:noFill/>
-          </a:ln>
-          <a:effectLst/>
-        </p:spPr>
-        <p:style>
-          <a:lnRef idx="1">
-            <a:schemeClr val="accent1"/>
-          </a:lnRef>
-          <a:fillRef idx="3">
-            <a:schemeClr val="accent1"/>
-          </a:fillRef>
-          <a:effectRef idx="2">
-            <a:schemeClr val="accent1"/>
-          </a:effectRef>
-          <a:fontRef idx="minor">
-            <a:schemeClr val="lt1"/>
-          </a:fontRef>
-        </p:style>
-        <p:txBody>
-          <a:bodyPr rtlCol="0" anchor="ctr"/>
-          <a:lstStyle/>
-          <a:p>
-            <a:pPr algn="ctr"/>
-          </a:p>
-        </p:txBody>
-      </p:sp>
-      <p:sp>
-        <p:nvSpPr>
-          <p:cNvPr id="7" name="Rectangle 6"/>
-          <p:cNvSpPr/>
-          <p:nvPr/>
-        </p:nvSpPr>
-        <p:spPr>
-          <a:xfrm>
-            <a:off x="1333500" y="952500"/>
-            <a:ext cx="9525000" cy="381000"/>
-          </a:xfrm>
-          <a:prstGeom prst="rect">
-            <a:avLst/>
-          </a:prstGeom>
-          <a:solidFill>
-            <a:srgbClr val="1F2937"/>
-          </a:solidFill>
-          <a:ln>
-            <a:noFill/>
-          </a:ln>
-          <a:effectLst/>
-        </p:spPr>
-        <p:style>
-          <a:lnRef idx="1">
-            <a:schemeClr val="accent1"/>
-          </a:lnRef>
-          <a:fillRef idx="3">
-            <a:schemeClr val="accent1"/>
-          </a:fillRef>
-          <a:effectRef idx="2">
-            <a:schemeClr val="accent1"/>
-          </a:effectRef>
-          <a:fontRef idx="minor">
-            <a:schemeClr val="lt1"/>
-          </a:fontRef>
-        </p:style>
-        <p:txBody>
-          <a:bodyPr rtlCol="0" anchor="ctr"/>
-          <a:lstStyle/>
-          <a:p>
-            <a:pPr algn="ctr"/>
-          </a:p>
-        </p:txBody>
-      </p:sp>
-      <p:sp>
-        <p:nvSpPr>
-          <p:cNvPr id="8" name="Rounded Rectangle 7"/>
-          <p:cNvSpPr/>
-          <p:nvPr/>
-        </p:nvSpPr>
-        <p:spPr>
-          <a:xfrm>
-            <a:off x="1504950" y="1085850"/>
-            <a:ext cx="123825" cy="123825"/>
-          </a:xfrm>
-          <a:prstGeom prst="roundRect">
-            <a:avLst>
-              <a:gd name="adj" fmla="val 8000"/>
-            </a:avLst>
-          </a:prstGeom>
-          <a:solidFill>
-            <a:srgbClr val="F87171"/>
-          </a:solidFill>
-          <a:ln>
-            <a:noFill/>
-          </a:ln>
-          <a:effectLst/>
-        </p:spPr>
-        <p:style>
-          <a:lnRef idx="1">
-            <a:schemeClr val="accent1"/>
-          </a:lnRef>
-          <a:fillRef idx="3">
-            <a:schemeClr val="accent1"/>
-          </a:fillRef>
-          <a:effectRef idx="2">
-            <a:schemeClr val="accent1"/>
-          </a:effectRef>
-          <a:fontRef idx="minor">
-            <a:schemeClr val="lt1"/>
-          </a:fontRef>
-        </p:style>
-        <p:txBody>
-          <a:bodyPr rtlCol="0" anchor="ctr"/>
-          <a:lstStyle/>
-          <a:p>
-            <a:pPr algn="ctr"/>
-          </a:p>
-        </p:txBody>
-      </p:sp>
-      <p:sp>
-        <p:nvSpPr>
-          <p:cNvPr id="9" name="Rounded Rectangle 8"/>
-          <p:cNvSpPr/>
-          <p:nvPr/>
-        </p:nvSpPr>
-        <p:spPr>
-          <a:xfrm>
-            <a:off x="1752600" y="1085850"/>
-            <a:ext cx="123825" cy="123825"/>
-          </a:xfrm>
-          <a:prstGeom prst="roundRect">
-            <a:avLst>
-              <a:gd name="adj" fmla="val 8000"/>
-            </a:avLst>
-          </a:prstGeom>
-          <a:solidFill>
-            <a:srgbClr val="F59E0B"/>
-          </a:solidFill>
-          <a:ln>
-            <a:noFill/>
-          </a:ln>
-          <a:effectLst/>
-        </p:spPr>
-        <p:style>
-          <a:lnRef idx="1">
-            <a:schemeClr val="accent1"/>
-          </a:lnRef>
-          <a:fillRef idx="3">
-            <a:schemeClr val="accent1"/>
-          </a:fillRef>
-          <a:effectRef idx="2">
-            <a:schemeClr val="accent1"/>
-          </a:effectRef>
-          <a:fontRef idx="minor">
-            <a:schemeClr val="lt1"/>
-          </a:fontRef>
-        </p:style>
-        <p:txBody>
-          <a:bodyPr rtlCol="0" anchor="ctr"/>
-          <a:lstStyle/>
-          <a:p>
-            <a:pPr algn="ctr"/>
-          </a:p>
-        </p:txBody>
-      </p:sp>
-      <p:sp>
-        <p:nvSpPr>
-          <p:cNvPr id="10" name="Rounded Rectangle 9"/>
-          <p:cNvSpPr/>
-          <p:nvPr/>
-        </p:nvSpPr>
-        <p:spPr>
-          <a:xfrm>
-            <a:off x="2000250" y="1085850"/>
-            <a:ext cx="123825" cy="123825"/>
-          </a:xfrm>
-          <a:prstGeom prst="roundRect">
-            <a:avLst>
-              <a:gd name="adj" fmla="val 8000"/>
-            </a:avLst>
-          </a:prstGeom>
-          <a:solidFill>
-            <a:srgbClr val="34D399"/>
-          </a:solidFill>
-          <a:ln>
-            <a:noFill/>
-          </a:ln>
-          <a:effectLst/>
-        </p:spPr>
-        <p:style>
-          <a:lnRef idx="1">
-            <a:schemeClr val="accent1"/>
-          </a:lnRef>
-          <a:fillRef idx="3">
-            <a:schemeClr val="accent1"/>
-          </a:fillRef>
-          <a:effectRef idx="2">
-            <a:schemeClr val="accent1"/>
-          </a:effectRef>
-          <a:fontRef idx="minor">
-            <a:schemeClr val="lt1"/>
-          </a:fontRef>
-        </p:style>
-        <p:txBody>
-          <a:bodyPr rtlCol="0" anchor="ctr"/>
-          <a:lstStyle/>
-          <a:p>
-            <a:pPr algn="ctr"/>
-          </a:p>
-        </p:txBody>
-      </p:sp>
-      <p:sp>
-        <p:nvSpPr>
-          <p:cNvPr id="11" name="TextBox 10"/>
-          <p:cNvSpPr txBox="1"/>
-          <p:nvPr/>
-        </p:nvSpPr>
-        <p:spPr>
-          <a:xfrm>
-            <a:off x="2381250" y="952500"/>
-            <a:ext cx="8286750" cy="381000"/>
-          </a:xfrm>
-          <a:prstGeom prst="rect">
-            <a:avLst/>
-          </a:prstGeom>
-          <a:noFill/>
-        </p:spPr>
-        <p:txBody>
-          <a:bodyPr wrap="square" anchor="ctr">
-            <a:spAutoFit/>
-          </a:bodyPr>
-          <a:lstStyle/>
-          <a:p>
-            <a:pPr algn="l">
-              <a:lnSpc>
-                <a:spcPct val="100000"/>
-              </a:lnSpc>
-            </a:pPr>
-            <a:r>
-              <a:rPr sz="1100" b="0">
-                <a:solidFill>
-                  <a:srgbClr val="94A3B8"/>
-                </a:solidFill>
-                <a:latin typeface="PingFang SC"/>
-              </a:rPr>
-              <a:t>terminal — 平台实测</a:t>
-            </a:r>
-          </a:p>
-        </p:txBody>
-      </p:sp>
-      <p:sp>
-        <p:nvSpPr>
-          <p:cNvPr id="12" name="TextBox 11"/>
-          <p:cNvSpPr txBox="1"/>
-          <p:nvPr/>
-        </p:nvSpPr>
-        <p:spPr>
-          <a:xfrm>
-            <a:off x="1562100" y="1485900"/>
-            <a:ext cx="9067800" cy="4381500"/>
-          </a:xfrm>
-          <a:prstGeom prst="rect">
-            <a:avLst/>
-          </a:prstGeom>
-          <a:noFill/>
-        </p:spPr>
-        <p:txBody>
-          <a:bodyPr wrap="square">
-            <a:spAutoFit/>
-          </a:bodyPr>
-          <a:lstStyle/>
-          <a:p>
-            <a:pPr>
-              <a:lnSpc>
-                <a:spcPct val="115000"/>
-              </a:lnSpc>
-            </a:pPr>
-            <a:r>
-              <a:rPr sz="1300">
-                <a:solidFill>
-                  <a:srgbClr val="CBD5E1"/>
-                </a:solidFill>
-                <a:latin typeface="Menlo"/>
-              </a:rPr>
-              <a:t>tests 真实输出</a:t>
-            </a:r>
-          </a:p>
-        </p:txBody>
-      </p:sp>
-      <p:sp>
-        <p:nvSpPr>
-          <p:cNvPr id="13" name="TextBox 12"/>
-          <p:cNvSpPr txBox="1"/>
-          <p:nvPr/>
-        </p:nvSpPr>
-        <p:spPr>
-          <a:xfrm>
-            <a:off x="10287000" y="6534150"/>
-            <a:ext cx="1619250" cy="266700"/>
-          </a:xfrm>
-          <a:prstGeom prst="rect">
-            <a:avLst/>
-          </a:prstGeom>
-          <a:noFill/>
-        </p:spPr>
-        <p:txBody>
-          <a:bodyPr wrap="square" anchor="ctr">
-            <a:spAutoFit/>
-          </a:bodyPr>
-          <a:lstStyle/>
-          <a:p>
-            <a:pPr algn="r">
-              <a:lnSpc>
-                <a:spcPct val="100000"/>
-              </a:lnSpc>
-            </a:pPr>
-            <a:r>
               <a:rPr sz="900" b="0">
                 <a:solidFill>
                   <a:srgbClr val="94A3B8"/>
@@ -11965,7 +11935,7 @@
       </p:sp>
       <p:sp>
         <p:nvSpPr>
-          <p:cNvPr id="14" name="TextBox 13"/>
+          <p:cNvPr id="13" name="TextBox 12"/>
           <p:cNvSpPr txBox="1"/>
           <p:nvPr/>
         </p:nvSpPr>
@@ -15444,14 +15414,1128 @@
       </p:sp>
       <p:sp>
         <p:nvSpPr>
-          <p:cNvPr id="5" name="TextBox 4"/>
+          <p:cNvPr id="5" name="Rectangle 4"/>
+          <p:cNvSpPr/>
+          <p:nvPr/>
+        </p:nvSpPr>
+        <p:spPr>
+          <a:xfrm>
+            <a:off x="1619250" y="3314700"/>
+            <a:ext cx="8953500" cy="38100"/>
+          </a:xfrm>
+          <a:prstGeom prst="rect">
+            <a:avLst/>
+          </a:prstGeom>
+          <a:solidFill>
+            <a:srgbClr val="DDE5EE"/>
+          </a:solidFill>
+          <a:ln>
+            <a:noFill/>
+          </a:ln>
+          <a:effectLst/>
+        </p:spPr>
+        <p:style>
+          <a:lnRef idx="1">
+            <a:schemeClr val="accent1"/>
+          </a:lnRef>
+          <a:fillRef idx="3">
+            <a:schemeClr val="accent1"/>
+          </a:fillRef>
+          <a:effectRef idx="2">
+            <a:schemeClr val="accent1"/>
+          </a:effectRef>
+          <a:fontRef idx="minor">
+            <a:schemeClr val="lt1"/>
+          </a:fontRef>
+        </p:style>
+        <p:txBody>
+          <a:bodyPr rtlCol="0" anchor="ctr"/>
+          <a:lstStyle/>
+          <a:p>
+            <a:pPr algn="ctr"/>
+          </a:p>
+        </p:txBody>
+      </p:sp>
+      <p:sp>
+        <p:nvSpPr>
+          <p:cNvPr id="6" name="Rounded Rectangle 5"/>
+          <p:cNvSpPr/>
+          <p:nvPr/>
+        </p:nvSpPr>
+        <p:spPr>
+          <a:xfrm>
+            <a:off x="1514475" y="3228975"/>
+            <a:ext cx="209550" cy="209550"/>
+          </a:xfrm>
+          <a:prstGeom prst="roundRect">
+            <a:avLst>
+              <a:gd name="adj" fmla="val 8000"/>
+            </a:avLst>
+          </a:prstGeom>
+          <a:solidFill>
+            <a:srgbClr val="2563EB"/>
+          </a:solidFill>
+          <a:ln>
+            <a:noFill/>
+          </a:ln>
+          <a:effectLst/>
+        </p:spPr>
+        <p:style>
+          <a:lnRef idx="1">
+            <a:schemeClr val="accent1"/>
+          </a:lnRef>
+          <a:fillRef idx="3">
+            <a:schemeClr val="accent1"/>
+          </a:fillRef>
+          <a:effectRef idx="2">
+            <a:schemeClr val="accent1"/>
+          </a:effectRef>
+          <a:fontRef idx="minor">
+            <a:schemeClr val="lt1"/>
+          </a:fontRef>
+        </p:style>
+        <p:txBody>
+          <a:bodyPr rtlCol="0" anchor="ctr"/>
+          <a:lstStyle/>
+          <a:p>
+            <a:pPr algn="ctr"/>
+          </a:p>
+        </p:txBody>
+      </p:sp>
+      <p:sp>
+        <p:nvSpPr>
+          <p:cNvPr id="7" name="Rounded Rectangle 6"/>
+          <p:cNvSpPr/>
+          <p:nvPr/>
+        </p:nvSpPr>
+        <p:spPr>
+          <a:xfrm>
+            <a:off x="190500" y="1905000"/>
+            <a:ext cx="2857500" cy="1123950"/>
+          </a:xfrm>
+          <a:prstGeom prst="roundRect">
+            <a:avLst>
+              <a:gd name="adj" fmla="val 8000"/>
+            </a:avLst>
+          </a:prstGeom>
+          <a:solidFill>
+            <a:srgbClr val="F1F5F9"/>
+          </a:solidFill>
+          <a:ln>
+            <a:noFill/>
+          </a:ln>
+          <a:effectLst/>
+        </p:spPr>
+        <p:style>
+          <a:lnRef idx="1">
+            <a:schemeClr val="accent1"/>
+          </a:lnRef>
+          <a:fillRef idx="3">
+            <a:schemeClr val="accent1"/>
+          </a:fillRef>
+          <a:effectRef idx="2">
+            <a:schemeClr val="accent1"/>
+          </a:effectRef>
+          <a:fontRef idx="minor">
+            <a:schemeClr val="lt1"/>
+          </a:fontRef>
+        </p:style>
+        <p:txBody>
+          <a:bodyPr rtlCol="0" anchor="ctr"/>
+          <a:lstStyle/>
+          <a:p>
+            <a:pPr algn="ctr"/>
+          </a:p>
+        </p:txBody>
+      </p:sp>
+      <p:sp>
+        <p:nvSpPr>
+          <p:cNvPr id="8" name="Rectangle 7"/>
+          <p:cNvSpPr/>
+          <p:nvPr/>
+        </p:nvSpPr>
+        <p:spPr>
+          <a:xfrm>
+            <a:off x="190500" y="1905000"/>
+            <a:ext cx="2857500" cy="38100"/>
+          </a:xfrm>
+          <a:prstGeom prst="rect">
+            <a:avLst/>
+          </a:prstGeom>
+          <a:solidFill>
+            <a:srgbClr val="2563EB"/>
+          </a:solidFill>
+          <a:ln>
+            <a:noFill/>
+          </a:ln>
+          <a:effectLst/>
+        </p:spPr>
+        <p:style>
+          <a:lnRef idx="1">
+            <a:schemeClr val="accent1"/>
+          </a:lnRef>
+          <a:fillRef idx="3">
+            <a:schemeClr val="accent1"/>
+          </a:fillRef>
+          <a:effectRef idx="2">
+            <a:schemeClr val="accent1"/>
+          </a:effectRef>
+          <a:fontRef idx="minor">
+            <a:schemeClr val="lt1"/>
+          </a:fontRef>
+        </p:style>
+        <p:txBody>
+          <a:bodyPr rtlCol="0" anchor="ctr"/>
+          <a:lstStyle/>
+          <a:p>
+            <a:pPr algn="ctr"/>
+          </a:p>
+        </p:txBody>
+      </p:sp>
+      <p:sp>
+        <p:nvSpPr>
+          <p:cNvPr id="9" name="TextBox 8"/>
           <p:cNvSpPr txBox="1"/>
           <p:nvPr/>
         </p:nvSpPr>
         <p:spPr>
           <a:xfrm>
-            <a:off x="9334500" y="0"/>
-            <a:ext cx="2667000" cy="704850"/>
+            <a:off x="285750" y="2000250"/>
+            <a:ext cx="2667000" cy="285750"/>
+          </a:xfrm>
+          <a:prstGeom prst="rect">
+            <a:avLst/>
+          </a:prstGeom>
+          <a:noFill/>
+        </p:spPr>
+        <p:txBody>
+          <a:bodyPr wrap="square" anchor="ctr">
+            <a:spAutoFit/>
+          </a:bodyPr>
+          <a:lstStyle/>
+          <a:p>
+            <a:pPr algn="ctr">
+              <a:lnSpc>
+                <a:spcPct val="100000"/>
+              </a:lnSpc>
+            </a:pPr>
+            <a:r>
+              <a:rPr sz="1400" b="1">
+                <a:solidFill>
+                  <a:srgbClr val="2563EB"/>
+                </a:solidFill>
+                <a:latin typeface="PingFang SC"/>
+              </a:rPr>
+              <a:t>任务完成</a:t>
+            </a:r>
+          </a:p>
+        </p:txBody>
+      </p:sp>
+      <p:sp>
+        <p:nvSpPr>
+          <p:cNvPr id="10" name="TextBox 9"/>
+          <p:cNvSpPr txBox="1"/>
+          <p:nvPr/>
+        </p:nvSpPr>
+        <p:spPr>
+          <a:xfrm>
+            <a:off x="285750" y="2305050"/>
+            <a:ext cx="2667000" cy="666750"/>
+          </a:xfrm>
+          <a:prstGeom prst="rect">
+            <a:avLst/>
+          </a:prstGeom>
+          <a:noFill/>
+        </p:spPr>
+        <p:txBody>
+          <a:bodyPr wrap="square" anchor="ctr">
+            <a:spAutoFit/>
+          </a:bodyPr>
+          <a:lstStyle/>
+          <a:p>
+            <a:pPr algn="l">
+              <a:lnSpc>
+                <a:spcPct val="105000"/>
+              </a:lnSpc>
+            </a:pPr>
+            <a:r>
+              <a:rPr sz="1050" b="0">
+                <a:solidFill>
+                  <a:srgbClr val="475569"/>
+                </a:solidFill>
+                <a:latin typeface="PingFang SC"/>
+              </a:rPr>
+              <a:t>提取候选经验</a:t>
+            </a:r>
+          </a:p>
+        </p:txBody>
+      </p:sp>
+      <p:sp>
+        <p:nvSpPr>
+          <p:cNvPr id="11" name="Rounded Rectangle 10"/>
+          <p:cNvSpPr/>
+          <p:nvPr/>
+        </p:nvSpPr>
+        <p:spPr>
+          <a:xfrm>
+            <a:off x="3752850" y="3228975"/>
+            <a:ext cx="209550" cy="209550"/>
+          </a:xfrm>
+          <a:prstGeom prst="roundRect">
+            <a:avLst>
+              <a:gd name="adj" fmla="val 8000"/>
+            </a:avLst>
+          </a:prstGeom>
+          <a:solidFill>
+            <a:srgbClr val="14B8A6"/>
+          </a:solidFill>
+          <a:ln>
+            <a:noFill/>
+          </a:ln>
+          <a:effectLst/>
+        </p:spPr>
+        <p:style>
+          <a:lnRef idx="1">
+            <a:schemeClr val="accent1"/>
+          </a:lnRef>
+          <a:fillRef idx="3">
+            <a:schemeClr val="accent1"/>
+          </a:fillRef>
+          <a:effectRef idx="2">
+            <a:schemeClr val="accent1"/>
+          </a:effectRef>
+          <a:fontRef idx="minor">
+            <a:schemeClr val="lt1"/>
+          </a:fontRef>
+        </p:style>
+        <p:txBody>
+          <a:bodyPr rtlCol="0" anchor="ctr"/>
+          <a:lstStyle/>
+          <a:p>
+            <a:pPr algn="ctr"/>
+          </a:p>
+        </p:txBody>
+      </p:sp>
+      <p:sp>
+        <p:nvSpPr>
+          <p:cNvPr id="12" name="Rounded Rectangle 11"/>
+          <p:cNvSpPr/>
+          <p:nvPr/>
+        </p:nvSpPr>
+        <p:spPr>
+          <a:xfrm>
+            <a:off x="2428875" y="3619500"/>
+            <a:ext cx="2857500" cy="1123950"/>
+          </a:xfrm>
+          <a:prstGeom prst="roundRect">
+            <a:avLst>
+              <a:gd name="adj" fmla="val 8000"/>
+            </a:avLst>
+          </a:prstGeom>
+          <a:solidFill>
+            <a:srgbClr val="F1F5F9"/>
+          </a:solidFill>
+          <a:ln>
+            <a:noFill/>
+          </a:ln>
+          <a:effectLst/>
+        </p:spPr>
+        <p:style>
+          <a:lnRef idx="1">
+            <a:schemeClr val="accent1"/>
+          </a:lnRef>
+          <a:fillRef idx="3">
+            <a:schemeClr val="accent1"/>
+          </a:fillRef>
+          <a:effectRef idx="2">
+            <a:schemeClr val="accent1"/>
+          </a:effectRef>
+          <a:fontRef idx="minor">
+            <a:schemeClr val="lt1"/>
+          </a:fontRef>
+        </p:style>
+        <p:txBody>
+          <a:bodyPr rtlCol="0" anchor="ctr"/>
+          <a:lstStyle/>
+          <a:p>
+            <a:pPr algn="ctr"/>
+          </a:p>
+        </p:txBody>
+      </p:sp>
+      <p:sp>
+        <p:nvSpPr>
+          <p:cNvPr id="13" name="Rectangle 12"/>
+          <p:cNvSpPr/>
+          <p:nvPr/>
+        </p:nvSpPr>
+        <p:spPr>
+          <a:xfrm>
+            <a:off x="2428875" y="3619500"/>
+            <a:ext cx="2857500" cy="38100"/>
+          </a:xfrm>
+          <a:prstGeom prst="rect">
+            <a:avLst/>
+          </a:prstGeom>
+          <a:solidFill>
+            <a:srgbClr val="14B8A6"/>
+          </a:solidFill>
+          <a:ln>
+            <a:noFill/>
+          </a:ln>
+          <a:effectLst/>
+        </p:spPr>
+        <p:style>
+          <a:lnRef idx="1">
+            <a:schemeClr val="accent1"/>
+          </a:lnRef>
+          <a:fillRef idx="3">
+            <a:schemeClr val="accent1"/>
+          </a:fillRef>
+          <a:effectRef idx="2">
+            <a:schemeClr val="accent1"/>
+          </a:effectRef>
+          <a:fontRef idx="minor">
+            <a:schemeClr val="lt1"/>
+          </a:fontRef>
+        </p:style>
+        <p:txBody>
+          <a:bodyPr rtlCol="0" anchor="ctr"/>
+          <a:lstStyle/>
+          <a:p>
+            <a:pPr algn="ctr"/>
+          </a:p>
+        </p:txBody>
+      </p:sp>
+      <p:sp>
+        <p:nvSpPr>
+          <p:cNvPr id="14" name="TextBox 13"/>
+          <p:cNvSpPr txBox="1"/>
+          <p:nvPr/>
+        </p:nvSpPr>
+        <p:spPr>
+          <a:xfrm>
+            <a:off x="2524125" y="3714750"/>
+            <a:ext cx="2667000" cy="285750"/>
+          </a:xfrm>
+          <a:prstGeom prst="rect">
+            <a:avLst/>
+          </a:prstGeom>
+          <a:noFill/>
+        </p:spPr>
+        <p:txBody>
+          <a:bodyPr wrap="square" anchor="ctr">
+            <a:spAutoFit/>
+          </a:bodyPr>
+          <a:lstStyle/>
+          <a:p>
+            <a:pPr algn="ctr">
+              <a:lnSpc>
+                <a:spcPct val="100000"/>
+              </a:lnSpc>
+            </a:pPr>
+            <a:r>
+              <a:rPr sz="1400" b="1">
+                <a:solidFill>
+                  <a:srgbClr val="14B8A6"/>
+                </a:solidFill>
+                <a:latin typeface="PingFang SC"/>
+              </a:rPr>
+              <a:t>写入</a:t>
+            </a:r>
+          </a:p>
+        </p:txBody>
+      </p:sp>
+      <p:sp>
+        <p:nvSpPr>
+          <p:cNvPr id="15" name="TextBox 14"/>
+          <p:cNvSpPr txBox="1"/>
+          <p:nvPr/>
+        </p:nvSpPr>
+        <p:spPr>
+          <a:xfrm>
+            <a:off x="2524125" y="4019550"/>
+            <a:ext cx="2667000" cy="666750"/>
+          </a:xfrm>
+          <a:prstGeom prst="rect">
+            <a:avLst/>
+          </a:prstGeom>
+          <a:noFill/>
+        </p:spPr>
+        <p:txBody>
+          <a:bodyPr wrap="square" anchor="ctr">
+            <a:spAutoFit/>
+          </a:bodyPr>
+          <a:lstStyle/>
+          <a:p>
+            <a:pPr algn="l">
+              <a:lnSpc>
+                <a:spcPct val="105000"/>
+              </a:lnSpc>
+            </a:pPr>
+            <a:r>
+              <a:rPr sz="1050" b="0">
+                <a:solidFill>
+                  <a:srgbClr val="475569"/>
+                </a:solidFill>
+                <a:latin typeface="PingFang SC"/>
+              </a:rPr>
+              <a:t>带置信度与来源</a:t>
+            </a:r>
+          </a:p>
+        </p:txBody>
+      </p:sp>
+      <p:sp>
+        <p:nvSpPr>
+          <p:cNvPr id="16" name="Rounded Rectangle 15"/>
+          <p:cNvSpPr/>
+          <p:nvPr/>
+        </p:nvSpPr>
+        <p:spPr>
+          <a:xfrm>
+            <a:off x="5991225" y="3228975"/>
+            <a:ext cx="209550" cy="209550"/>
+          </a:xfrm>
+          <a:prstGeom prst="roundRect">
+            <a:avLst>
+              <a:gd name="adj" fmla="val 8000"/>
+            </a:avLst>
+          </a:prstGeom>
+          <a:solidFill>
+            <a:srgbClr val="8B5CF6"/>
+          </a:solidFill>
+          <a:ln>
+            <a:noFill/>
+          </a:ln>
+          <a:effectLst/>
+        </p:spPr>
+        <p:style>
+          <a:lnRef idx="1">
+            <a:schemeClr val="accent1"/>
+          </a:lnRef>
+          <a:fillRef idx="3">
+            <a:schemeClr val="accent1"/>
+          </a:fillRef>
+          <a:effectRef idx="2">
+            <a:schemeClr val="accent1"/>
+          </a:effectRef>
+          <a:fontRef idx="minor">
+            <a:schemeClr val="lt1"/>
+          </a:fontRef>
+        </p:style>
+        <p:txBody>
+          <a:bodyPr rtlCol="0" anchor="ctr"/>
+          <a:lstStyle/>
+          <a:p>
+            <a:pPr algn="ctr"/>
+          </a:p>
+        </p:txBody>
+      </p:sp>
+      <p:sp>
+        <p:nvSpPr>
+          <p:cNvPr id="17" name="Rounded Rectangle 16"/>
+          <p:cNvSpPr/>
+          <p:nvPr/>
+        </p:nvSpPr>
+        <p:spPr>
+          <a:xfrm>
+            <a:off x="4667250" y="1905000"/>
+            <a:ext cx="2857500" cy="1123950"/>
+          </a:xfrm>
+          <a:prstGeom prst="roundRect">
+            <a:avLst>
+              <a:gd name="adj" fmla="val 8000"/>
+            </a:avLst>
+          </a:prstGeom>
+          <a:solidFill>
+            <a:srgbClr val="F1F5F9"/>
+          </a:solidFill>
+          <a:ln>
+            <a:noFill/>
+          </a:ln>
+          <a:effectLst/>
+        </p:spPr>
+        <p:style>
+          <a:lnRef idx="1">
+            <a:schemeClr val="accent1"/>
+          </a:lnRef>
+          <a:fillRef idx="3">
+            <a:schemeClr val="accent1"/>
+          </a:fillRef>
+          <a:effectRef idx="2">
+            <a:schemeClr val="accent1"/>
+          </a:effectRef>
+          <a:fontRef idx="minor">
+            <a:schemeClr val="lt1"/>
+          </a:fontRef>
+        </p:style>
+        <p:txBody>
+          <a:bodyPr rtlCol="0" anchor="ctr"/>
+          <a:lstStyle/>
+          <a:p>
+            <a:pPr algn="ctr"/>
+          </a:p>
+        </p:txBody>
+      </p:sp>
+      <p:sp>
+        <p:nvSpPr>
+          <p:cNvPr id="18" name="Rectangle 17"/>
+          <p:cNvSpPr/>
+          <p:nvPr/>
+        </p:nvSpPr>
+        <p:spPr>
+          <a:xfrm>
+            <a:off x="4667250" y="1905000"/>
+            <a:ext cx="2857500" cy="38100"/>
+          </a:xfrm>
+          <a:prstGeom prst="rect">
+            <a:avLst/>
+          </a:prstGeom>
+          <a:solidFill>
+            <a:srgbClr val="8B5CF6"/>
+          </a:solidFill>
+          <a:ln>
+            <a:noFill/>
+          </a:ln>
+          <a:effectLst/>
+        </p:spPr>
+        <p:style>
+          <a:lnRef idx="1">
+            <a:schemeClr val="accent1"/>
+          </a:lnRef>
+          <a:fillRef idx="3">
+            <a:schemeClr val="accent1"/>
+          </a:fillRef>
+          <a:effectRef idx="2">
+            <a:schemeClr val="accent1"/>
+          </a:effectRef>
+          <a:fontRef idx="minor">
+            <a:schemeClr val="lt1"/>
+          </a:fontRef>
+        </p:style>
+        <p:txBody>
+          <a:bodyPr rtlCol="0" anchor="ctr"/>
+          <a:lstStyle/>
+          <a:p>
+            <a:pPr algn="ctr"/>
+          </a:p>
+        </p:txBody>
+      </p:sp>
+      <p:sp>
+        <p:nvSpPr>
+          <p:cNvPr id="19" name="TextBox 18"/>
+          <p:cNvSpPr txBox="1"/>
+          <p:nvPr/>
+        </p:nvSpPr>
+        <p:spPr>
+          <a:xfrm>
+            <a:off x="4762500" y="2000250"/>
+            <a:ext cx="2667000" cy="285750"/>
+          </a:xfrm>
+          <a:prstGeom prst="rect">
+            <a:avLst/>
+          </a:prstGeom>
+          <a:noFill/>
+        </p:spPr>
+        <p:txBody>
+          <a:bodyPr wrap="square" anchor="ctr">
+            <a:spAutoFit/>
+          </a:bodyPr>
+          <a:lstStyle/>
+          <a:p>
+            <a:pPr algn="ctr">
+              <a:lnSpc>
+                <a:spcPct val="100000"/>
+              </a:lnSpc>
+            </a:pPr>
+            <a:r>
+              <a:rPr sz="1400" b="1">
+                <a:solidFill>
+                  <a:srgbClr val="8B5CF6"/>
+                </a:solidFill>
+                <a:latin typeface="PingFang SC"/>
+              </a:rPr>
+              <a:t>使用</a:t>
+            </a:r>
+          </a:p>
+        </p:txBody>
+      </p:sp>
+      <p:sp>
+        <p:nvSpPr>
+          <p:cNvPr id="20" name="TextBox 19"/>
+          <p:cNvSpPr txBox="1"/>
+          <p:nvPr/>
+        </p:nvSpPr>
+        <p:spPr>
+          <a:xfrm>
+            <a:off x="4762500" y="2305050"/>
+            <a:ext cx="2667000" cy="666750"/>
+          </a:xfrm>
+          <a:prstGeom prst="rect">
+            <a:avLst/>
+          </a:prstGeom>
+          <a:noFill/>
+        </p:spPr>
+        <p:txBody>
+          <a:bodyPr wrap="square" anchor="ctr">
+            <a:spAutoFit/>
+          </a:bodyPr>
+          <a:lstStyle/>
+          <a:p>
+            <a:pPr algn="l">
+              <a:lnSpc>
+                <a:spcPct val="105000"/>
+              </a:lnSpc>
+            </a:pPr>
+            <a:r>
+              <a:rPr sz="1050" b="0">
+                <a:solidFill>
+                  <a:srgbClr val="475569"/>
+                </a:solidFill>
+                <a:latin typeface="PingFang SC"/>
+              </a:rPr>
+              <a:t>下次检索召回</a:t>
+            </a:r>
+          </a:p>
+        </p:txBody>
+      </p:sp>
+      <p:sp>
+        <p:nvSpPr>
+          <p:cNvPr id="21" name="Rounded Rectangle 20"/>
+          <p:cNvSpPr/>
+          <p:nvPr/>
+        </p:nvSpPr>
+        <p:spPr>
+          <a:xfrm>
+            <a:off x="8229600" y="3228975"/>
+            <a:ext cx="209550" cy="209550"/>
+          </a:xfrm>
+          <a:prstGeom prst="roundRect">
+            <a:avLst>
+              <a:gd name="adj" fmla="val 8000"/>
+            </a:avLst>
+          </a:prstGeom>
+          <a:solidFill>
+            <a:srgbClr val="F59E0B"/>
+          </a:solidFill>
+          <a:ln>
+            <a:noFill/>
+          </a:ln>
+          <a:effectLst/>
+        </p:spPr>
+        <p:style>
+          <a:lnRef idx="1">
+            <a:schemeClr val="accent1"/>
+          </a:lnRef>
+          <a:fillRef idx="3">
+            <a:schemeClr val="accent1"/>
+          </a:fillRef>
+          <a:effectRef idx="2">
+            <a:schemeClr val="accent1"/>
+          </a:effectRef>
+          <a:fontRef idx="minor">
+            <a:schemeClr val="lt1"/>
+          </a:fontRef>
+        </p:style>
+        <p:txBody>
+          <a:bodyPr rtlCol="0" anchor="ctr"/>
+          <a:lstStyle/>
+          <a:p>
+            <a:pPr algn="ctr"/>
+          </a:p>
+        </p:txBody>
+      </p:sp>
+      <p:sp>
+        <p:nvSpPr>
+          <p:cNvPr id="22" name="Rounded Rectangle 21"/>
+          <p:cNvSpPr/>
+          <p:nvPr/>
+        </p:nvSpPr>
+        <p:spPr>
+          <a:xfrm>
+            <a:off x="6905625" y="3619500"/>
+            <a:ext cx="2857500" cy="1123950"/>
+          </a:xfrm>
+          <a:prstGeom prst="roundRect">
+            <a:avLst>
+              <a:gd name="adj" fmla="val 8000"/>
+            </a:avLst>
+          </a:prstGeom>
+          <a:solidFill>
+            <a:srgbClr val="F1F5F9"/>
+          </a:solidFill>
+          <a:ln>
+            <a:noFill/>
+          </a:ln>
+          <a:effectLst/>
+        </p:spPr>
+        <p:style>
+          <a:lnRef idx="1">
+            <a:schemeClr val="accent1"/>
+          </a:lnRef>
+          <a:fillRef idx="3">
+            <a:schemeClr val="accent1"/>
+          </a:fillRef>
+          <a:effectRef idx="2">
+            <a:schemeClr val="accent1"/>
+          </a:effectRef>
+          <a:fontRef idx="minor">
+            <a:schemeClr val="lt1"/>
+          </a:fontRef>
+        </p:style>
+        <p:txBody>
+          <a:bodyPr rtlCol="0" anchor="ctr"/>
+          <a:lstStyle/>
+          <a:p>
+            <a:pPr algn="ctr"/>
+          </a:p>
+        </p:txBody>
+      </p:sp>
+      <p:sp>
+        <p:nvSpPr>
+          <p:cNvPr id="23" name="Rectangle 22"/>
+          <p:cNvSpPr/>
+          <p:nvPr/>
+        </p:nvSpPr>
+        <p:spPr>
+          <a:xfrm>
+            <a:off x="6905625" y="3619500"/>
+            <a:ext cx="2857500" cy="38100"/>
+          </a:xfrm>
+          <a:prstGeom prst="rect">
+            <a:avLst/>
+          </a:prstGeom>
+          <a:solidFill>
+            <a:srgbClr val="F59E0B"/>
+          </a:solidFill>
+          <a:ln>
+            <a:noFill/>
+          </a:ln>
+          <a:effectLst/>
+        </p:spPr>
+        <p:style>
+          <a:lnRef idx="1">
+            <a:schemeClr val="accent1"/>
+          </a:lnRef>
+          <a:fillRef idx="3">
+            <a:schemeClr val="accent1"/>
+          </a:fillRef>
+          <a:effectRef idx="2">
+            <a:schemeClr val="accent1"/>
+          </a:effectRef>
+          <a:fontRef idx="minor">
+            <a:schemeClr val="lt1"/>
+          </a:fontRef>
+        </p:style>
+        <p:txBody>
+          <a:bodyPr rtlCol="0" anchor="ctr"/>
+          <a:lstStyle/>
+          <a:p>
+            <a:pPr algn="ctr"/>
+          </a:p>
+        </p:txBody>
+      </p:sp>
+      <p:sp>
+        <p:nvSpPr>
+          <p:cNvPr id="24" name="TextBox 23"/>
+          <p:cNvSpPr txBox="1"/>
+          <p:nvPr/>
+        </p:nvSpPr>
+        <p:spPr>
+          <a:xfrm>
+            <a:off x="7000875" y="3714750"/>
+            <a:ext cx="2667000" cy="285750"/>
+          </a:xfrm>
+          <a:prstGeom prst="rect">
+            <a:avLst/>
+          </a:prstGeom>
+          <a:noFill/>
+        </p:spPr>
+        <p:txBody>
+          <a:bodyPr wrap="square" anchor="ctr">
+            <a:spAutoFit/>
+          </a:bodyPr>
+          <a:lstStyle/>
+          <a:p>
+            <a:pPr algn="ctr">
+              <a:lnSpc>
+                <a:spcPct val="100000"/>
+              </a:lnSpc>
+            </a:pPr>
+            <a:r>
+              <a:rPr sz="1400" b="1">
+                <a:solidFill>
+                  <a:srgbClr val="F59E0B"/>
+                </a:solidFill>
+                <a:latin typeface="PingFang SC"/>
+              </a:rPr>
+              <a:t>修正</a:t>
+            </a:r>
+          </a:p>
+        </p:txBody>
+      </p:sp>
+      <p:sp>
+        <p:nvSpPr>
+          <p:cNvPr id="25" name="TextBox 24"/>
+          <p:cNvSpPr txBox="1"/>
+          <p:nvPr/>
+        </p:nvSpPr>
+        <p:spPr>
+          <a:xfrm>
+            <a:off x="7000875" y="4019550"/>
+            <a:ext cx="2667000" cy="666750"/>
+          </a:xfrm>
+          <a:prstGeom prst="rect">
+            <a:avLst/>
+          </a:prstGeom>
+          <a:noFill/>
+        </p:spPr>
+        <p:txBody>
+          <a:bodyPr wrap="square" anchor="ctr">
+            <a:spAutoFit/>
+          </a:bodyPr>
+          <a:lstStyle/>
+          <a:p>
+            <a:pPr algn="l">
+              <a:lnSpc>
+                <a:spcPct val="105000"/>
+              </a:lnSpc>
+            </a:pPr>
+            <a:r>
+              <a:rPr sz="1050" b="0">
+                <a:solidFill>
+                  <a:srgbClr val="475569"/>
+                </a:solidFill>
+                <a:latin typeface="PingFang SC"/>
+              </a:rPr>
+              <a:t>失败触发更新</a:t>
+            </a:r>
+          </a:p>
+        </p:txBody>
+      </p:sp>
+      <p:sp>
+        <p:nvSpPr>
+          <p:cNvPr id="26" name="Rounded Rectangle 25"/>
+          <p:cNvSpPr/>
+          <p:nvPr/>
+        </p:nvSpPr>
+        <p:spPr>
+          <a:xfrm>
+            <a:off x="10467975" y="3228975"/>
+            <a:ext cx="209550" cy="209550"/>
+          </a:xfrm>
+          <a:prstGeom prst="roundRect">
+            <a:avLst>
+              <a:gd name="adj" fmla="val 8000"/>
+            </a:avLst>
+          </a:prstGeom>
+          <a:solidFill>
+            <a:srgbClr val="34D399"/>
+          </a:solidFill>
+          <a:ln>
+            <a:noFill/>
+          </a:ln>
+          <a:effectLst/>
+        </p:spPr>
+        <p:style>
+          <a:lnRef idx="1">
+            <a:schemeClr val="accent1"/>
+          </a:lnRef>
+          <a:fillRef idx="3">
+            <a:schemeClr val="accent1"/>
+          </a:fillRef>
+          <a:effectRef idx="2">
+            <a:schemeClr val="accent1"/>
+          </a:effectRef>
+          <a:fontRef idx="minor">
+            <a:schemeClr val="lt1"/>
+          </a:fontRef>
+        </p:style>
+        <p:txBody>
+          <a:bodyPr rtlCol="0" anchor="ctr"/>
+          <a:lstStyle/>
+          <a:p>
+            <a:pPr algn="ctr"/>
+          </a:p>
+        </p:txBody>
+      </p:sp>
+      <p:sp>
+        <p:nvSpPr>
+          <p:cNvPr id="27" name="Rounded Rectangle 26"/>
+          <p:cNvSpPr/>
+          <p:nvPr/>
+        </p:nvSpPr>
+        <p:spPr>
+          <a:xfrm>
+            <a:off x="9144000" y="1905000"/>
+            <a:ext cx="2857500" cy="1123950"/>
+          </a:xfrm>
+          <a:prstGeom prst="roundRect">
+            <a:avLst>
+              <a:gd name="adj" fmla="val 8000"/>
+            </a:avLst>
+          </a:prstGeom>
+          <a:solidFill>
+            <a:srgbClr val="F1F5F9"/>
+          </a:solidFill>
+          <a:ln>
+            <a:noFill/>
+          </a:ln>
+          <a:effectLst/>
+        </p:spPr>
+        <p:style>
+          <a:lnRef idx="1">
+            <a:schemeClr val="accent1"/>
+          </a:lnRef>
+          <a:fillRef idx="3">
+            <a:schemeClr val="accent1"/>
+          </a:fillRef>
+          <a:effectRef idx="2">
+            <a:schemeClr val="accent1"/>
+          </a:effectRef>
+          <a:fontRef idx="minor">
+            <a:schemeClr val="lt1"/>
+          </a:fontRef>
+        </p:style>
+        <p:txBody>
+          <a:bodyPr rtlCol="0" anchor="ctr"/>
+          <a:lstStyle/>
+          <a:p>
+            <a:pPr algn="ctr"/>
+          </a:p>
+        </p:txBody>
+      </p:sp>
+      <p:sp>
+        <p:nvSpPr>
+          <p:cNvPr id="28" name="Rectangle 27"/>
+          <p:cNvSpPr/>
+          <p:nvPr/>
+        </p:nvSpPr>
+        <p:spPr>
+          <a:xfrm>
+            <a:off x="9144000" y="1905000"/>
+            <a:ext cx="2857500" cy="38100"/>
+          </a:xfrm>
+          <a:prstGeom prst="rect">
+            <a:avLst/>
+          </a:prstGeom>
+          <a:solidFill>
+            <a:srgbClr val="34D399"/>
+          </a:solidFill>
+          <a:ln>
+            <a:noFill/>
+          </a:ln>
+          <a:effectLst/>
+        </p:spPr>
+        <p:style>
+          <a:lnRef idx="1">
+            <a:schemeClr val="accent1"/>
+          </a:lnRef>
+          <a:fillRef idx="3">
+            <a:schemeClr val="accent1"/>
+          </a:fillRef>
+          <a:effectRef idx="2">
+            <a:schemeClr val="accent1"/>
+          </a:effectRef>
+          <a:fontRef idx="minor">
+            <a:schemeClr val="lt1"/>
+          </a:fontRef>
+        </p:style>
+        <p:txBody>
+          <a:bodyPr rtlCol="0" anchor="ctr"/>
+          <a:lstStyle/>
+          <a:p>
+            <a:pPr algn="ctr"/>
+          </a:p>
+        </p:txBody>
+      </p:sp>
+      <p:sp>
+        <p:nvSpPr>
+          <p:cNvPr id="29" name="TextBox 28"/>
+          <p:cNvSpPr txBox="1"/>
+          <p:nvPr/>
+        </p:nvSpPr>
+        <p:spPr>
+          <a:xfrm>
+            <a:off x="9239250" y="2000250"/>
+            <a:ext cx="2667000" cy="285750"/>
+          </a:xfrm>
+          <a:prstGeom prst="rect">
+            <a:avLst/>
+          </a:prstGeom>
+          <a:noFill/>
+        </p:spPr>
+        <p:txBody>
+          <a:bodyPr wrap="square" anchor="ctr">
+            <a:spAutoFit/>
+          </a:bodyPr>
+          <a:lstStyle/>
+          <a:p>
+            <a:pPr algn="ctr">
+              <a:lnSpc>
+                <a:spcPct val="100000"/>
+              </a:lnSpc>
+            </a:pPr>
+            <a:r>
+              <a:rPr sz="1400" b="1">
+                <a:solidFill>
+                  <a:srgbClr val="34D399"/>
+                </a:solidFill>
+                <a:latin typeface="PingFang SC"/>
+              </a:rPr>
+              <a:t>淘汰</a:t>
+            </a:r>
+          </a:p>
+        </p:txBody>
+      </p:sp>
+      <p:sp>
+        <p:nvSpPr>
+          <p:cNvPr id="30" name="TextBox 29"/>
+          <p:cNvSpPr txBox="1"/>
+          <p:nvPr/>
+        </p:nvSpPr>
+        <p:spPr>
+          <a:xfrm>
+            <a:off x="9239250" y="2305050"/>
+            <a:ext cx="2667000" cy="666750"/>
+          </a:xfrm>
+          <a:prstGeom prst="rect">
+            <a:avLst/>
+          </a:prstGeom>
+          <a:noFill/>
+        </p:spPr>
+        <p:txBody>
+          <a:bodyPr wrap="square" anchor="ctr">
+            <a:spAutoFit/>
+          </a:bodyPr>
+          <a:lstStyle/>
+          <a:p>
+            <a:pPr algn="l">
+              <a:lnSpc>
+                <a:spcPct val="105000"/>
+              </a:lnSpc>
+            </a:pPr>
+            <a:r>
+              <a:rPr sz="1050" b="0">
+                <a:solidFill>
+                  <a:srgbClr val="475569"/>
+                </a:solidFill>
+                <a:latin typeface="PingFang SC"/>
+              </a:rPr>
+              <a:t>TTL+低置信清理</a:t>
+            </a:r>
+          </a:p>
+        </p:txBody>
+      </p:sp>
+      <p:sp>
+        <p:nvSpPr>
+          <p:cNvPr id="31" name="TextBox 30"/>
+          <p:cNvSpPr txBox="1"/>
+          <p:nvPr/>
+        </p:nvSpPr>
+        <p:spPr>
+          <a:xfrm>
+            <a:off x="10287000" y="6534150"/>
+            <a:ext cx="1619250" cy="266700"/>
           </a:xfrm>
           <a:prstGeom prst="rect">
             <a:avLst/>
@@ -15470,1159 +16554,6 @@
               </a:lnSpc>
             </a:pPr>
             <a:r>
-              <a:rPr sz="1100" b="0">
-                <a:solidFill>
-                  <a:srgbClr val="94A3B8"/>
-                </a:solidFill>
-                <a:latin typeface="PingFang SC"/>
-              </a:rPr>
-              <a:t>任务完成:提取候选经验;写入:带置信度与来源;使用:下次检索召回;修正:失败触发更新;淘汰:TTL+低置信清理|组织级记忆资产</a:t>
-            </a:r>
-          </a:p>
-        </p:txBody>
-      </p:sp>
-      <p:sp>
-        <p:nvSpPr>
-          <p:cNvPr id="6" name="Rectangle 5"/>
-          <p:cNvSpPr/>
-          <p:nvPr/>
-        </p:nvSpPr>
-        <p:spPr>
-          <a:xfrm>
-            <a:off x="1619250" y="3314700"/>
-            <a:ext cx="8953500" cy="38100"/>
-          </a:xfrm>
-          <a:prstGeom prst="rect">
-            <a:avLst/>
-          </a:prstGeom>
-          <a:solidFill>
-            <a:srgbClr val="DDE5EE"/>
-          </a:solidFill>
-          <a:ln>
-            <a:noFill/>
-          </a:ln>
-          <a:effectLst/>
-        </p:spPr>
-        <p:style>
-          <a:lnRef idx="1">
-            <a:schemeClr val="accent1"/>
-          </a:lnRef>
-          <a:fillRef idx="3">
-            <a:schemeClr val="accent1"/>
-          </a:fillRef>
-          <a:effectRef idx="2">
-            <a:schemeClr val="accent1"/>
-          </a:effectRef>
-          <a:fontRef idx="minor">
-            <a:schemeClr val="lt1"/>
-          </a:fontRef>
-        </p:style>
-        <p:txBody>
-          <a:bodyPr rtlCol="0" anchor="ctr"/>
-          <a:lstStyle/>
-          <a:p>
-            <a:pPr algn="ctr"/>
-          </a:p>
-        </p:txBody>
-      </p:sp>
-      <p:sp>
-        <p:nvSpPr>
-          <p:cNvPr id="7" name="Rounded Rectangle 6"/>
-          <p:cNvSpPr/>
-          <p:nvPr/>
-        </p:nvSpPr>
-        <p:spPr>
-          <a:xfrm>
-            <a:off x="1514475" y="3228975"/>
-            <a:ext cx="209550" cy="209550"/>
-          </a:xfrm>
-          <a:prstGeom prst="roundRect">
-            <a:avLst>
-              <a:gd name="adj" fmla="val 8000"/>
-            </a:avLst>
-          </a:prstGeom>
-          <a:solidFill>
-            <a:srgbClr val="2563EB"/>
-          </a:solidFill>
-          <a:ln>
-            <a:noFill/>
-          </a:ln>
-          <a:effectLst/>
-        </p:spPr>
-        <p:style>
-          <a:lnRef idx="1">
-            <a:schemeClr val="accent1"/>
-          </a:lnRef>
-          <a:fillRef idx="3">
-            <a:schemeClr val="accent1"/>
-          </a:fillRef>
-          <a:effectRef idx="2">
-            <a:schemeClr val="accent1"/>
-          </a:effectRef>
-          <a:fontRef idx="minor">
-            <a:schemeClr val="lt1"/>
-          </a:fontRef>
-        </p:style>
-        <p:txBody>
-          <a:bodyPr rtlCol="0" anchor="ctr"/>
-          <a:lstStyle/>
-          <a:p>
-            <a:pPr algn="ctr"/>
-          </a:p>
-        </p:txBody>
-      </p:sp>
-      <p:sp>
-        <p:nvSpPr>
-          <p:cNvPr id="8" name="Rounded Rectangle 7"/>
-          <p:cNvSpPr/>
-          <p:nvPr/>
-        </p:nvSpPr>
-        <p:spPr>
-          <a:xfrm>
-            <a:off x="190500" y="1905000"/>
-            <a:ext cx="2857500" cy="1123950"/>
-          </a:xfrm>
-          <a:prstGeom prst="roundRect">
-            <a:avLst>
-              <a:gd name="adj" fmla="val 8000"/>
-            </a:avLst>
-          </a:prstGeom>
-          <a:solidFill>
-            <a:srgbClr val="F1F5F9"/>
-          </a:solidFill>
-          <a:ln>
-            <a:noFill/>
-          </a:ln>
-          <a:effectLst/>
-        </p:spPr>
-        <p:style>
-          <a:lnRef idx="1">
-            <a:schemeClr val="accent1"/>
-          </a:lnRef>
-          <a:fillRef idx="3">
-            <a:schemeClr val="accent1"/>
-          </a:fillRef>
-          <a:effectRef idx="2">
-            <a:schemeClr val="accent1"/>
-          </a:effectRef>
-          <a:fontRef idx="minor">
-            <a:schemeClr val="lt1"/>
-          </a:fontRef>
-        </p:style>
-        <p:txBody>
-          <a:bodyPr rtlCol="0" anchor="ctr"/>
-          <a:lstStyle/>
-          <a:p>
-            <a:pPr algn="ctr"/>
-          </a:p>
-        </p:txBody>
-      </p:sp>
-      <p:sp>
-        <p:nvSpPr>
-          <p:cNvPr id="9" name="Rectangle 8"/>
-          <p:cNvSpPr/>
-          <p:nvPr/>
-        </p:nvSpPr>
-        <p:spPr>
-          <a:xfrm>
-            <a:off x="190500" y="1905000"/>
-            <a:ext cx="2857500" cy="38100"/>
-          </a:xfrm>
-          <a:prstGeom prst="rect">
-            <a:avLst/>
-          </a:prstGeom>
-          <a:solidFill>
-            <a:srgbClr val="2563EB"/>
-          </a:solidFill>
-          <a:ln>
-            <a:noFill/>
-          </a:ln>
-          <a:effectLst/>
-        </p:spPr>
-        <p:style>
-          <a:lnRef idx="1">
-            <a:schemeClr val="accent1"/>
-          </a:lnRef>
-          <a:fillRef idx="3">
-            <a:schemeClr val="accent1"/>
-          </a:fillRef>
-          <a:effectRef idx="2">
-            <a:schemeClr val="accent1"/>
-          </a:effectRef>
-          <a:fontRef idx="minor">
-            <a:schemeClr val="lt1"/>
-          </a:fontRef>
-        </p:style>
-        <p:txBody>
-          <a:bodyPr rtlCol="0" anchor="ctr"/>
-          <a:lstStyle/>
-          <a:p>
-            <a:pPr algn="ctr"/>
-          </a:p>
-        </p:txBody>
-      </p:sp>
-      <p:sp>
-        <p:nvSpPr>
-          <p:cNvPr id="10" name="TextBox 9"/>
-          <p:cNvSpPr txBox="1"/>
-          <p:nvPr/>
-        </p:nvSpPr>
-        <p:spPr>
-          <a:xfrm>
-            <a:off x="285750" y="2000250"/>
-            <a:ext cx="2667000" cy="285750"/>
-          </a:xfrm>
-          <a:prstGeom prst="rect">
-            <a:avLst/>
-          </a:prstGeom>
-          <a:noFill/>
-        </p:spPr>
-        <p:txBody>
-          <a:bodyPr wrap="square" anchor="ctr">
-            <a:spAutoFit/>
-          </a:bodyPr>
-          <a:lstStyle/>
-          <a:p>
-            <a:pPr algn="ctr">
-              <a:lnSpc>
-                <a:spcPct val="100000"/>
-              </a:lnSpc>
-            </a:pPr>
-            <a:r>
-              <a:rPr sz="1400" b="1">
-                <a:solidFill>
-                  <a:srgbClr val="2563EB"/>
-                </a:solidFill>
-                <a:latin typeface="PingFang SC"/>
-              </a:rPr>
-              <a:t>任务完成</a:t>
-            </a:r>
-          </a:p>
-        </p:txBody>
-      </p:sp>
-      <p:sp>
-        <p:nvSpPr>
-          <p:cNvPr id="11" name="TextBox 10"/>
-          <p:cNvSpPr txBox="1"/>
-          <p:nvPr/>
-        </p:nvSpPr>
-        <p:spPr>
-          <a:xfrm>
-            <a:off x="285750" y="2305050"/>
-            <a:ext cx="2667000" cy="666750"/>
-          </a:xfrm>
-          <a:prstGeom prst="rect">
-            <a:avLst/>
-          </a:prstGeom>
-          <a:noFill/>
-        </p:spPr>
-        <p:txBody>
-          <a:bodyPr wrap="square" anchor="ctr">
-            <a:spAutoFit/>
-          </a:bodyPr>
-          <a:lstStyle/>
-          <a:p>
-            <a:pPr algn="l">
-              <a:lnSpc>
-                <a:spcPct val="105000"/>
-              </a:lnSpc>
-            </a:pPr>
-            <a:r>
-              <a:rPr sz="1050" b="0">
-                <a:solidFill>
-                  <a:srgbClr val="475569"/>
-                </a:solidFill>
-                <a:latin typeface="PingFang SC"/>
-              </a:rPr>
-              <a:t>提取候选经验</a:t>
-            </a:r>
-          </a:p>
-        </p:txBody>
-      </p:sp>
-      <p:sp>
-        <p:nvSpPr>
-          <p:cNvPr id="12" name="Rounded Rectangle 11"/>
-          <p:cNvSpPr/>
-          <p:nvPr/>
-        </p:nvSpPr>
-        <p:spPr>
-          <a:xfrm>
-            <a:off x="3752850" y="3228975"/>
-            <a:ext cx="209550" cy="209550"/>
-          </a:xfrm>
-          <a:prstGeom prst="roundRect">
-            <a:avLst>
-              <a:gd name="adj" fmla="val 8000"/>
-            </a:avLst>
-          </a:prstGeom>
-          <a:solidFill>
-            <a:srgbClr val="14B8A6"/>
-          </a:solidFill>
-          <a:ln>
-            <a:noFill/>
-          </a:ln>
-          <a:effectLst/>
-        </p:spPr>
-        <p:style>
-          <a:lnRef idx="1">
-            <a:schemeClr val="accent1"/>
-          </a:lnRef>
-          <a:fillRef idx="3">
-            <a:schemeClr val="accent1"/>
-          </a:fillRef>
-          <a:effectRef idx="2">
-            <a:schemeClr val="accent1"/>
-          </a:effectRef>
-          <a:fontRef idx="minor">
-            <a:schemeClr val="lt1"/>
-          </a:fontRef>
-        </p:style>
-        <p:txBody>
-          <a:bodyPr rtlCol="0" anchor="ctr"/>
-          <a:lstStyle/>
-          <a:p>
-            <a:pPr algn="ctr"/>
-          </a:p>
-        </p:txBody>
-      </p:sp>
-      <p:sp>
-        <p:nvSpPr>
-          <p:cNvPr id="13" name="Rounded Rectangle 12"/>
-          <p:cNvSpPr/>
-          <p:nvPr/>
-        </p:nvSpPr>
-        <p:spPr>
-          <a:xfrm>
-            <a:off x="2428875" y="3619500"/>
-            <a:ext cx="2857500" cy="1123950"/>
-          </a:xfrm>
-          <a:prstGeom prst="roundRect">
-            <a:avLst>
-              <a:gd name="adj" fmla="val 8000"/>
-            </a:avLst>
-          </a:prstGeom>
-          <a:solidFill>
-            <a:srgbClr val="F1F5F9"/>
-          </a:solidFill>
-          <a:ln>
-            <a:noFill/>
-          </a:ln>
-          <a:effectLst/>
-        </p:spPr>
-        <p:style>
-          <a:lnRef idx="1">
-            <a:schemeClr val="accent1"/>
-          </a:lnRef>
-          <a:fillRef idx="3">
-            <a:schemeClr val="accent1"/>
-          </a:fillRef>
-          <a:effectRef idx="2">
-            <a:schemeClr val="accent1"/>
-          </a:effectRef>
-          <a:fontRef idx="minor">
-            <a:schemeClr val="lt1"/>
-          </a:fontRef>
-        </p:style>
-        <p:txBody>
-          <a:bodyPr rtlCol="0" anchor="ctr"/>
-          <a:lstStyle/>
-          <a:p>
-            <a:pPr algn="ctr"/>
-          </a:p>
-        </p:txBody>
-      </p:sp>
-      <p:sp>
-        <p:nvSpPr>
-          <p:cNvPr id="14" name="Rectangle 13"/>
-          <p:cNvSpPr/>
-          <p:nvPr/>
-        </p:nvSpPr>
-        <p:spPr>
-          <a:xfrm>
-            <a:off x="2428875" y="3619500"/>
-            <a:ext cx="2857500" cy="38100"/>
-          </a:xfrm>
-          <a:prstGeom prst="rect">
-            <a:avLst/>
-          </a:prstGeom>
-          <a:solidFill>
-            <a:srgbClr val="14B8A6"/>
-          </a:solidFill>
-          <a:ln>
-            <a:noFill/>
-          </a:ln>
-          <a:effectLst/>
-        </p:spPr>
-        <p:style>
-          <a:lnRef idx="1">
-            <a:schemeClr val="accent1"/>
-          </a:lnRef>
-          <a:fillRef idx="3">
-            <a:schemeClr val="accent1"/>
-          </a:fillRef>
-          <a:effectRef idx="2">
-            <a:schemeClr val="accent1"/>
-          </a:effectRef>
-          <a:fontRef idx="minor">
-            <a:schemeClr val="lt1"/>
-          </a:fontRef>
-        </p:style>
-        <p:txBody>
-          <a:bodyPr rtlCol="0" anchor="ctr"/>
-          <a:lstStyle/>
-          <a:p>
-            <a:pPr algn="ctr"/>
-          </a:p>
-        </p:txBody>
-      </p:sp>
-      <p:sp>
-        <p:nvSpPr>
-          <p:cNvPr id="15" name="TextBox 14"/>
-          <p:cNvSpPr txBox="1"/>
-          <p:nvPr/>
-        </p:nvSpPr>
-        <p:spPr>
-          <a:xfrm>
-            <a:off x="2524125" y="3714750"/>
-            <a:ext cx="2667000" cy="285750"/>
-          </a:xfrm>
-          <a:prstGeom prst="rect">
-            <a:avLst/>
-          </a:prstGeom>
-          <a:noFill/>
-        </p:spPr>
-        <p:txBody>
-          <a:bodyPr wrap="square" anchor="ctr">
-            <a:spAutoFit/>
-          </a:bodyPr>
-          <a:lstStyle/>
-          <a:p>
-            <a:pPr algn="ctr">
-              <a:lnSpc>
-                <a:spcPct val="100000"/>
-              </a:lnSpc>
-            </a:pPr>
-            <a:r>
-              <a:rPr sz="1400" b="1">
-                <a:solidFill>
-                  <a:srgbClr val="14B8A6"/>
-                </a:solidFill>
-                <a:latin typeface="PingFang SC"/>
-              </a:rPr>
-              <a:t>写入</a:t>
-            </a:r>
-          </a:p>
-        </p:txBody>
-      </p:sp>
-      <p:sp>
-        <p:nvSpPr>
-          <p:cNvPr id="16" name="TextBox 15"/>
-          <p:cNvSpPr txBox="1"/>
-          <p:nvPr/>
-        </p:nvSpPr>
-        <p:spPr>
-          <a:xfrm>
-            <a:off x="2524125" y="4019550"/>
-            <a:ext cx="2667000" cy="666750"/>
-          </a:xfrm>
-          <a:prstGeom prst="rect">
-            <a:avLst/>
-          </a:prstGeom>
-          <a:noFill/>
-        </p:spPr>
-        <p:txBody>
-          <a:bodyPr wrap="square" anchor="ctr">
-            <a:spAutoFit/>
-          </a:bodyPr>
-          <a:lstStyle/>
-          <a:p>
-            <a:pPr algn="l">
-              <a:lnSpc>
-                <a:spcPct val="105000"/>
-              </a:lnSpc>
-            </a:pPr>
-            <a:r>
-              <a:rPr sz="1050" b="0">
-                <a:solidFill>
-                  <a:srgbClr val="475569"/>
-                </a:solidFill>
-                <a:latin typeface="PingFang SC"/>
-              </a:rPr>
-              <a:t>带置信度与来源</a:t>
-            </a:r>
-          </a:p>
-        </p:txBody>
-      </p:sp>
-      <p:sp>
-        <p:nvSpPr>
-          <p:cNvPr id="17" name="Rounded Rectangle 16"/>
-          <p:cNvSpPr/>
-          <p:nvPr/>
-        </p:nvSpPr>
-        <p:spPr>
-          <a:xfrm>
-            <a:off x="5991225" y="3228975"/>
-            <a:ext cx="209550" cy="209550"/>
-          </a:xfrm>
-          <a:prstGeom prst="roundRect">
-            <a:avLst>
-              <a:gd name="adj" fmla="val 8000"/>
-            </a:avLst>
-          </a:prstGeom>
-          <a:solidFill>
-            <a:srgbClr val="8B5CF6"/>
-          </a:solidFill>
-          <a:ln>
-            <a:noFill/>
-          </a:ln>
-          <a:effectLst/>
-        </p:spPr>
-        <p:style>
-          <a:lnRef idx="1">
-            <a:schemeClr val="accent1"/>
-          </a:lnRef>
-          <a:fillRef idx="3">
-            <a:schemeClr val="accent1"/>
-          </a:fillRef>
-          <a:effectRef idx="2">
-            <a:schemeClr val="accent1"/>
-          </a:effectRef>
-          <a:fontRef idx="minor">
-            <a:schemeClr val="lt1"/>
-          </a:fontRef>
-        </p:style>
-        <p:txBody>
-          <a:bodyPr rtlCol="0" anchor="ctr"/>
-          <a:lstStyle/>
-          <a:p>
-            <a:pPr algn="ctr"/>
-          </a:p>
-        </p:txBody>
-      </p:sp>
-      <p:sp>
-        <p:nvSpPr>
-          <p:cNvPr id="18" name="Rounded Rectangle 17"/>
-          <p:cNvSpPr/>
-          <p:nvPr/>
-        </p:nvSpPr>
-        <p:spPr>
-          <a:xfrm>
-            <a:off x="4667250" y="1905000"/>
-            <a:ext cx="2857500" cy="1123950"/>
-          </a:xfrm>
-          <a:prstGeom prst="roundRect">
-            <a:avLst>
-              <a:gd name="adj" fmla="val 8000"/>
-            </a:avLst>
-          </a:prstGeom>
-          <a:solidFill>
-            <a:srgbClr val="F1F5F9"/>
-          </a:solidFill>
-          <a:ln>
-            <a:noFill/>
-          </a:ln>
-          <a:effectLst/>
-        </p:spPr>
-        <p:style>
-          <a:lnRef idx="1">
-            <a:schemeClr val="accent1"/>
-          </a:lnRef>
-          <a:fillRef idx="3">
-            <a:schemeClr val="accent1"/>
-          </a:fillRef>
-          <a:effectRef idx="2">
-            <a:schemeClr val="accent1"/>
-          </a:effectRef>
-          <a:fontRef idx="minor">
-            <a:schemeClr val="lt1"/>
-          </a:fontRef>
-        </p:style>
-        <p:txBody>
-          <a:bodyPr rtlCol="0" anchor="ctr"/>
-          <a:lstStyle/>
-          <a:p>
-            <a:pPr algn="ctr"/>
-          </a:p>
-        </p:txBody>
-      </p:sp>
-      <p:sp>
-        <p:nvSpPr>
-          <p:cNvPr id="19" name="Rectangle 18"/>
-          <p:cNvSpPr/>
-          <p:nvPr/>
-        </p:nvSpPr>
-        <p:spPr>
-          <a:xfrm>
-            <a:off x="4667250" y="1905000"/>
-            <a:ext cx="2857500" cy="38100"/>
-          </a:xfrm>
-          <a:prstGeom prst="rect">
-            <a:avLst/>
-          </a:prstGeom>
-          <a:solidFill>
-            <a:srgbClr val="8B5CF6"/>
-          </a:solidFill>
-          <a:ln>
-            <a:noFill/>
-          </a:ln>
-          <a:effectLst/>
-        </p:spPr>
-        <p:style>
-          <a:lnRef idx="1">
-            <a:schemeClr val="accent1"/>
-          </a:lnRef>
-          <a:fillRef idx="3">
-            <a:schemeClr val="accent1"/>
-          </a:fillRef>
-          <a:effectRef idx="2">
-            <a:schemeClr val="accent1"/>
-          </a:effectRef>
-          <a:fontRef idx="minor">
-            <a:schemeClr val="lt1"/>
-          </a:fontRef>
-        </p:style>
-        <p:txBody>
-          <a:bodyPr rtlCol="0" anchor="ctr"/>
-          <a:lstStyle/>
-          <a:p>
-            <a:pPr algn="ctr"/>
-          </a:p>
-        </p:txBody>
-      </p:sp>
-      <p:sp>
-        <p:nvSpPr>
-          <p:cNvPr id="20" name="TextBox 19"/>
-          <p:cNvSpPr txBox="1"/>
-          <p:nvPr/>
-        </p:nvSpPr>
-        <p:spPr>
-          <a:xfrm>
-            <a:off x="4762500" y="2000250"/>
-            <a:ext cx="2667000" cy="285750"/>
-          </a:xfrm>
-          <a:prstGeom prst="rect">
-            <a:avLst/>
-          </a:prstGeom>
-          <a:noFill/>
-        </p:spPr>
-        <p:txBody>
-          <a:bodyPr wrap="square" anchor="ctr">
-            <a:spAutoFit/>
-          </a:bodyPr>
-          <a:lstStyle/>
-          <a:p>
-            <a:pPr algn="ctr">
-              <a:lnSpc>
-                <a:spcPct val="100000"/>
-              </a:lnSpc>
-            </a:pPr>
-            <a:r>
-              <a:rPr sz="1400" b="1">
-                <a:solidFill>
-                  <a:srgbClr val="8B5CF6"/>
-                </a:solidFill>
-                <a:latin typeface="PingFang SC"/>
-              </a:rPr>
-              <a:t>使用</a:t>
-            </a:r>
-          </a:p>
-        </p:txBody>
-      </p:sp>
-      <p:sp>
-        <p:nvSpPr>
-          <p:cNvPr id="21" name="TextBox 20"/>
-          <p:cNvSpPr txBox="1"/>
-          <p:nvPr/>
-        </p:nvSpPr>
-        <p:spPr>
-          <a:xfrm>
-            <a:off x="4762500" y="2305050"/>
-            <a:ext cx="2667000" cy="666750"/>
-          </a:xfrm>
-          <a:prstGeom prst="rect">
-            <a:avLst/>
-          </a:prstGeom>
-          <a:noFill/>
-        </p:spPr>
-        <p:txBody>
-          <a:bodyPr wrap="square" anchor="ctr">
-            <a:spAutoFit/>
-          </a:bodyPr>
-          <a:lstStyle/>
-          <a:p>
-            <a:pPr algn="l">
-              <a:lnSpc>
-                <a:spcPct val="105000"/>
-              </a:lnSpc>
-            </a:pPr>
-            <a:r>
-              <a:rPr sz="1050" b="0">
-                <a:solidFill>
-                  <a:srgbClr val="475569"/>
-                </a:solidFill>
-                <a:latin typeface="PingFang SC"/>
-              </a:rPr>
-              <a:t>下次检索召回</a:t>
-            </a:r>
-          </a:p>
-        </p:txBody>
-      </p:sp>
-      <p:sp>
-        <p:nvSpPr>
-          <p:cNvPr id="22" name="Rounded Rectangle 21"/>
-          <p:cNvSpPr/>
-          <p:nvPr/>
-        </p:nvSpPr>
-        <p:spPr>
-          <a:xfrm>
-            <a:off x="8229600" y="3228975"/>
-            <a:ext cx="209550" cy="209550"/>
-          </a:xfrm>
-          <a:prstGeom prst="roundRect">
-            <a:avLst>
-              <a:gd name="adj" fmla="val 8000"/>
-            </a:avLst>
-          </a:prstGeom>
-          <a:solidFill>
-            <a:srgbClr val="F59E0B"/>
-          </a:solidFill>
-          <a:ln>
-            <a:noFill/>
-          </a:ln>
-          <a:effectLst/>
-        </p:spPr>
-        <p:style>
-          <a:lnRef idx="1">
-            <a:schemeClr val="accent1"/>
-          </a:lnRef>
-          <a:fillRef idx="3">
-            <a:schemeClr val="accent1"/>
-          </a:fillRef>
-          <a:effectRef idx="2">
-            <a:schemeClr val="accent1"/>
-          </a:effectRef>
-          <a:fontRef idx="minor">
-            <a:schemeClr val="lt1"/>
-          </a:fontRef>
-        </p:style>
-        <p:txBody>
-          <a:bodyPr rtlCol="0" anchor="ctr"/>
-          <a:lstStyle/>
-          <a:p>
-            <a:pPr algn="ctr"/>
-          </a:p>
-        </p:txBody>
-      </p:sp>
-      <p:sp>
-        <p:nvSpPr>
-          <p:cNvPr id="23" name="Rounded Rectangle 22"/>
-          <p:cNvSpPr/>
-          <p:nvPr/>
-        </p:nvSpPr>
-        <p:spPr>
-          <a:xfrm>
-            <a:off x="6905625" y="3619500"/>
-            <a:ext cx="2857500" cy="1123950"/>
-          </a:xfrm>
-          <a:prstGeom prst="roundRect">
-            <a:avLst>
-              <a:gd name="adj" fmla="val 8000"/>
-            </a:avLst>
-          </a:prstGeom>
-          <a:solidFill>
-            <a:srgbClr val="F1F5F9"/>
-          </a:solidFill>
-          <a:ln>
-            <a:noFill/>
-          </a:ln>
-          <a:effectLst/>
-        </p:spPr>
-        <p:style>
-          <a:lnRef idx="1">
-            <a:schemeClr val="accent1"/>
-          </a:lnRef>
-          <a:fillRef idx="3">
-            <a:schemeClr val="accent1"/>
-          </a:fillRef>
-          <a:effectRef idx="2">
-            <a:schemeClr val="accent1"/>
-          </a:effectRef>
-          <a:fontRef idx="minor">
-            <a:schemeClr val="lt1"/>
-          </a:fontRef>
-        </p:style>
-        <p:txBody>
-          <a:bodyPr rtlCol="0" anchor="ctr"/>
-          <a:lstStyle/>
-          <a:p>
-            <a:pPr algn="ctr"/>
-          </a:p>
-        </p:txBody>
-      </p:sp>
-      <p:sp>
-        <p:nvSpPr>
-          <p:cNvPr id="24" name="Rectangle 23"/>
-          <p:cNvSpPr/>
-          <p:nvPr/>
-        </p:nvSpPr>
-        <p:spPr>
-          <a:xfrm>
-            <a:off x="6905625" y="3619500"/>
-            <a:ext cx="2857500" cy="38100"/>
-          </a:xfrm>
-          <a:prstGeom prst="rect">
-            <a:avLst/>
-          </a:prstGeom>
-          <a:solidFill>
-            <a:srgbClr val="F59E0B"/>
-          </a:solidFill>
-          <a:ln>
-            <a:noFill/>
-          </a:ln>
-          <a:effectLst/>
-        </p:spPr>
-        <p:style>
-          <a:lnRef idx="1">
-            <a:schemeClr val="accent1"/>
-          </a:lnRef>
-          <a:fillRef idx="3">
-            <a:schemeClr val="accent1"/>
-          </a:fillRef>
-          <a:effectRef idx="2">
-            <a:schemeClr val="accent1"/>
-          </a:effectRef>
-          <a:fontRef idx="minor">
-            <a:schemeClr val="lt1"/>
-          </a:fontRef>
-        </p:style>
-        <p:txBody>
-          <a:bodyPr rtlCol="0" anchor="ctr"/>
-          <a:lstStyle/>
-          <a:p>
-            <a:pPr algn="ctr"/>
-          </a:p>
-        </p:txBody>
-      </p:sp>
-      <p:sp>
-        <p:nvSpPr>
-          <p:cNvPr id="25" name="TextBox 24"/>
-          <p:cNvSpPr txBox="1"/>
-          <p:nvPr/>
-        </p:nvSpPr>
-        <p:spPr>
-          <a:xfrm>
-            <a:off x="7000875" y="3714750"/>
-            <a:ext cx="2667000" cy="285750"/>
-          </a:xfrm>
-          <a:prstGeom prst="rect">
-            <a:avLst/>
-          </a:prstGeom>
-          <a:noFill/>
-        </p:spPr>
-        <p:txBody>
-          <a:bodyPr wrap="square" anchor="ctr">
-            <a:spAutoFit/>
-          </a:bodyPr>
-          <a:lstStyle/>
-          <a:p>
-            <a:pPr algn="ctr">
-              <a:lnSpc>
-                <a:spcPct val="100000"/>
-              </a:lnSpc>
-            </a:pPr>
-            <a:r>
-              <a:rPr sz="1400" b="1">
-                <a:solidFill>
-                  <a:srgbClr val="F59E0B"/>
-                </a:solidFill>
-                <a:latin typeface="PingFang SC"/>
-              </a:rPr>
-              <a:t>修正</a:t>
-            </a:r>
-          </a:p>
-        </p:txBody>
-      </p:sp>
-      <p:sp>
-        <p:nvSpPr>
-          <p:cNvPr id="26" name="TextBox 25"/>
-          <p:cNvSpPr txBox="1"/>
-          <p:nvPr/>
-        </p:nvSpPr>
-        <p:spPr>
-          <a:xfrm>
-            <a:off x="7000875" y="4019550"/>
-            <a:ext cx="2667000" cy="666750"/>
-          </a:xfrm>
-          <a:prstGeom prst="rect">
-            <a:avLst/>
-          </a:prstGeom>
-          <a:noFill/>
-        </p:spPr>
-        <p:txBody>
-          <a:bodyPr wrap="square" anchor="ctr">
-            <a:spAutoFit/>
-          </a:bodyPr>
-          <a:lstStyle/>
-          <a:p>
-            <a:pPr algn="l">
-              <a:lnSpc>
-                <a:spcPct val="105000"/>
-              </a:lnSpc>
-            </a:pPr>
-            <a:r>
-              <a:rPr sz="1050" b="0">
-                <a:solidFill>
-                  <a:srgbClr val="475569"/>
-                </a:solidFill>
-                <a:latin typeface="PingFang SC"/>
-              </a:rPr>
-              <a:t>失败触发更新</a:t>
-            </a:r>
-          </a:p>
-        </p:txBody>
-      </p:sp>
-      <p:sp>
-        <p:nvSpPr>
-          <p:cNvPr id="27" name="Rounded Rectangle 26"/>
-          <p:cNvSpPr/>
-          <p:nvPr/>
-        </p:nvSpPr>
-        <p:spPr>
-          <a:xfrm>
-            <a:off x="10467975" y="3228975"/>
-            <a:ext cx="209550" cy="209550"/>
-          </a:xfrm>
-          <a:prstGeom prst="roundRect">
-            <a:avLst>
-              <a:gd name="adj" fmla="val 8000"/>
-            </a:avLst>
-          </a:prstGeom>
-          <a:solidFill>
-            <a:srgbClr val="34D399"/>
-          </a:solidFill>
-          <a:ln>
-            <a:noFill/>
-          </a:ln>
-          <a:effectLst/>
-        </p:spPr>
-        <p:style>
-          <a:lnRef idx="1">
-            <a:schemeClr val="accent1"/>
-          </a:lnRef>
-          <a:fillRef idx="3">
-            <a:schemeClr val="accent1"/>
-          </a:fillRef>
-          <a:effectRef idx="2">
-            <a:schemeClr val="accent1"/>
-          </a:effectRef>
-          <a:fontRef idx="minor">
-            <a:schemeClr val="lt1"/>
-          </a:fontRef>
-        </p:style>
-        <p:txBody>
-          <a:bodyPr rtlCol="0" anchor="ctr"/>
-          <a:lstStyle/>
-          <a:p>
-            <a:pPr algn="ctr"/>
-          </a:p>
-        </p:txBody>
-      </p:sp>
-      <p:sp>
-        <p:nvSpPr>
-          <p:cNvPr id="28" name="Rounded Rectangle 27"/>
-          <p:cNvSpPr/>
-          <p:nvPr/>
-        </p:nvSpPr>
-        <p:spPr>
-          <a:xfrm>
-            <a:off x="9144000" y="1905000"/>
-            <a:ext cx="2857500" cy="1123950"/>
-          </a:xfrm>
-          <a:prstGeom prst="roundRect">
-            <a:avLst>
-              <a:gd name="adj" fmla="val 8000"/>
-            </a:avLst>
-          </a:prstGeom>
-          <a:solidFill>
-            <a:srgbClr val="F1F5F9"/>
-          </a:solidFill>
-          <a:ln>
-            <a:noFill/>
-          </a:ln>
-          <a:effectLst/>
-        </p:spPr>
-        <p:style>
-          <a:lnRef idx="1">
-            <a:schemeClr val="accent1"/>
-          </a:lnRef>
-          <a:fillRef idx="3">
-            <a:schemeClr val="accent1"/>
-          </a:fillRef>
-          <a:effectRef idx="2">
-            <a:schemeClr val="accent1"/>
-          </a:effectRef>
-          <a:fontRef idx="minor">
-            <a:schemeClr val="lt1"/>
-          </a:fontRef>
-        </p:style>
-        <p:txBody>
-          <a:bodyPr rtlCol="0" anchor="ctr"/>
-          <a:lstStyle/>
-          <a:p>
-            <a:pPr algn="ctr"/>
-          </a:p>
-        </p:txBody>
-      </p:sp>
-      <p:sp>
-        <p:nvSpPr>
-          <p:cNvPr id="29" name="Rectangle 28"/>
-          <p:cNvSpPr/>
-          <p:nvPr/>
-        </p:nvSpPr>
-        <p:spPr>
-          <a:xfrm>
-            <a:off x="9144000" y="1905000"/>
-            <a:ext cx="2857500" cy="38100"/>
-          </a:xfrm>
-          <a:prstGeom prst="rect">
-            <a:avLst/>
-          </a:prstGeom>
-          <a:solidFill>
-            <a:srgbClr val="34D399"/>
-          </a:solidFill>
-          <a:ln>
-            <a:noFill/>
-          </a:ln>
-          <a:effectLst/>
-        </p:spPr>
-        <p:style>
-          <a:lnRef idx="1">
-            <a:schemeClr val="accent1"/>
-          </a:lnRef>
-          <a:fillRef idx="3">
-            <a:schemeClr val="accent1"/>
-          </a:fillRef>
-          <a:effectRef idx="2">
-            <a:schemeClr val="accent1"/>
-          </a:effectRef>
-          <a:fontRef idx="minor">
-            <a:schemeClr val="lt1"/>
-          </a:fontRef>
-        </p:style>
-        <p:txBody>
-          <a:bodyPr rtlCol="0" anchor="ctr"/>
-          <a:lstStyle/>
-          <a:p>
-            <a:pPr algn="ctr"/>
-          </a:p>
-        </p:txBody>
-      </p:sp>
-      <p:sp>
-        <p:nvSpPr>
-          <p:cNvPr id="30" name="TextBox 29"/>
-          <p:cNvSpPr txBox="1"/>
-          <p:nvPr/>
-        </p:nvSpPr>
-        <p:spPr>
-          <a:xfrm>
-            <a:off x="9239250" y="2000250"/>
-            <a:ext cx="2667000" cy="285750"/>
-          </a:xfrm>
-          <a:prstGeom prst="rect">
-            <a:avLst/>
-          </a:prstGeom>
-          <a:noFill/>
-        </p:spPr>
-        <p:txBody>
-          <a:bodyPr wrap="square" anchor="ctr">
-            <a:spAutoFit/>
-          </a:bodyPr>
-          <a:lstStyle/>
-          <a:p>
-            <a:pPr algn="ctr">
-              <a:lnSpc>
-                <a:spcPct val="100000"/>
-              </a:lnSpc>
-            </a:pPr>
-            <a:r>
-              <a:rPr sz="1400" b="1">
-                <a:solidFill>
-                  <a:srgbClr val="34D399"/>
-                </a:solidFill>
-                <a:latin typeface="PingFang SC"/>
-              </a:rPr>
-              <a:t>淘汰</a:t>
-            </a:r>
-          </a:p>
-        </p:txBody>
-      </p:sp>
-      <p:sp>
-        <p:nvSpPr>
-          <p:cNvPr id="31" name="TextBox 30"/>
-          <p:cNvSpPr txBox="1"/>
-          <p:nvPr/>
-        </p:nvSpPr>
-        <p:spPr>
-          <a:xfrm>
-            <a:off x="9239250" y="2305050"/>
-            <a:ext cx="2667000" cy="666750"/>
-          </a:xfrm>
-          <a:prstGeom prst="rect">
-            <a:avLst/>
-          </a:prstGeom>
-          <a:noFill/>
-        </p:spPr>
-        <p:txBody>
-          <a:bodyPr wrap="square" anchor="ctr">
-            <a:spAutoFit/>
-          </a:bodyPr>
-          <a:lstStyle/>
-          <a:p>
-            <a:pPr algn="l">
-              <a:lnSpc>
-                <a:spcPct val="105000"/>
-              </a:lnSpc>
-            </a:pPr>
-            <a:r>
-              <a:rPr sz="1050" b="0">
-                <a:solidFill>
-                  <a:srgbClr val="475569"/>
-                </a:solidFill>
-                <a:latin typeface="PingFang SC"/>
-              </a:rPr>
-              <a:t>TTL+低置信清理|组织级记忆资产</a:t>
-            </a:r>
-          </a:p>
-        </p:txBody>
-      </p:sp>
-      <p:sp>
-        <p:nvSpPr>
-          <p:cNvPr id="32" name="TextBox 31"/>
-          <p:cNvSpPr txBox="1"/>
-          <p:nvPr/>
-        </p:nvSpPr>
-        <p:spPr>
-          <a:xfrm>
-            <a:off x="10287000" y="6534150"/>
-            <a:ext cx="1619250" cy="266700"/>
-          </a:xfrm>
-          <a:prstGeom prst="rect">
-            <a:avLst/>
-          </a:prstGeom>
-          <a:noFill/>
-        </p:spPr>
-        <p:txBody>
-          <a:bodyPr wrap="square" anchor="ctr">
-            <a:spAutoFit/>
-          </a:bodyPr>
-          <a:lstStyle/>
-          <a:p>
-            <a:pPr algn="r">
-              <a:lnSpc>
-                <a:spcPct val="100000"/>
-              </a:lnSpc>
-            </a:pPr>
-            <a:r>
               <a:rPr sz="900" b="0">
                 <a:solidFill>
                   <a:srgbClr val="94A3B8"/>
@@ -16636,7 +16567,7 @@
       </p:sp>
       <p:sp>
         <p:nvSpPr>
-          <p:cNvPr id="33" name="TextBox 32"/>
+          <p:cNvPr id="32" name="TextBox 31"/>
           <p:cNvSpPr txBox="1"/>
           <p:nvPr/>
         </p:nvSpPr>
@@ -23298,14 +23229,682 @@
       </p:sp>
       <p:sp>
         <p:nvSpPr>
-          <p:cNvPr id="5" name="TextBox 4"/>
+          <p:cNvPr id="5" name="Rounded Rectangle 4"/>
+          <p:cNvSpPr/>
+          <p:nvPr/>
+        </p:nvSpPr>
+        <p:spPr>
+          <a:xfrm>
+            <a:off x="4935855" y="1333500"/>
+            <a:ext cx="2320290" cy="1066800"/>
+          </a:xfrm>
+          <a:prstGeom prst="roundRect">
+            <a:avLst>
+              <a:gd name="adj" fmla="val 8000"/>
+            </a:avLst>
+          </a:prstGeom>
+          <a:solidFill>
+            <a:srgbClr val="FFFFFF"/>
+          </a:solidFill>
+          <a:ln w="12700">
+            <a:solidFill>
+              <a:srgbClr val="8B5CF6"/>
+            </a:solidFill>
+          </a:ln>
+          <a:effectLst/>
+        </p:spPr>
+        <p:style>
+          <a:lnRef idx="1">
+            <a:schemeClr val="accent1"/>
+          </a:lnRef>
+          <a:fillRef idx="3">
+            <a:schemeClr val="accent1"/>
+          </a:fillRef>
+          <a:effectRef idx="2">
+            <a:schemeClr val="accent1"/>
+          </a:effectRef>
+          <a:fontRef idx="minor">
+            <a:schemeClr val="lt1"/>
+          </a:fontRef>
+        </p:style>
+        <p:txBody>
+          <a:bodyPr rtlCol="0" anchor="ctr"/>
+          <a:lstStyle/>
+          <a:p>
+            <a:pPr algn="ctr"/>
+          </a:p>
+        </p:txBody>
+      </p:sp>
+      <p:sp>
+        <p:nvSpPr>
+          <p:cNvPr id="6" name="Rectangle 5"/>
+          <p:cNvSpPr/>
+          <p:nvPr/>
+        </p:nvSpPr>
+        <p:spPr>
+          <a:xfrm>
+            <a:off x="4935855" y="1333500"/>
+            <a:ext cx="57150" cy="1066800"/>
+          </a:xfrm>
+          <a:prstGeom prst="rect">
+            <a:avLst/>
+          </a:prstGeom>
+          <a:solidFill>
+            <a:srgbClr val="8B5CF6"/>
+          </a:solidFill>
+          <a:ln>
+            <a:noFill/>
+          </a:ln>
+          <a:effectLst/>
+        </p:spPr>
+        <p:style>
+          <a:lnRef idx="1">
+            <a:schemeClr val="accent1"/>
+          </a:lnRef>
+          <a:fillRef idx="3">
+            <a:schemeClr val="accent1"/>
+          </a:fillRef>
+          <a:effectRef idx="2">
+            <a:schemeClr val="accent1"/>
+          </a:effectRef>
+          <a:fontRef idx="minor">
+            <a:schemeClr val="lt1"/>
+          </a:fontRef>
+        </p:style>
+        <p:txBody>
+          <a:bodyPr rtlCol="0" anchor="ctr"/>
+          <a:lstStyle/>
+          <a:p>
+            <a:pPr algn="ctr"/>
+          </a:p>
+        </p:txBody>
+      </p:sp>
+      <p:sp>
+        <p:nvSpPr>
+          <p:cNvPr id="7" name="TextBox 6"/>
           <p:cNvSpPr txBox="1"/>
           <p:nvPr/>
         </p:nvSpPr>
         <p:spPr>
           <a:xfrm>
-            <a:off x="9334500" y="0"/>
-            <a:ext cx="2667000" cy="704850"/>
+            <a:off x="5126355" y="1333500"/>
+            <a:ext cx="881710" cy="1066800"/>
+          </a:xfrm>
+          <a:prstGeom prst="rect">
+            <a:avLst/>
+          </a:prstGeom>
+          <a:noFill/>
+        </p:spPr>
+        <p:txBody>
+          <a:bodyPr wrap="square" anchor="ctr">
+            <a:spAutoFit/>
+          </a:bodyPr>
+          <a:lstStyle/>
+          <a:p>
+            <a:pPr algn="l">
+              <a:lnSpc>
+                <a:spcPct val="100000"/>
+              </a:lnSpc>
+            </a:pPr>
+            <a:r>
+              <a:rPr sz="1600" b="1">
+                <a:solidFill>
+                  <a:srgbClr val="8B5CF6"/>
+                </a:solidFill>
+                <a:latin typeface="PingFang SC"/>
+              </a:rPr>
+              <a:t>项目级</a:t>
+            </a:r>
+          </a:p>
+        </p:txBody>
+      </p:sp>
+      <p:sp>
+        <p:nvSpPr>
+          <p:cNvPr id="8" name="TextBox 7"/>
+          <p:cNvSpPr txBox="1"/>
+          <p:nvPr/>
+        </p:nvSpPr>
+        <p:spPr>
+          <a:xfrm>
+            <a:off x="5863971" y="1333500"/>
+            <a:ext cx="1345768" cy="1066800"/>
+          </a:xfrm>
+          <a:prstGeom prst="rect">
+            <a:avLst/>
+          </a:prstGeom>
+          <a:noFill/>
+        </p:spPr>
+        <p:txBody>
+          <a:bodyPr wrap="square" anchor="ctr">
+            <a:spAutoFit/>
+          </a:bodyPr>
+          <a:lstStyle/>
+          <a:p>
+            <a:pPr algn="l">
+              <a:lnSpc>
+                <a:spcPct val="100000"/>
+              </a:lnSpc>
+            </a:pPr>
+            <a:r>
+              <a:rPr sz="1200" b="0">
+                <a:solidFill>
+                  <a:srgbClr val="475569"/>
+                </a:solidFill>
+                <a:latin typeface="PingFang SC"/>
+              </a:rPr>
+              <a:t>技术栈/构建命令/约定(随仓库)</a:t>
+            </a:r>
+          </a:p>
+        </p:txBody>
+      </p:sp>
+      <p:cxnSp>
+        <p:nvCxnSpPr>
+          <p:cNvPr id="9" name="Connector 8"/>
+          <p:cNvCxnSpPr/>
+          <p:nvPr/>
+        </p:nvCxnSpPr>
+        <p:spPr>
+          <a:xfrm>
+            <a:off x="6096000" y="2419350"/>
+            <a:ext cx="0" cy="171450"/>
+          </a:xfrm>
+          <a:prstGeom prst="line">
+            <a:avLst/>
+          </a:prstGeom>
+          <a:ln w="15240">
+            <a:solidFill>
+              <a:srgbClr val="94A3B8"/>
+            </a:solidFill>
+          </a:ln>
+        </p:spPr>
+        <p:style>
+          <a:lnRef idx="2">
+            <a:schemeClr val="accent1"/>
+          </a:lnRef>
+          <a:fillRef idx="0">
+            <a:schemeClr val="accent1"/>
+          </a:fillRef>
+          <a:effectRef idx="1">
+            <a:schemeClr val="accent1"/>
+          </a:effectRef>
+          <a:fontRef idx="minor">
+            <a:schemeClr val="tx1"/>
+          </a:fontRef>
+        </p:style>
+      </p:cxnSp>
+      <p:sp>
+        <p:nvSpPr>
+          <p:cNvPr id="10" name="Isosceles Triangle 9"/>
+          <p:cNvSpPr/>
+          <p:nvPr/>
+        </p:nvSpPr>
+        <p:spPr>
+          <a:xfrm rot="10800000">
+            <a:off x="6053138" y="2505076"/>
+            <a:ext cx="85725" cy="85725"/>
+          </a:xfrm>
+          <a:prstGeom prst="triangle">
+            <a:avLst/>
+          </a:prstGeom>
+          <a:solidFill>
+            <a:srgbClr val="94A3B8"/>
+          </a:solidFill>
+          <a:ln>
+            <a:noFill/>
+          </a:ln>
+          <a:effectLst/>
+        </p:spPr>
+        <p:style>
+          <a:lnRef idx="1">
+            <a:schemeClr val="accent1"/>
+          </a:lnRef>
+          <a:fillRef idx="3">
+            <a:schemeClr val="accent1"/>
+          </a:fillRef>
+          <a:effectRef idx="2">
+            <a:schemeClr val="accent1"/>
+          </a:effectRef>
+          <a:fontRef idx="minor">
+            <a:schemeClr val="lt1"/>
+          </a:fontRef>
+        </p:style>
+        <p:txBody>
+          <a:bodyPr rtlCol="0" anchor="ctr"/>
+          <a:lstStyle/>
+          <a:p>
+            <a:pPr algn="ctr"/>
+          </a:p>
+        </p:txBody>
+      </p:sp>
+      <p:sp>
+        <p:nvSpPr>
+          <p:cNvPr id="11" name="Rounded Rectangle 10"/>
+          <p:cNvSpPr/>
+          <p:nvPr/>
+        </p:nvSpPr>
+        <p:spPr>
+          <a:xfrm>
+            <a:off x="4134802" y="2609850"/>
+            <a:ext cx="3922395" cy="1066800"/>
+          </a:xfrm>
+          <a:prstGeom prst="roundRect">
+            <a:avLst>
+              <a:gd name="adj" fmla="val 8000"/>
+            </a:avLst>
+          </a:prstGeom>
+          <a:solidFill>
+            <a:srgbClr val="FFFFFF"/>
+          </a:solidFill>
+          <a:ln w="12700">
+            <a:solidFill>
+              <a:srgbClr val="14B8A6"/>
+            </a:solidFill>
+          </a:ln>
+          <a:effectLst/>
+        </p:spPr>
+        <p:style>
+          <a:lnRef idx="1">
+            <a:schemeClr val="accent1"/>
+          </a:lnRef>
+          <a:fillRef idx="3">
+            <a:schemeClr val="accent1"/>
+          </a:fillRef>
+          <a:effectRef idx="2">
+            <a:schemeClr val="accent1"/>
+          </a:effectRef>
+          <a:fontRef idx="minor">
+            <a:schemeClr val="lt1"/>
+          </a:fontRef>
+        </p:style>
+        <p:txBody>
+          <a:bodyPr rtlCol="0" anchor="ctr"/>
+          <a:lstStyle/>
+          <a:p>
+            <a:pPr algn="ctr"/>
+          </a:p>
+        </p:txBody>
+      </p:sp>
+      <p:sp>
+        <p:nvSpPr>
+          <p:cNvPr id="12" name="Rectangle 11"/>
+          <p:cNvSpPr/>
+          <p:nvPr/>
+        </p:nvSpPr>
+        <p:spPr>
+          <a:xfrm>
+            <a:off x="4134802" y="2609850"/>
+            <a:ext cx="57150" cy="1066800"/>
+          </a:xfrm>
+          <a:prstGeom prst="rect">
+            <a:avLst/>
+          </a:prstGeom>
+          <a:solidFill>
+            <a:srgbClr val="14B8A6"/>
+          </a:solidFill>
+          <a:ln>
+            <a:noFill/>
+          </a:ln>
+          <a:effectLst/>
+        </p:spPr>
+        <p:style>
+          <a:lnRef idx="1">
+            <a:schemeClr val="accent1"/>
+          </a:lnRef>
+          <a:fillRef idx="3">
+            <a:schemeClr val="accent1"/>
+          </a:fillRef>
+          <a:effectRef idx="2">
+            <a:schemeClr val="accent1"/>
+          </a:effectRef>
+          <a:fontRef idx="minor">
+            <a:schemeClr val="lt1"/>
+          </a:fontRef>
+        </p:style>
+        <p:txBody>
+          <a:bodyPr rtlCol="0" anchor="ctr"/>
+          <a:lstStyle/>
+          <a:p>
+            <a:pPr algn="ctr"/>
+          </a:p>
+        </p:txBody>
+      </p:sp>
+      <p:sp>
+        <p:nvSpPr>
+          <p:cNvPr id="13" name="TextBox 12"/>
+          <p:cNvSpPr txBox="1"/>
+          <p:nvPr/>
+        </p:nvSpPr>
+        <p:spPr>
+          <a:xfrm>
+            <a:off x="4325302" y="2609850"/>
+            <a:ext cx="1490510" cy="1066800"/>
+          </a:xfrm>
+          <a:prstGeom prst="rect">
+            <a:avLst/>
+          </a:prstGeom>
+          <a:noFill/>
+        </p:spPr>
+        <p:txBody>
+          <a:bodyPr wrap="square" anchor="ctr">
+            <a:spAutoFit/>
+          </a:bodyPr>
+          <a:lstStyle/>
+          <a:p>
+            <a:pPr algn="l">
+              <a:lnSpc>
+                <a:spcPct val="100000"/>
+              </a:lnSpc>
+            </a:pPr>
+            <a:r>
+              <a:rPr sz="1600" b="1">
+                <a:solidFill>
+                  <a:srgbClr val="14B8A6"/>
+                </a:solidFill>
+                <a:latin typeface="PingFang SC"/>
+              </a:rPr>
+              <a:t>长期</a:t>
+            </a:r>
+          </a:p>
+        </p:txBody>
+      </p:sp>
+      <p:sp>
+        <p:nvSpPr>
+          <p:cNvPr id="14" name="TextBox 13"/>
+          <p:cNvSpPr txBox="1"/>
+          <p:nvPr/>
+        </p:nvSpPr>
+        <p:spPr>
+          <a:xfrm>
+            <a:off x="5703760" y="2609850"/>
+            <a:ext cx="2274989" cy="1066800"/>
+          </a:xfrm>
+          <a:prstGeom prst="rect">
+            <a:avLst/>
+          </a:prstGeom>
+          <a:noFill/>
+        </p:spPr>
+        <p:txBody>
+          <a:bodyPr wrap="square" anchor="ctr">
+            <a:spAutoFit/>
+          </a:bodyPr>
+          <a:lstStyle/>
+          <a:p>
+            <a:pPr algn="l">
+              <a:lnSpc>
+                <a:spcPct val="100000"/>
+              </a:lnSpc>
+            </a:pPr>
+            <a:r>
+              <a:rPr sz="1200" b="0">
+                <a:solidFill>
+                  <a:srgbClr val="475569"/>
+                </a:solidFill>
+                <a:latin typeface="PingFang SC"/>
+              </a:rPr>
+              <a:t>偏好/历史/经验(带置信度)</a:t>
+            </a:r>
+          </a:p>
+        </p:txBody>
+      </p:sp>
+      <p:cxnSp>
+        <p:nvCxnSpPr>
+          <p:cNvPr id="15" name="Connector 14"/>
+          <p:cNvCxnSpPr/>
+          <p:nvPr/>
+        </p:nvCxnSpPr>
+        <p:spPr>
+          <a:xfrm>
+            <a:off x="6096000" y="3695700"/>
+            <a:ext cx="0" cy="171450"/>
+          </a:xfrm>
+          <a:prstGeom prst="line">
+            <a:avLst/>
+          </a:prstGeom>
+          <a:ln w="15240">
+            <a:solidFill>
+              <a:srgbClr val="94A3B8"/>
+            </a:solidFill>
+          </a:ln>
+        </p:spPr>
+        <p:style>
+          <a:lnRef idx="2">
+            <a:schemeClr val="accent1"/>
+          </a:lnRef>
+          <a:fillRef idx="0">
+            <a:schemeClr val="accent1"/>
+          </a:fillRef>
+          <a:effectRef idx="1">
+            <a:schemeClr val="accent1"/>
+          </a:effectRef>
+          <a:fontRef idx="minor">
+            <a:schemeClr val="tx1"/>
+          </a:fontRef>
+        </p:style>
+      </p:cxnSp>
+      <p:sp>
+        <p:nvSpPr>
+          <p:cNvPr id="16" name="Isosceles Triangle 15"/>
+          <p:cNvSpPr/>
+          <p:nvPr/>
+        </p:nvSpPr>
+        <p:spPr>
+          <a:xfrm rot="10800000">
+            <a:off x="6053138" y="3781426"/>
+            <a:ext cx="85725" cy="85725"/>
+          </a:xfrm>
+          <a:prstGeom prst="triangle">
+            <a:avLst/>
+          </a:prstGeom>
+          <a:solidFill>
+            <a:srgbClr val="94A3B8"/>
+          </a:solidFill>
+          <a:ln>
+            <a:noFill/>
+          </a:ln>
+          <a:effectLst/>
+        </p:spPr>
+        <p:style>
+          <a:lnRef idx="1">
+            <a:schemeClr val="accent1"/>
+          </a:lnRef>
+          <a:fillRef idx="3">
+            <a:schemeClr val="accent1"/>
+          </a:fillRef>
+          <a:effectRef idx="2">
+            <a:schemeClr val="accent1"/>
+          </a:effectRef>
+          <a:fontRef idx="minor">
+            <a:schemeClr val="lt1"/>
+          </a:fontRef>
+        </p:style>
+        <p:txBody>
+          <a:bodyPr rtlCol="0" anchor="ctr"/>
+          <a:lstStyle/>
+          <a:p>
+            <a:pPr algn="ctr"/>
+          </a:p>
+        </p:txBody>
+      </p:sp>
+      <p:sp>
+        <p:nvSpPr>
+          <p:cNvPr id="17" name="Rounded Rectangle 16"/>
+          <p:cNvSpPr/>
+          <p:nvPr/>
+        </p:nvSpPr>
+        <p:spPr>
+          <a:xfrm>
+            <a:off x="3333750" y="3886200"/>
+            <a:ext cx="5524500" cy="1066800"/>
+          </a:xfrm>
+          <a:prstGeom prst="roundRect">
+            <a:avLst>
+              <a:gd name="adj" fmla="val 8000"/>
+            </a:avLst>
+          </a:prstGeom>
+          <a:solidFill>
+            <a:srgbClr val="FFFFFF"/>
+          </a:solidFill>
+          <a:ln w="12700">
+            <a:solidFill>
+              <a:srgbClr val="2563EB"/>
+            </a:solidFill>
+          </a:ln>
+          <a:effectLst/>
+        </p:spPr>
+        <p:style>
+          <a:lnRef idx="1">
+            <a:schemeClr val="accent1"/>
+          </a:lnRef>
+          <a:fillRef idx="3">
+            <a:schemeClr val="accent1"/>
+          </a:fillRef>
+          <a:effectRef idx="2">
+            <a:schemeClr val="accent1"/>
+          </a:effectRef>
+          <a:fontRef idx="minor">
+            <a:schemeClr val="lt1"/>
+          </a:fontRef>
+        </p:style>
+        <p:txBody>
+          <a:bodyPr rtlCol="0" anchor="ctr"/>
+          <a:lstStyle/>
+          <a:p>
+            <a:pPr algn="ctr"/>
+          </a:p>
+        </p:txBody>
+      </p:sp>
+      <p:sp>
+        <p:nvSpPr>
+          <p:cNvPr id="18" name="Rectangle 17"/>
+          <p:cNvSpPr/>
+          <p:nvPr/>
+        </p:nvSpPr>
+        <p:spPr>
+          <a:xfrm>
+            <a:off x="3333750" y="3886200"/>
+            <a:ext cx="57150" cy="1066800"/>
+          </a:xfrm>
+          <a:prstGeom prst="rect">
+            <a:avLst/>
+          </a:prstGeom>
+          <a:solidFill>
+            <a:srgbClr val="2563EB"/>
+          </a:solidFill>
+          <a:ln>
+            <a:noFill/>
+          </a:ln>
+          <a:effectLst/>
+        </p:spPr>
+        <p:style>
+          <a:lnRef idx="1">
+            <a:schemeClr val="accent1"/>
+          </a:lnRef>
+          <a:fillRef idx="3">
+            <a:schemeClr val="accent1"/>
+          </a:fillRef>
+          <a:effectRef idx="2">
+            <a:schemeClr val="accent1"/>
+          </a:effectRef>
+          <a:fontRef idx="minor">
+            <a:schemeClr val="lt1"/>
+          </a:fontRef>
+        </p:style>
+        <p:txBody>
+          <a:bodyPr rtlCol="0" anchor="ctr"/>
+          <a:lstStyle/>
+          <a:p>
+            <a:pPr algn="ctr"/>
+          </a:p>
+        </p:txBody>
+      </p:sp>
+      <p:sp>
+        <p:nvSpPr>
+          <p:cNvPr id="19" name="TextBox 18"/>
+          <p:cNvSpPr txBox="1"/>
+          <p:nvPr/>
+        </p:nvSpPr>
+        <p:spPr>
+          <a:xfrm>
+            <a:off x="3524250" y="3886200"/>
+            <a:ext cx="2099310" cy="1066800"/>
+          </a:xfrm>
+          <a:prstGeom prst="rect">
+            <a:avLst/>
+          </a:prstGeom>
+          <a:noFill/>
+        </p:spPr>
+        <p:txBody>
+          <a:bodyPr wrap="square" anchor="ctr">
+            <a:spAutoFit/>
+          </a:bodyPr>
+          <a:lstStyle/>
+          <a:p>
+            <a:pPr algn="l">
+              <a:lnSpc>
+                <a:spcPct val="100000"/>
+              </a:lnSpc>
+            </a:pPr>
+            <a:r>
+              <a:rPr sz="1600" b="1">
+                <a:solidFill>
+                  <a:srgbClr val="2563EB"/>
+                </a:solidFill>
+                <a:latin typeface="PingFang SC"/>
+              </a:rPr>
+              <a:t>短期</a:t>
+            </a:r>
+          </a:p>
+        </p:txBody>
+      </p:sp>
+      <p:sp>
+        <p:nvSpPr>
+          <p:cNvPr id="20" name="TextBox 19"/>
+          <p:cNvSpPr txBox="1"/>
+          <p:nvPr/>
+        </p:nvSpPr>
+        <p:spPr>
+          <a:xfrm>
+            <a:off x="5543550" y="3886200"/>
+            <a:ext cx="3204210" cy="1066800"/>
+          </a:xfrm>
+          <a:prstGeom prst="rect">
+            <a:avLst/>
+          </a:prstGeom>
+          <a:noFill/>
+        </p:spPr>
+        <p:txBody>
+          <a:bodyPr wrap="square" anchor="ctr">
+            <a:spAutoFit/>
+          </a:bodyPr>
+          <a:lstStyle/>
+          <a:p>
+            <a:pPr algn="l">
+              <a:lnSpc>
+                <a:spcPct val="100000"/>
+              </a:lnSpc>
+            </a:pPr>
+            <a:r>
+              <a:rPr sz="1200" b="0">
+                <a:solidFill>
+                  <a:srgbClr val="475569"/>
+                </a:solidFill>
+                <a:latin typeface="PingFang SC"/>
+              </a:rPr>
+              <a:t>会话与任务状态(易失)</a:t>
+            </a:r>
+          </a:p>
+        </p:txBody>
+      </p:sp>
+      <p:sp>
+        <p:nvSpPr>
+          <p:cNvPr id="21" name="TextBox 20"/>
+          <p:cNvSpPr txBox="1"/>
+          <p:nvPr/>
+        </p:nvSpPr>
+        <p:spPr>
+          <a:xfrm>
+            <a:off x="10287000" y="6534150"/>
+            <a:ext cx="1619250" cy="266700"/>
           </a:xfrm>
           <a:prstGeom prst="rect">
             <a:avLst/>
@@ -23324,713 +23923,6 @@
               </a:lnSpc>
             </a:pPr>
             <a:r>
-              <a:rPr sz="1100" b="0">
-                <a:solidFill>
-                  <a:srgbClr val="94A3B8"/>
-                </a:solidFill>
-                <a:latin typeface="PingFang SC"/>
-              </a:rPr>
-              <a:t>项目级:技术栈/构建命令/约定(随仓库);长期:偏好/历史/经验(带置信度);短期:会话与任务状态(易失)|生命周期:仓库级 &gt; 跨任务 &gt; 单会话</a:t>
-            </a:r>
-          </a:p>
-        </p:txBody>
-      </p:sp>
-      <p:sp>
-        <p:nvSpPr>
-          <p:cNvPr id="6" name="Rounded Rectangle 5"/>
-          <p:cNvSpPr/>
-          <p:nvPr/>
-        </p:nvSpPr>
-        <p:spPr>
-          <a:xfrm>
-            <a:off x="4935855" y="1333500"/>
-            <a:ext cx="2320290" cy="1066800"/>
-          </a:xfrm>
-          <a:prstGeom prst="roundRect">
-            <a:avLst>
-              <a:gd name="adj" fmla="val 8000"/>
-            </a:avLst>
-          </a:prstGeom>
-          <a:solidFill>
-            <a:srgbClr val="FFFFFF"/>
-          </a:solidFill>
-          <a:ln w="12700">
-            <a:solidFill>
-              <a:srgbClr val="8B5CF6"/>
-            </a:solidFill>
-          </a:ln>
-          <a:effectLst/>
-        </p:spPr>
-        <p:style>
-          <a:lnRef idx="1">
-            <a:schemeClr val="accent1"/>
-          </a:lnRef>
-          <a:fillRef idx="3">
-            <a:schemeClr val="accent1"/>
-          </a:fillRef>
-          <a:effectRef idx="2">
-            <a:schemeClr val="accent1"/>
-          </a:effectRef>
-          <a:fontRef idx="minor">
-            <a:schemeClr val="lt1"/>
-          </a:fontRef>
-        </p:style>
-        <p:txBody>
-          <a:bodyPr rtlCol="0" anchor="ctr"/>
-          <a:lstStyle/>
-          <a:p>
-            <a:pPr algn="ctr"/>
-          </a:p>
-        </p:txBody>
-      </p:sp>
-      <p:sp>
-        <p:nvSpPr>
-          <p:cNvPr id="7" name="Rectangle 6"/>
-          <p:cNvSpPr/>
-          <p:nvPr/>
-        </p:nvSpPr>
-        <p:spPr>
-          <a:xfrm>
-            <a:off x="4935855" y="1333500"/>
-            <a:ext cx="57150" cy="1066800"/>
-          </a:xfrm>
-          <a:prstGeom prst="rect">
-            <a:avLst/>
-          </a:prstGeom>
-          <a:solidFill>
-            <a:srgbClr val="8B5CF6"/>
-          </a:solidFill>
-          <a:ln>
-            <a:noFill/>
-          </a:ln>
-          <a:effectLst/>
-        </p:spPr>
-        <p:style>
-          <a:lnRef idx="1">
-            <a:schemeClr val="accent1"/>
-          </a:lnRef>
-          <a:fillRef idx="3">
-            <a:schemeClr val="accent1"/>
-          </a:fillRef>
-          <a:effectRef idx="2">
-            <a:schemeClr val="accent1"/>
-          </a:effectRef>
-          <a:fontRef idx="minor">
-            <a:schemeClr val="lt1"/>
-          </a:fontRef>
-        </p:style>
-        <p:txBody>
-          <a:bodyPr rtlCol="0" anchor="ctr"/>
-          <a:lstStyle/>
-          <a:p>
-            <a:pPr algn="ctr"/>
-          </a:p>
-        </p:txBody>
-      </p:sp>
-      <p:sp>
-        <p:nvSpPr>
-          <p:cNvPr id="8" name="TextBox 7"/>
-          <p:cNvSpPr txBox="1"/>
-          <p:nvPr/>
-        </p:nvSpPr>
-        <p:spPr>
-          <a:xfrm>
-            <a:off x="5126355" y="1333500"/>
-            <a:ext cx="881710" cy="1066800"/>
-          </a:xfrm>
-          <a:prstGeom prst="rect">
-            <a:avLst/>
-          </a:prstGeom>
-          <a:noFill/>
-        </p:spPr>
-        <p:txBody>
-          <a:bodyPr wrap="square" anchor="ctr">
-            <a:spAutoFit/>
-          </a:bodyPr>
-          <a:lstStyle/>
-          <a:p>
-            <a:pPr algn="l">
-              <a:lnSpc>
-                <a:spcPct val="100000"/>
-              </a:lnSpc>
-            </a:pPr>
-            <a:r>
-              <a:rPr sz="1600" b="1">
-                <a:solidFill>
-                  <a:srgbClr val="8B5CF6"/>
-                </a:solidFill>
-                <a:latin typeface="PingFang SC"/>
-              </a:rPr>
-              <a:t>项目级</a:t>
-            </a:r>
-          </a:p>
-        </p:txBody>
-      </p:sp>
-      <p:sp>
-        <p:nvSpPr>
-          <p:cNvPr id="9" name="TextBox 8"/>
-          <p:cNvSpPr txBox="1"/>
-          <p:nvPr/>
-        </p:nvSpPr>
-        <p:spPr>
-          <a:xfrm>
-            <a:off x="5863971" y="1333500"/>
-            <a:ext cx="1345768" cy="1066800"/>
-          </a:xfrm>
-          <a:prstGeom prst="rect">
-            <a:avLst/>
-          </a:prstGeom>
-          <a:noFill/>
-        </p:spPr>
-        <p:txBody>
-          <a:bodyPr wrap="square" anchor="ctr">
-            <a:spAutoFit/>
-          </a:bodyPr>
-          <a:lstStyle/>
-          <a:p>
-            <a:pPr algn="l">
-              <a:lnSpc>
-                <a:spcPct val="100000"/>
-              </a:lnSpc>
-            </a:pPr>
-            <a:r>
-              <a:rPr sz="1200" b="0">
-                <a:solidFill>
-                  <a:srgbClr val="475569"/>
-                </a:solidFill>
-                <a:latin typeface="PingFang SC"/>
-              </a:rPr>
-              <a:t>技术栈/构建命令/约定(随仓库)</a:t>
-            </a:r>
-          </a:p>
-        </p:txBody>
-      </p:sp>
-      <p:cxnSp>
-        <p:nvCxnSpPr>
-          <p:cNvPr id="10" name="Connector 9"/>
-          <p:cNvCxnSpPr/>
-          <p:nvPr/>
-        </p:nvCxnSpPr>
-        <p:spPr>
-          <a:xfrm>
-            <a:off x="6096000" y="2419350"/>
-            <a:ext cx="0" cy="171450"/>
-          </a:xfrm>
-          <a:prstGeom prst="line">
-            <a:avLst/>
-          </a:prstGeom>
-          <a:ln w="15240">
-            <a:solidFill>
-              <a:srgbClr val="94A3B8"/>
-            </a:solidFill>
-          </a:ln>
-        </p:spPr>
-        <p:style>
-          <a:lnRef idx="2">
-            <a:schemeClr val="accent1"/>
-          </a:lnRef>
-          <a:fillRef idx="0">
-            <a:schemeClr val="accent1"/>
-          </a:fillRef>
-          <a:effectRef idx="1">
-            <a:schemeClr val="accent1"/>
-          </a:effectRef>
-          <a:fontRef idx="minor">
-            <a:schemeClr val="tx1"/>
-          </a:fontRef>
-        </p:style>
-      </p:cxnSp>
-      <p:sp>
-        <p:nvSpPr>
-          <p:cNvPr id="11" name="Isosceles Triangle 10"/>
-          <p:cNvSpPr/>
-          <p:nvPr/>
-        </p:nvSpPr>
-        <p:spPr>
-          <a:xfrm rot="10800000">
-            <a:off x="6053138" y="2505076"/>
-            <a:ext cx="85725" cy="85725"/>
-          </a:xfrm>
-          <a:prstGeom prst="triangle">
-            <a:avLst/>
-          </a:prstGeom>
-          <a:solidFill>
-            <a:srgbClr val="94A3B8"/>
-          </a:solidFill>
-          <a:ln>
-            <a:noFill/>
-          </a:ln>
-          <a:effectLst/>
-        </p:spPr>
-        <p:style>
-          <a:lnRef idx="1">
-            <a:schemeClr val="accent1"/>
-          </a:lnRef>
-          <a:fillRef idx="3">
-            <a:schemeClr val="accent1"/>
-          </a:fillRef>
-          <a:effectRef idx="2">
-            <a:schemeClr val="accent1"/>
-          </a:effectRef>
-          <a:fontRef idx="minor">
-            <a:schemeClr val="lt1"/>
-          </a:fontRef>
-        </p:style>
-        <p:txBody>
-          <a:bodyPr rtlCol="0" anchor="ctr"/>
-          <a:lstStyle/>
-          <a:p>
-            <a:pPr algn="ctr"/>
-          </a:p>
-        </p:txBody>
-      </p:sp>
-      <p:sp>
-        <p:nvSpPr>
-          <p:cNvPr id="12" name="Rounded Rectangle 11"/>
-          <p:cNvSpPr/>
-          <p:nvPr/>
-        </p:nvSpPr>
-        <p:spPr>
-          <a:xfrm>
-            <a:off x="4134802" y="2609850"/>
-            <a:ext cx="3922395" cy="1066800"/>
-          </a:xfrm>
-          <a:prstGeom prst="roundRect">
-            <a:avLst>
-              <a:gd name="adj" fmla="val 8000"/>
-            </a:avLst>
-          </a:prstGeom>
-          <a:solidFill>
-            <a:srgbClr val="FFFFFF"/>
-          </a:solidFill>
-          <a:ln w="12700">
-            <a:solidFill>
-              <a:srgbClr val="14B8A6"/>
-            </a:solidFill>
-          </a:ln>
-          <a:effectLst/>
-        </p:spPr>
-        <p:style>
-          <a:lnRef idx="1">
-            <a:schemeClr val="accent1"/>
-          </a:lnRef>
-          <a:fillRef idx="3">
-            <a:schemeClr val="accent1"/>
-          </a:fillRef>
-          <a:effectRef idx="2">
-            <a:schemeClr val="accent1"/>
-          </a:effectRef>
-          <a:fontRef idx="minor">
-            <a:schemeClr val="lt1"/>
-          </a:fontRef>
-        </p:style>
-        <p:txBody>
-          <a:bodyPr rtlCol="0" anchor="ctr"/>
-          <a:lstStyle/>
-          <a:p>
-            <a:pPr algn="ctr"/>
-          </a:p>
-        </p:txBody>
-      </p:sp>
-      <p:sp>
-        <p:nvSpPr>
-          <p:cNvPr id="13" name="Rectangle 12"/>
-          <p:cNvSpPr/>
-          <p:nvPr/>
-        </p:nvSpPr>
-        <p:spPr>
-          <a:xfrm>
-            <a:off x="4134802" y="2609850"/>
-            <a:ext cx="57150" cy="1066800"/>
-          </a:xfrm>
-          <a:prstGeom prst="rect">
-            <a:avLst/>
-          </a:prstGeom>
-          <a:solidFill>
-            <a:srgbClr val="14B8A6"/>
-          </a:solidFill>
-          <a:ln>
-            <a:noFill/>
-          </a:ln>
-          <a:effectLst/>
-        </p:spPr>
-        <p:style>
-          <a:lnRef idx="1">
-            <a:schemeClr val="accent1"/>
-          </a:lnRef>
-          <a:fillRef idx="3">
-            <a:schemeClr val="accent1"/>
-          </a:fillRef>
-          <a:effectRef idx="2">
-            <a:schemeClr val="accent1"/>
-          </a:effectRef>
-          <a:fontRef idx="minor">
-            <a:schemeClr val="lt1"/>
-          </a:fontRef>
-        </p:style>
-        <p:txBody>
-          <a:bodyPr rtlCol="0" anchor="ctr"/>
-          <a:lstStyle/>
-          <a:p>
-            <a:pPr algn="ctr"/>
-          </a:p>
-        </p:txBody>
-      </p:sp>
-      <p:sp>
-        <p:nvSpPr>
-          <p:cNvPr id="14" name="TextBox 13"/>
-          <p:cNvSpPr txBox="1"/>
-          <p:nvPr/>
-        </p:nvSpPr>
-        <p:spPr>
-          <a:xfrm>
-            <a:off x="4325302" y="2609850"/>
-            <a:ext cx="1490510" cy="1066800"/>
-          </a:xfrm>
-          <a:prstGeom prst="rect">
-            <a:avLst/>
-          </a:prstGeom>
-          <a:noFill/>
-        </p:spPr>
-        <p:txBody>
-          <a:bodyPr wrap="square" anchor="ctr">
-            <a:spAutoFit/>
-          </a:bodyPr>
-          <a:lstStyle/>
-          <a:p>
-            <a:pPr algn="l">
-              <a:lnSpc>
-                <a:spcPct val="100000"/>
-              </a:lnSpc>
-            </a:pPr>
-            <a:r>
-              <a:rPr sz="1600" b="1">
-                <a:solidFill>
-                  <a:srgbClr val="14B8A6"/>
-                </a:solidFill>
-                <a:latin typeface="PingFang SC"/>
-              </a:rPr>
-              <a:t>长期</a:t>
-            </a:r>
-          </a:p>
-        </p:txBody>
-      </p:sp>
-      <p:sp>
-        <p:nvSpPr>
-          <p:cNvPr id="15" name="TextBox 14"/>
-          <p:cNvSpPr txBox="1"/>
-          <p:nvPr/>
-        </p:nvSpPr>
-        <p:spPr>
-          <a:xfrm>
-            <a:off x="5703760" y="2609850"/>
-            <a:ext cx="2274989" cy="1066800"/>
-          </a:xfrm>
-          <a:prstGeom prst="rect">
-            <a:avLst/>
-          </a:prstGeom>
-          <a:noFill/>
-        </p:spPr>
-        <p:txBody>
-          <a:bodyPr wrap="square" anchor="ctr">
-            <a:spAutoFit/>
-          </a:bodyPr>
-          <a:lstStyle/>
-          <a:p>
-            <a:pPr algn="l">
-              <a:lnSpc>
-                <a:spcPct val="100000"/>
-              </a:lnSpc>
-            </a:pPr>
-            <a:r>
-              <a:rPr sz="1200" b="0">
-                <a:solidFill>
-                  <a:srgbClr val="475569"/>
-                </a:solidFill>
-                <a:latin typeface="PingFang SC"/>
-              </a:rPr>
-              <a:t>偏好/历史/经验(带置信度)</a:t>
-            </a:r>
-          </a:p>
-        </p:txBody>
-      </p:sp>
-      <p:cxnSp>
-        <p:nvCxnSpPr>
-          <p:cNvPr id="16" name="Connector 15"/>
-          <p:cNvCxnSpPr/>
-          <p:nvPr/>
-        </p:nvCxnSpPr>
-        <p:spPr>
-          <a:xfrm>
-            <a:off x="6096000" y="3695700"/>
-            <a:ext cx="0" cy="171450"/>
-          </a:xfrm>
-          <a:prstGeom prst="line">
-            <a:avLst/>
-          </a:prstGeom>
-          <a:ln w="15240">
-            <a:solidFill>
-              <a:srgbClr val="94A3B8"/>
-            </a:solidFill>
-          </a:ln>
-        </p:spPr>
-        <p:style>
-          <a:lnRef idx="2">
-            <a:schemeClr val="accent1"/>
-          </a:lnRef>
-          <a:fillRef idx="0">
-            <a:schemeClr val="accent1"/>
-          </a:fillRef>
-          <a:effectRef idx="1">
-            <a:schemeClr val="accent1"/>
-          </a:effectRef>
-          <a:fontRef idx="minor">
-            <a:schemeClr val="tx1"/>
-          </a:fontRef>
-        </p:style>
-      </p:cxnSp>
-      <p:sp>
-        <p:nvSpPr>
-          <p:cNvPr id="17" name="Isosceles Triangle 16"/>
-          <p:cNvSpPr/>
-          <p:nvPr/>
-        </p:nvSpPr>
-        <p:spPr>
-          <a:xfrm rot="10800000">
-            <a:off x="6053138" y="3781426"/>
-            <a:ext cx="85725" cy="85725"/>
-          </a:xfrm>
-          <a:prstGeom prst="triangle">
-            <a:avLst/>
-          </a:prstGeom>
-          <a:solidFill>
-            <a:srgbClr val="94A3B8"/>
-          </a:solidFill>
-          <a:ln>
-            <a:noFill/>
-          </a:ln>
-          <a:effectLst/>
-        </p:spPr>
-        <p:style>
-          <a:lnRef idx="1">
-            <a:schemeClr val="accent1"/>
-          </a:lnRef>
-          <a:fillRef idx="3">
-            <a:schemeClr val="accent1"/>
-          </a:fillRef>
-          <a:effectRef idx="2">
-            <a:schemeClr val="accent1"/>
-          </a:effectRef>
-          <a:fontRef idx="minor">
-            <a:schemeClr val="lt1"/>
-          </a:fontRef>
-        </p:style>
-        <p:txBody>
-          <a:bodyPr rtlCol="0" anchor="ctr"/>
-          <a:lstStyle/>
-          <a:p>
-            <a:pPr algn="ctr"/>
-          </a:p>
-        </p:txBody>
-      </p:sp>
-      <p:sp>
-        <p:nvSpPr>
-          <p:cNvPr id="18" name="Rounded Rectangle 17"/>
-          <p:cNvSpPr/>
-          <p:nvPr/>
-        </p:nvSpPr>
-        <p:spPr>
-          <a:xfrm>
-            <a:off x="3333750" y="3886200"/>
-            <a:ext cx="5524500" cy="1066800"/>
-          </a:xfrm>
-          <a:prstGeom prst="roundRect">
-            <a:avLst>
-              <a:gd name="adj" fmla="val 8000"/>
-            </a:avLst>
-          </a:prstGeom>
-          <a:solidFill>
-            <a:srgbClr val="FFFFFF"/>
-          </a:solidFill>
-          <a:ln w="12700">
-            <a:solidFill>
-              <a:srgbClr val="2563EB"/>
-            </a:solidFill>
-          </a:ln>
-          <a:effectLst/>
-        </p:spPr>
-        <p:style>
-          <a:lnRef idx="1">
-            <a:schemeClr val="accent1"/>
-          </a:lnRef>
-          <a:fillRef idx="3">
-            <a:schemeClr val="accent1"/>
-          </a:fillRef>
-          <a:effectRef idx="2">
-            <a:schemeClr val="accent1"/>
-          </a:effectRef>
-          <a:fontRef idx="minor">
-            <a:schemeClr val="lt1"/>
-          </a:fontRef>
-        </p:style>
-        <p:txBody>
-          <a:bodyPr rtlCol="0" anchor="ctr"/>
-          <a:lstStyle/>
-          <a:p>
-            <a:pPr algn="ctr"/>
-          </a:p>
-        </p:txBody>
-      </p:sp>
-      <p:sp>
-        <p:nvSpPr>
-          <p:cNvPr id="19" name="Rectangle 18"/>
-          <p:cNvSpPr/>
-          <p:nvPr/>
-        </p:nvSpPr>
-        <p:spPr>
-          <a:xfrm>
-            <a:off x="3333750" y="3886200"/>
-            <a:ext cx="57150" cy="1066800"/>
-          </a:xfrm>
-          <a:prstGeom prst="rect">
-            <a:avLst/>
-          </a:prstGeom>
-          <a:solidFill>
-            <a:srgbClr val="2563EB"/>
-          </a:solidFill>
-          <a:ln>
-            <a:noFill/>
-          </a:ln>
-          <a:effectLst/>
-        </p:spPr>
-        <p:style>
-          <a:lnRef idx="1">
-            <a:schemeClr val="accent1"/>
-          </a:lnRef>
-          <a:fillRef idx="3">
-            <a:schemeClr val="accent1"/>
-          </a:fillRef>
-          <a:effectRef idx="2">
-            <a:schemeClr val="accent1"/>
-          </a:effectRef>
-          <a:fontRef idx="minor">
-            <a:schemeClr val="lt1"/>
-          </a:fontRef>
-        </p:style>
-        <p:txBody>
-          <a:bodyPr rtlCol="0" anchor="ctr"/>
-          <a:lstStyle/>
-          <a:p>
-            <a:pPr algn="ctr"/>
-          </a:p>
-        </p:txBody>
-      </p:sp>
-      <p:sp>
-        <p:nvSpPr>
-          <p:cNvPr id="20" name="TextBox 19"/>
-          <p:cNvSpPr txBox="1"/>
-          <p:nvPr/>
-        </p:nvSpPr>
-        <p:spPr>
-          <a:xfrm>
-            <a:off x="3524250" y="3886200"/>
-            <a:ext cx="2099310" cy="1066800"/>
-          </a:xfrm>
-          <a:prstGeom prst="rect">
-            <a:avLst/>
-          </a:prstGeom>
-          <a:noFill/>
-        </p:spPr>
-        <p:txBody>
-          <a:bodyPr wrap="square" anchor="ctr">
-            <a:spAutoFit/>
-          </a:bodyPr>
-          <a:lstStyle/>
-          <a:p>
-            <a:pPr algn="l">
-              <a:lnSpc>
-                <a:spcPct val="100000"/>
-              </a:lnSpc>
-            </a:pPr>
-            <a:r>
-              <a:rPr sz="1600" b="1">
-                <a:solidFill>
-                  <a:srgbClr val="2563EB"/>
-                </a:solidFill>
-                <a:latin typeface="PingFang SC"/>
-              </a:rPr>
-              <a:t>短期</a:t>
-            </a:r>
-          </a:p>
-        </p:txBody>
-      </p:sp>
-      <p:sp>
-        <p:nvSpPr>
-          <p:cNvPr id="21" name="TextBox 20"/>
-          <p:cNvSpPr txBox="1"/>
-          <p:nvPr/>
-        </p:nvSpPr>
-        <p:spPr>
-          <a:xfrm>
-            <a:off x="5543550" y="3886200"/>
-            <a:ext cx="3204210" cy="1066800"/>
-          </a:xfrm>
-          <a:prstGeom prst="rect">
-            <a:avLst/>
-          </a:prstGeom>
-          <a:noFill/>
-        </p:spPr>
-        <p:txBody>
-          <a:bodyPr wrap="square" anchor="ctr">
-            <a:spAutoFit/>
-          </a:bodyPr>
-          <a:lstStyle/>
-          <a:p>
-            <a:pPr algn="l">
-              <a:lnSpc>
-                <a:spcPct val="100000"/>
-              </a:lnSpc>
-            </a:pPr>
-            <a:r>
-              <a:rPr sz="1200" b="0">
-                <a:solidFill>
-                  <a:srgbClr val="475569"/>
-                </a:solidFill>
-                <a:latin typeface="PingFang SC"/>
-              </a:rPr>
-              <a:t>会话与任务状态(易失)|生命周期:仓库级 &gt; 跨任务 &gt; 单会话</a:t>
-            </a:r>
-          </a:p>
-        </p:txBody>
-      </p:sp>
-      <p:sp>
-        <p:nvSpPr>
-          <p:cNvPr id="22" name="TextBox 21"/>
-          <p:cNvSpPr txBox="1"/>
-          <p:nvPr/>
-        </p:nvSpPr>
-        <p:spPr>
-          <a:xfrm>
-            <a:off x="10287000" y="6534150"/>
-            <a:ext cx="1619250" cy="266700"/>
-          </a:xfrm>
-          <a:prstGeom prst="rect">
-            <a:avLst/>
-          </a:prstGeom>
-          <a:noFill/>
-        </p:spPr>
-        <p:txBody>
-          <a:bodyPr wrap="square" anchor="ctr">
-            <a:spAutoFit/>
-          </a:bodyPr>
-          <a:lstStyle/>
-          <a:p>
-            <a:pPr algn="r">
-              <a:lnSpc>
-                <a:spcPct val="100000"/>
-              </a:lnSpc>
-            </a:pPr>
-            <a:r>
               <a:rPr sz="900" b="0">
                 <a:solidFill>
                   <a:srgbClr val="94A3B8"/>
@@ -24044,7 +23936,7 @@
       </p:sp>
       <p:sp>
         <p:nvSpPr>
-          <p:cNvPr id="23" name="TextBox 22"/>
+          <p:cNvPr id="22" name="TextBox 21"/>
           <p:cNvSpPr txBox="1"/>
           <p:nvPr/>
         </p:nvSpPr>
@@ -25223,14 +25115,641 @@
       </p:sp>
       <p:sp>
         <p:nvSpPr>
-          <p:cNvPr id="5" name="TextBox 4"/>
+          <p:cNvPr id="5" name="Rounded Rectangle 4"/>
+          <p:cNvSpPr/>
+          <p:nvPr/>
+        </p:nvSpPr>
+        <p:spPr>
+          <a:xfrm>
+            <a:off x="1047750" y="1905000"/>
+            <a:ext cx="3175000" cy="2857500"/>
+          </a:xfrm>
+          <a:prstGeom prst="roundRect">
+            <a:avLst>
+              <a:gd name="adj" fmla="val 8000"/>
+            </a:avLst>
+          </a:prstGeom>
+          <a:solidFill>
+            <a:srgbClr val="FFFFFF"/>
+          </a:solidFill>
+          <a:ln w="12700">
+            <a:solidFill>
+              <a:srgbClr val="DDE5EE"/>
+            </a:solidFill>
+          </a:ln>
+          <a:effectLst/>
+        </p:spPr>
+        <p:style>
+          <a:lnRef idx="1">
+            <a:schemeClr val="accent1"/>
+          </a:lnRef>
+          <a:fillRef idx="3">
+            <a:schemeClr val="accent1"/>
+          </a:fillRef>
+          <a:effectRef idx="2">
+            <a:schemeClr val="accent1"/>
+          </a:effectRef>
+          <a:fontRef idx="minor">
+            <a:schemeClr val="lt1"/>
+          </a:fontRef>
+        </p:style>
+        <p:txBody>
+          <a:bodyPr rtlCol="0" anchor="ctr"/>
+          <a:lstStyle/>
+          <a:p>
+            <a:pPr algn="ctr"/>
+          </a:p>
+        </p:txBody>
+      </p:sp>
+      <p:sp>
+        <p:nvSpPr>
+          <p:cNvPr id="6" name="Rectangle 5"/>
+          <p:cNvSpPr/>
+          <p:nvPr/>
+        </p:nvSpPr>
+        <p:spPr>
+          <a:xfrm>
+            <a:off x="1047750" y="1905000"/>
+            <a:ext cx="3175000" cy="76200"/>
+          </a:xfrm>
+          <a:prstGeom prst="rect">
+            <a:avLst/>
+          </a:prstGeom>
+          <a:solidFill>
+            <a:srgbClr val="2563EB"/>
+          </a:solidFill>
+          <a:ln>
+            <a:noFill/>
+          </a:ln>
+          <a:effectLst/>
+        </p:spPr>
+        <p:style>
+          <a:lnRef idx="1">
+            <a:schemeClr val="accent1"/>
+          </a:lnRef>
+          <a:fillRef idx="3">
+            <a:schemeClr val="accent1"/>
+          </a:fillRef>
+          <a:effectRef idx="2">
+            <a:schemeClr val="accent1"/>
+          </a:effectRef>
+          <a:fontRef idx="minor">
+            <a:schemeClr val="lt1"/>
+          </a:fontRef>
+        </p:style>
+        <p:txBody>
+          <a:bodyPr rtlCol="0" anchor="ctr"/>
+          <a:lstStyle/>
+          <a:p>
+            <a:pPr algn="ctr"/>
+          </a:p>
+        </p:txBody>
+      </p:sp>
+      <p:sp>
+        <p:nvSpPr>
+          <p:cNvPr id="7" name="TextBox 6"/>
           <p:cNvSpPr txBox="1"/>
           <p:nvPr/>
         </p:nvSpPr>
         <p:spPr>
           <a:xfrm>
-            <a:off x="9334500" y="0"/>
-            <a:ext cx="2667000" cy="704850"/>
+            <a:off x="1047750" y="2286000"/>
+            <a:ext cx="3175000" cy="1047750"/>
+          </a:xfrm>
+          <a:prstGeom prst="rect">
+            <a:avLst/>
+          </a:prstGeom>
+          <a:noFill/>
+        </p:spPr>
+        <p:txBody>
+          <a:bodyPr wrap="square" anchor="ctr">
+            <a:spAutoFit/>
+          </a:bodyPr>
+          <a:lstStyle/>
+          <a:p>
+            <a:pPr algn="ctr">
+              <a:lnSpc>
+                <a:spcPct val="100000"/>
+              </a:lnSpc>
+            </a:pPr>
+            <a:r>
+              <a:rPr sz="4000" b="1">
+                <a:solidFill>
+                  <a:srgbClr val="2563EB"/>
+                </a:solidFill>
+                <a:latin typeface="PingFang SC"/>
+              </a:rPr>
+              <a:t>3</a:t>
+            </a:r>
+          </a:p>
+        </p:txBody>
+      </p:sp>
+      <p:sp>
+        <p:nvSpPr>
+          <p:cNvPr id="8" name="TextBox 7"/>
+          <p:cNvSpPr txBox="1"/>
+          <p:nvPr/>
+        </p:nvSpPr>
+        <p:spPr>
+          <a:xfrm>
+            <a:off x="1047750" y="3333750"/>
+            <a:ext cx="3175000" cy="323850"/>
+          </a:xfrm>
+          <a:prstGeom prst="rect">
+            <a:avLst/>
+          </a:prstGeom>
+          <a:noFill/>
+        </p:spPr>
+        <p:txBody>
+          <a:bodyPr wrap="square" anchor="ctr">
+            <a:spAutoFit/>
+          </a:bodyPr>
+          <a:lstStyle/>
+          <a:p>
+            <a:pPr algn="ctr">
+              <a:lnSpc>
+                <a:spcPct val="100000"/>
+              </a:lnSpc>
+            </a:pPr>
+            <a:r>
+              <a:rPr sz="1300" b="0">
+                <a:solidFill>
+                  <a:srgbClr val="94A3B8"/>
+                </a:solidFill>
+                <a:latin typeface="PingFang SC"/>
+              </a:rPr>
+              <a:t>层</a:t>
+            </a:r>
+          </a:p>
+        </p:txBody>
+      </p:sp>
+      <p:sp>
+        <p:nvSpPr>
+          <p:cNvPr id="9" name="TextBox 8"/>
+          <p:cNvSpPr txBox="1"/>
+          <p:nvPr/>
+        </p:nvSpPr>
+        <p:spPr>
+          <a:xfrm>
+            <a:off x="1200150" y="4057650"/>
+            <a:ext cx="2870200" cy="571500"/>
+          </a:xfrm>
+          <a:prstGeom prst="rect">
+            <a:avLst/>
+          </a:prstGeom>
+          <a:noFill/>
+        </p:spPr>
+        <p:txBody>
+          <a:bodyPr wrap="square" anchor="ctr">
+            <a:spAutoFit/>
+          </a:bodyPr>
+          <a:lstStyle/>
+          <a:p>
+            <a:pPr algn="ctr">
+              <a:lnSpc>
+                <a:spcPct val="100000"/>
+              </a:lnSpc>
+            </a:pPr>
+            <a:r>
+              <a:rPr sz="1300" b="1">
+                <a:solidFill>
+                  <a:srgbClr val="475569"/>
+                </a:solidFill>
+                <a:latin typeface="PingFang SC"/>
+              </a:rPr>
+              <a:t>短/长/项目</a:t>
+            </a:r>
+          </a:p>
+        </p:txBody>
+      </p:sp>
+      <p:sp>
+        <p:nvSpPr>
+          <p:cNvPr id="10" name="Rounded Rectangle 9"/>
+          <p:cNvSpPr/>
+          <p:nvPr/>
+        </p:nvSpPr>
+        <p:spPr>
+          <a:xfrm>
+            <a:off x="4508500" y="1905000"/>
+            <a:ext cx="3175000" cy="2857500"/>
+          </a:xfrm>
+          <a:prstGeom prst="roundRect">
+            <a:avLst>
+              <a:gd name="adj" fmla="val 8000"/>
+            </a:avLst>
+          </a:prstGeom>
+          <a:solidFill>
+            <a:srgbClr val="FFFFFF"/>
+          </a:solidFill>
+          <a:ln w="12700">
+            <a:solidFill>
+              <a:srgbClr val="DDE5EE"/>
+            </a:solidFill>
+          </a:ln>
+          <a:effectLst/>
+        </p:spPr>
+        <p:style>
+          <a:lnRef idx="1">
+            <a:schemeClr val="accent1"/>
+          </a:lnRef>
+          <a:fillRef idx="3">
+            <a:schemeClr val="accent1"/>
+          </a:fillRef>
+          <a:effectRef idx="2">
+            <a:schemeClr val="accent1"/>
+          </a:effectRef>
+          <a:fontRef idx="minor">
+            <a:schemeClr val="lt1"/>
+          </a:fontRef>
+        </p:style>
+        <p:txBody>
+          <a:bodyPr rtlCol="0" anchor="ctr"/>
+          <a:lstStyle/>
+          <a:p>
+            <a:pPr algn="ctr"/>
+          </a:p>
+        </p:txBody>
+      </p:sp>
+      <p:sp>
+        <p:nvSpPr>
+          <p:cNvPr id="11" name="Rectangle 10"/>
+          <p:cNvSpPr/>
+          <p:nvPr/>
+        </p:nvSpPr>
+        <p:spPr>
+          <a:xfrm>
+            <a:off x="4508500" y="1905000"/>
+            <a:ext cx="3175000" cy="76200"/>
+          </a:xfrm>
+          <a:prstGeom prst="rect">
+            <a:avLst/>
+          </a:prstGeom>
+          <a:solidFill>
+            <a:srgbClr val="14B8A6"/>
+          </a:solidFill>
+          <a:ln>
+            <a:noFill/>
+          </a:ln>
+          <a:effectLst/>
+        </p:spPr>
+        <p:style>
+          <a:lnRef idx="1">
+            <a:schemeClr val="accent1"/>
+          </a:lnRef>
+          <a:fillRef idx="3">
+            <a:schemeClr val="accent1"/>
+          </a:fillRef>
+          <a:effectRef idx="2">
+            <a:schemeClr val="accent1"/>
+          </a:effectRef>
+          <a:fontRef idx="minor">
+            <a:schemeClr val="lt1"/>
+          </a:fontRef>
+        </p:style>
+        <p:txBody>
+          <a:bodyPr rtlCol="0" anchor="ctr"/>
+          <a:lstStyle/>
+          <a:p>
+            <a:pPr algn="ctr"/>
+          </a:p>
+        </p:txBody>
+      </p:sp>
+      <p:sp>
+        <p:nvSpPr>
+          <p:cNvPr id="12" name="TextBox 11"/>
+          <p:cNvSpPr txBox="1"/>
+          <p:nvPr/>
+        </p:nvSpPr>
+        <p:spPr>
+          <a:xfrm>
+            <a:off x="4508500" y="2286000"/>
+            <a:ext cx="3175000" cy="1047750"/>
+          </a:xfrm>
+          <a:prstGeom prst="rect">
+            <a:avLst/>
+          </a:prstGeom>
+          <a:noFill/>
+        </p:spPr>
+        <p:txBody>
+          <a:bodyPr wrap="square" anchor="ctr">
+            <a:spAutoFit/>
+          </a:bodyPr>
+          <a:lstStyle/>
+          <a:p>
+            <a:pPr algn="ctr">
+              <a:lnSpc>
+                <a:spcPct val="100000"/>
+              </a:lnSpc>
+            </a:pPr>
+            <a:r>
+              <a:rPr sz="4000" b="1">
+                <a:solidFill>
+                  <a:srgbClr val="14B8A6"/>
+                </a:solidFill>
+                <a:latin typeface="PingFang SC"/>
+              </a:rPr>
+              <a:t>0.8</a:t>
+            </a:r>
+          </a:p>
+        </p:txBody>
+      </p:sp>
+      <p:sp>
+        <p:nvSpPr>
+          <p:cNvPr id="13" name="TextBox 12"/>
+          <p:cNvSpPr txBox="1"/>
+          <p:nvPr/>
+        </p:nvSpPr>
+        <p:spPr>
+          <a:xfrm>
+            <a:off x="4508500" y="3333750"/>
+            <a:ext cx="3175000" cy="323850"/>
+          </a:xfrm>
+          <a:prstGeom prst="rect">
+            <a:avLst/>
+          </a:prstGeom>
+          <a:noFill/>
+        </p:spPr>
+        <p:txBody>
+          <a:bodyPr wrap="square" anchor="ctr">
+            <a:spAutoFit/>
+          </a:bodyPr>
+          <a:lstStyle/>
+          <a:p>
+            <a:pPr algn="ctr">
+              <a:lnSpc>
+                <a:spcPct val="100000"/>
+              </a:lnSpc>
+            </a:pPr>
+            <a:r>
+              <a:rPr sz="1300" b="0">
+                <a:solidFill>
+                  <a:srgbClr val="94A3B8"/>
+                </a:solidFill>
+                <a:latin typeface="PingFang SC"/>
+              </a:rPr>
+              <a:t>默认置信度</a:t>
+            </a:r>
+          </a:p>
+        </p:txBody>
+      </p:sp>
+      <p:sp>
+        <p:nvSpPr>
+          <p:cNvPr id="14" name="TextBox 13"/>
+          <p:cNvSpPr txBox="1"/>
+          <p:nvPr/>
+        </p:nvSpPr>
+        <p:spPr>
+          <a:xfrm>
+            <a:off x="4660900" y="4057650"/>
+            <a:ext cx="2870200" cy="571500"/>
+          </a:xfrm>
+          <a:prstGeom prst="rect">
+            <a:avLst/>
+          </a:prstGeom>
+          <a:noFill/>
+        </p:spPr>
+        <p:txBody>
+          <a:bodyPr wrap="square" anchor="ctr">
+            <a:spAutoFit/>
+          </a:bodyPr>
+          <a:lstStyle/>
+          <a:p>
+            <a:pPr algn="ctr">
+              <a:lnSpc>
+                <a:spcPct val="100000"/>
+              </a:lnSpc>
+            </a:pPr>
+            <a:r>
+              <a:rPr sz="1300" b="1">
+                <a:solidFill>
+                  <a:srgbClr val="475569"/>
+                </a:solidFill>
+                <a:latin typeface="PingFang SC"/>
+              </a:rPr>
+              <a:t>长期条目</a:t>
+            </a:r>
+          </a:p>
+        </p:txBody>
+      </p:sp>
+      <p:sp>
+        <p:nvSpPr>
+          <p:cNvPr id="15" name="Rounded Rectangle 14"/>
+          <p:cNvSpPr/>
+          <p:nvPr/>
+        </p:nvSpPr>
+        <p:spPr>
+          <a:xfrm>
+            <a:off x="7969250" y="1905000"/>
+            <a:ext cx="3175000" cy="2857500"/>
+          </a:xfrm>
+          <a:prstGeom prst="roundRect">
+            <a:avLst>
+              <a:gd name="adj" fmla="val 8000"/>
+            </a:avLst>
+          </a:prstGeom>
+          <a:solidFill>
+            <a:srgbClr val="FFFFFF"/>
+          </a:solidFill>
+          <a:ln w="12700">
+            <a:solidFill>
+              <a:srgbClr val="DDE5EE"/>
+            </a:solidFill>
+          </a:ln>
+          <a:effectLst/>
+        </p:spPr>
+        <p:style>
+          <a:lnRef idx="1">
+            <a:schemeClr val="accent1"/>
+          </a:lnRef>
+          <a:fillRef idx="3">
+            <a:schemeClr val="accent1"/>
+          </a:fillRef>
+          <a:effectRef idx="2">
+            <a:schemeClr val="accent1"/>
+          </a:effectRef>
+          <a:fontRef idx="minor">
+            <a:schemeClr val="lt1"/>
+          </a:fontRef>
+        </p:style>
+        <p:txBody>
+          <a:bodyPr rtlCol="0" anchor="ctr"/>
+          <a:lstStyle/>
+          <a:p>
+            <a:pPr algn="ctr"/>
+          </a:p>
+        </p:txBody>
+      </p:sp>
+      <p:sp>
+        <p:nvSpPr>
+          <p:cNvPr id="16" name="Rectangle 15"/>
+          <p:cNvSpPr/>
+          <p:nvPr/>
+        </p:nvSpPr>
+        <p:spPr>
+          <a:xfrm>
+            <a:off x="7969250" y="1905000"/>
+            <a:ext cx="3175000" cy="76200"/>
+          </a:xfrm>
+          <a:prstGeom prst="rect">
+            <a:avLst/>
+          </a:prstGeom>
+          <a:solidFill>
+            <a:srgbClr val="8B5CF6"/>
+          </a:solidFill>
+          <a:ln>
+            <a:noFill/>
+          </a:ln>
+          <a:effectLst/>
+        </p:spPr>
+        <p:style>
+          <a:lnRef idx="1">
+            <a:schemeClr val="accent1"/>
+          </a:lnRef>
+          <a:fillRef idx="3">
+            <a:schemeClr val="accent1"/>
+          </a:fillRef>
+          <a:effectRef idx="2">
+            <a:schemeClr val="accent1"/>
+          </a:effectRef>
+          <a:fontRef idx="minor">
+            <a:schemeClr val="lt1"/>
+          </a:fontRef>
+        </p:style>
+        <p:txBody>
+          <a:bodyPr rtlCol="0" anchor="ctr"/>
+          <a:lstStyle/>
+          <a:p>
+            <a:pPr algn="ctr"/>
+          </a:p>
+        </p:txBody>
+      </p:sp>
+      <p:sp>
+        <p:nvSpPr>
+          <p:cNvPr id="17" name="TextBox 16"/>
+          <p:cNvSpPr txBox="1"/>
+          <p:nvPr/>
+        </p:nvSpPr>
+        <p:spPr>
+          <a:xfrm>
+            <a:off x="7969250" y="2286000"/>
+            <a:ext cx="3175000" cy="1047750"/>
+          </a:xfrm>
+          <a:prstGeom prst="rect">
+            <a:avLst/>
+          </a:prstGeom>
+          <a:noFill/>
+        </p:spPr>
+        <p:txBody>
+          <a:bodyPr wrap="square" anchor="ctr">
+            <a:spAutoFit/>
+          </a:bodyPr>
+          <a:lstStyle/>
+          <a:p>
+            <a:pPr algn="ctr">
+              <a:lnSpc>
+                <a:spcPct val="100000"/>
+              </a:lnSpc>
+            </a:pPr>
+            <a:r>
+              <a:rPr sz="4000" b="1">
+                <a:solidFill>
+                  <a:srgbClr val="8B5CF6"/>
+                </a:solidFill>
+                <a:latin typeface="PingFang SC"/>
+              </a:rPr>
+              <a:t>24h</a:t>
+            </a:r>
+          </a:p>
+        </p:txBody>
+      </p:sp>
+      <p:sp>
+        <p:nvSpPr>
+          <p:cNvPr id="18" name="TextBox 17"/>
+          <p:cNvSpPr txBox="1"/>
+          <p:nvPr/>
+        </p:nvSpPr>
+        <p:spPr>
+          <a:xfrm>
+            <a:off x="7969250" y="3333750"/>
+            <a:ext cx="3175000" cy="323850"/>
+          </a:xfrm>
+          <a:prstGeom prst="rect">
+            <a:avLst/>
+          </a:prstGeom>
+          <a:noFill/>
+        </p:spPr>
+        <p:txBody>
+          <a:bodyPr wrap="square" anchor="ctr">
+            <a:spAutoFit/>
+          </a:bodyPr>
+          <a:lstStyle/>
+          <a:p>
+            <a:pPr algn="ctr">
+              <a:lnSpc>
+                <a:spcPct val="100000"/>
+              </a:lnSpc>
+            </a:pPr>
+            <a:r>
+              <a:rPr sz="1300" b="0">
+                <a:solidFill>
+                  <a:srgbClr val="94A3B8"/>
+                </a:solidFill>
+                <a:latin typeface="PingFang SC"/>
+              </a:rPr>
+              <a:t>TTL</a:t>
+            </a:r>
+          </a:p>
+        </p:txBody>
+      </p:sp>
+      <p:sp>
+        <p:nvSpPr>
+          <p:cNvPr id="19" name="TextBox 18"/>
+          <p:cNvSpPr txBox="1"/>
+          <p:nvPr/>
+        </p:nvSpPr>
+        <p:spPr>
+          <a:xfrm>
+            <a:off x="8121650" y="4057650"/>
+            <a:ext cx="2870200" cy="571500"/>
+          </a:xfrm>
+          <a:prstGeom prst="rect">
+            <a:avLst/>
+          </a:prstGeom>
+          <a:noFill/>
+        </p:spPr>
+        <p:txBody>
+          <a:bodyPr wrap="square" anchor="ctr">
+            <a:spAutoFit/>
+          </a:bodyPr>
+          <a:lstStyle/>
+          <a:p>
+            <a:pPr algn="ctr">
+              <a:lnSpc>
+                <a:spcPct val="100000"/>
+              </a:lnSpc>
+            </a:pPr>
+            <a:r>
+              <a:rPr sz="1300" b="1">
+                <a:solidFill>
+                  <a:srgbClr val="475569"/>
+                </a:solidFill>
+                <a:latin typeface="PingFang SC"/>
+              </a:rPr>
+              <a:t>时效记忆示例</a:t>
+            </a:r>
+          </a:p>
+        </p:txBody>
+      </p:sp>
+      <p:sp>
+        <p:nvSpPr>
+          <p:cNvPr id="20" name="TextBox 19"/>
+          <p:cNvSpPr txBox="1"/>
+          <p:nvPr/>
+        </p:nvSpPr>
+        <p:spPr>
+          <a:xfrm>
+            <a:off x="10287000" y="6534150"/>
+            <a:ext cx="1619250" cy="266700"/>
           </a:xfrm>
           <a:prstGeom prst="rect">
             <a:avLst/>
@@ -25249,672 +25768,6 @@
               </a:lnSpc>
             </a:pPr>
             <a:r>
-              <a:rPr sz="1100" b="0">
-                <a:solidFill>
-                  <a:srgbClr val="94A3B8"/>
-                </a:solidFill>
-                <a:latin typeface="PingFang SC"/>
-              </a:rPr>
-              <a:t>3^层^短/长/项目;0.8^默认置信度^长期条目;24h^TTL^时效记忆示例|项目级随 Git 演进</a:t>
-            </a:r>
-          </a:p>
-        </p:txBody>
-      </p:sp>
-      <p:sp>
-        <p:nvSpPr>
-          <p:cNvPr id="6" name="Rounded Rectangle 5"/>
-          <p:cNvSpPr/>
-          <p:nvPr/>
-        </p:nvSpPr>
-        <p:spPr>
-          <a:xfrm>
-            <a:off x="1047750" y="1905000"/>
-            <a:ext cx="3175000" cy="2857500"/>
-          </a:xfrm>
-          <a:prstGeom prst="roundRect">
-            <a:avLst>
-              <a:gd name="adj" fmla="val 8000"/>
-            </a:avLst>
-          </a:prstGeom>
-          <a:solidFill>
-            <a:srgbClr val="FFFFFF"/>
-          </a:solidFill>
-          <a:ln w="12700">
-            <a:solidFill>
-              <a:srgbClr val="DDE5EE"/>
-            </a:solidFill>
-          </a:ln>
-          <a:effectLst/>
-        </p:spPr>
-        <p:style>
-          <a:lnRef idx="1">
-            <a:schemeClr val="accent1"/>
-          </a:lnRef>
-          <a:fillRef idx="3">
-            <a:schemeClr val="accent1"/>
-          </a:fillRef>
-          <a:effectRef idx="2">
-            <a:schemeClr val="accent1"/>
-          </a:effectRef>
-          <a:fontRef idx="minor">
-            <a:schemeClr val="lt1"/>
-          </a:fontRef>
-        </p:style>
-        <p:txBody>
-          <a:bodyPr rtlCol="0" anchor="ctr"/>
-          <a:lstStyle/>
-          <a:p>
-            <a:pPr algn="ctr"/>
-          </a:p>
-        </p:txBody>
-      </p:sp>
-      <p:sp>
-        <p:nvSpPr>
-          <p:cNvPr id="7" name="Rectangle 6"/>
-          <p:cNvSpPr/>
-          <p:nvPr/>
-        </p:nvSpPr>
-        <p:spPr>
-          <a:xfrm>
-            <a:off x="1047750" y="1905000"/>
-            <a:ext cx="3175000" cy="76200"/>
-          </a:xfrm>
-          <a:prstGeom prst="rect">
-            <a:avLst/>
-          </a:prstGeom>
-          <a:solidFill>
-            <a:srgbClr val="2563EB"/>
-          </a:solidFill>
-          <a:ln>
-            <a:noFill/>
-          </a:ln>
-          <a:effectLst/>
-        </p:spPr>
-        <p:style>
-          <a:lnRef idx="1">
-            <a:schemeClr val="accent1"/>
-          </a:lnRef>
-          <a:fillRef idx="3">
-            <a:schemeClr val="accent1"/>
-          </a:fillRef>
-          <a:effectRef idx="2">
-            <a:schemeClr val="accent1"/>
-          </a:effectRef>
-          <a:fontRef idx="minor">
-            <a:schemeClr val="lt1"/>
-          </a:fontRef>
-        </p:style>
-        <p:txBody>
-          <a:bodyPr rtlCol="0" anchor="ctr"/>
-          <a:lstStyle/>
-          <a:p>
-            <a:pPr algn="ctr"/>
-          </a:p>
-        </p:txBody>
-      </p:sp>
-      <p:sp>
-        <p:nvSpPr>
-          <p:cNvPr id="8" name="TextBox 7"/>
-          <p:cNvSpPr txBox="1"/>
-          <p:nvPr/>
-        </p:nvSpPr>
-        <p:spPr>
-          <a:xfrm>
-            <a:off x="1047750" y="2286000"/>
-            <a:ext cx="3175000" cy="1047750"/>
-          </a:xfrm>
-          <a:prstGeom prst="rect">
-            <a:avLst/>
-          </a:prstGeom>
-          <a:noFill/>
-        </p:spPr>
-        <p:txBody>
-          <a:bodyPr wrap="square" anchor="ctr">
-            <a:spAutoFit/>
-          </a:bodyPr>
-          <a:lstStyle/>
-          <a:p>
-            <a:pPr algn="ctr">
-              <a:lnSpc>
-                <a:spcPct val="100000"/>
-              </a:lnSpc>
-            </a:pPr>
-            <a:r>
-              <a:rPr sz="4000" b="1">
-                <a:solidFill>
-                  <a:srgbClr val="2563EB"/>
-                </a:solidFill>
-                <a:latin typeface="PingFang SC"/>
-              </a:rPr>
-              <a:t>3</a:t>
-            </a:r>
-          </a:p>
-        </p:txBody>
-      </p:sp>
-      <p:sp>
-        <p:nvSpPr>
-          <p:cNvPr id="9" name="TextBox 8"/>
-          <p:cNvSpPr txBox="1"/>
-          <p:nvPr/>
-        </p:nvSpPr>
-        <p:spPr>
-          <a:xfrm>
-            <a:off x="1047750" y="3333750"/>
-            <a:ext cx="3175000" cy="323850"/>
-          </a:xfrm>
-          <a:prstGeom prst="rect">
-            <a:avLst/>
-          </a:prstGeom>
-          <a:noFill/>
-        </p:spPr>
-        <p:txBody>
-          <a:bodyPr wrap="square" anchor="ctr">
-            <a:spAutoFit/>
-          </a:bodyPr>
-          <a:lstStyle/>
-          <a:p>
-            <a:pPr algn="ctr">
-              <a:lnSpc>
-                <a:spcPct val="100000"/>
-              </a:lnSpc>
-            </a:pPr>
-            <a:r>
-              <a:rPr sz="1300" b="0">
-                <a:solidFill>
-                  <a:srgbClr val="94A3B8"/>
-                </a:solidFill>
-                <a:latin typeface="PingFang SC"/>
-              </a:rPr>
-              <a:t>层</a:t>
-            </a:r>
-          </a:p>
-        </p:txBody>
-      </p:sp>
-      <p:sp>
-        <p:nvSpPr>
-          <p:cNvPr id="10" name="TextBox 9"/>
-          <p:cNvSpPr txBox="1"/>
-          <p:nvPr/>
-        </p:nvSpPr>
-        <p:spPr>
-          <a:xfrm>
-            <a:off x="1200150" y="4057650"/>
-            <a:ext cx="2870200" cy="571500"/>
-          </a:xfrm>
-          <a:prstGeom prst="rect">
-            <a:avLst/>
-          </a:prstGeom>
-          <a:noFill/>
-        </p:spPr>
-        <p:txBody>
-          <a:bodyPr wrap="square" anchor="ctr">
-            <a:spAutoFit/>
-          </a:bodyPr>
-          <a:lstStyle/>
-          <a:p>
-            <a:pPr algn="ctr">
-              <a:lnSpc>
-                <a:spcPct val="100000"/>
-              </a:lnSpc>
-            </a:pPr>
-            <a:r>
-              <a:rPr sz="1300" b="1">
-                <a:solidFill>
-                  <a:srgbClr val="475569"/>
-                </a:solidFill>
-                <a:latin typeface="PingFang SC"/>
-              </a:rPr>
-              <a:t>短/长/项目</a:t>
-            </a:r>
-          </a:p>
-        </p:txBody>
-      </p:sp>
-      <p:sp>
-        <p:nvSpPr>
-          <p:cNvPr id="11" name="Rounded Rectangle 10"/>
-          <p:cNvSpPr/>
-          <p:nvPr/>
-        </p:nvSpPr>
-        <p:spPr>
-          <a:xfrm>
-            <a:off x="4508500" y="1905000"/>
-            <a:ext cx="3175000" cy="2857500"/>
-          </a:xfrm>
-          <a:prstGeom prst="roundRect">
-            <a:avLst>
-              <a:gd name="adj" fmla="val 8000"/>
-            </a:avLst>
-          </a:prstGeom>
-          <a:solidFill>
-            <a:srgbClr val="FFFFFF"/>
-          </a:solidFill>
-          <a:ln w="12700">
-            <a:solidFill>
-              <a:srgbClr val="DDE5EE"/>
-            </a:solidFill>
-          </a:ln>
-          <a:effectLst/>
-        </p:spPr>
-        <p:style>
-          <a:lnRef idx="1">
-            <a:schemeClr val="accent1"/>
-          </a:lnRef>
-          <a:fillRef idx="3">
-            <a:schemeClr val="accent1"/>
-          </a:fillRef>
-          <a:effectRef idx="2">
-            <a:schemeClr val="accent1"/>
-          </a:effectRef>
-          <a:fontRef idx="minor">
-            <a:schemeClr val="lt1"/>
-          </a:fontRef>
-        </p:style>
-        <p:txBody>
-          <a:bodyPr rtlCol="0" anchor="ctr"/>
-          <a:lstStyle/>
-          <a:p>
-            <a:pPr algn="ctr"/>
-          </a:p>
-        </p:txBody>
-      </p:sp>
-      <p:sp>
-        <p:nvSpPr>
-          <p:cNvPr id="12" name="Rectangle 11"/>
-          <p:cNvSpPr/>
-          <p:nvPr/>
-        </p:nvSpPr>
-        <p:spPr>
-          <a:xfrm>
-            <a:off x="4508500" y="1905000"/>
-            <a:ext cx="3175000" cy="76200"/>
-          </a:xfrm>
-          <a:prstGeom prst="rect">
-            <a:avLst/>
-          </a:prstGeom>
-          <a:solidFill>
-            <a:srgbClr val="14B8A6"/>
-          </a:solidFill>
-          <a:ln>
-            <a:noFill/>
-          </a:ln>
-          <a:effectLst/>
-        </p:spPr>
-        <p:style>
-          <a:lnRef idx="1">
-            <a:schemeClr val="accent1"/>
-          </a:lnRef>
-          <a:fillRef idx="3">
-            <a:schemeClr val="accent1"/>
-          </a:fillRef>
-          <a:effectRef idx="2">
-            <a:schemeClr val="accent1"/>
-          </a:effectRef>
-          <a:fontRef idx="minor">
-            <a:schemeClr val="lt1"/>
-          </a:fontRef>
-        </p:style>
-        <p:txBody>
-          <a:bodyPr rtlCol="0" anchor="ctr"/>
-          <a:lstStyle/>
-          <a:p>
-            <a:pPr algn="ctr"/>
-          </a:p>
-        </p:txBody>
-      </p:sp>
-      <p:sp>
-        <p:nvSpPr>
-          <p:cNvPr id="13" name="TextBox 12"/>
-          <p:cNvSpPr txBox="1"/>
-          <p:nvPr/>
-        </p:nvSpPr>
-        <p:spPr>
-          <a:xfrm>
-            <a:off x="4508500" y="2286000"/>
-            <a:ext cx="3175000" cy="1047750"/>
-          </a:xfrm>
-          <a:prstGeom prst="rect">
-            <a:avLst/>
-          </a:prstGeom>
-          <a:noFill/>
-        </p:spPr>
-        <p:txBody>
-          <a:bodyPr wrap="square" anchor="ctr">
-            <a:spAutoFit/>
-          </a:bodyPr>
-          <a:lstStyle/>
-          <a:p>
-            <a:pPr algn="ctr">
-              <a:lnSpc>
-                <a:spcPct val="100000"/>
-              </a:lnSpc>
-            </a:pPr>
-            <a:r>
-              <a:rPr sz="4000" b="1">
-                <a:solidFill>
-                  <a:srgbClr val="14B8A6"/>
-                </a:solidFill>
-                <a:latin typeface="PingFang SC"/>
-              </a:rPr>
-              <a:t>0.8</a:t>
-            </a:r>
-          </a:p>
-        </p:txBody>
-      </p:sp>
-      <p:sp>
-        <p:nvSpPr>
-          <p:cNvPr id="14" name="TextBox 13"/>
-          <p:cNvSpPr txBox="1"/>
-          <p:nvPr/>
-        </p:nvSpPr>
-        <p:spPr>
-          <a:xfrm>
-            <a:off x="4508500" y="3333750"/>
-            <a:ext cx="3175000" cy="323850"/>
-          </a:xfrm>
-          <a:prstGeom prst="rect">
-            <a:avLst/>
-          </a:prstGeom>
-          <a:noFill/>
-        </p:spPr>
-        <p:txBody>
-          <a:bodyPr wrap="square" anchor="ctr">
-            <a:spAutoFit/>
-          </a:bodyPr>
-          <a:lstStyle/>
-          <a:p>
-            <a:pPr algn="ctr">
-              <a:lnSpc>
-                <a:spcPct val="100000"/>
-              </a:lnSpc>
-            </a:pPr>
-            <a:r>
-              <a:rPr sz="1300" b="0">
-                <a:solidFill>
-                  <a:srgbClr val="94A3B8"/>
-                </a:solidFill>
-                <a:latin typeface="PingFang SC"/>
-              </a:rPr>
-              <a:t>默认置信度</a:t>
-            </a:r>
-          </a:p>
-        </p:txBody>
-      </p:sp>
-      <p:sp>
-        <p:nvSpPr>
-          <p:cNvPr id="15" name="TextBox 14"/>
-          <p:cNvSpPr txBox="1"/>
-          <p:nvPr/>
-        </p:nvSpPr>
-        <p:spPr>
-          <a:xfrm>
-            <a:off x="4660900" y="4057650"/>
-            <a:ext cx="2870200" cy="571500"/>
-          </a:xfrm>
-          <a:prstGeom prst="rect">
-            <a:avLst/>
-          </a:prstGeom>
-          <a:noFill/>
-        </p:spPr>
-        <p:txBody>
-          <a:bodyPr wrap="square" anchor="ctr">
-            <a:spAutoFit/>
-          </a:bodyPr>
-          <a:lstStyle/>
-          <a:p>
-            <a:pPr algn="ctr">
-              <a:lnSpc>
-                <a:spcPct val="100000"/>
-              </a:lnSpc>
-            </a:pPr>
-            <a:r>
-              <a:rPr sz="1300" b="1">
-                <a:solidFill>
-                  <a:srgbClr val="475569"/>
-                </a:solidFill>
-                <a:latin typeface="PingFang SC"/>
-              </a:rPr>
-              <a:t>长期条目</a:t>
-            </a:r>
-          </a:p>
-        </p:txBody>
-      </p:sp>
-      <p:sp>
-        <p:nvSpPr>
-          <p:cNvPr id="16" name="Rounded Rectangle 15"/>
-          <p:cNvSpPr/>
-          <p:nvPr/>
-        </p:nvSpPr>
-        <p:spPr>
-          <a:xfrm>
-            <a:off x="7969250" y="1905000"/>
-            <a:ext cx="3175000" cy="2857500"/>
-          </a:xfrm>
-          <a:prstGeom prst="roundRect">
-            <a:avLst>
-              <a:gd name="adj" fmla="val 8000"/>
-            </a:avLst>
-          </a:prstGeom>
-          <a:solidFill>
-            <a:srgbClr val="FFFFFF"/>
-          </a:solidFill>
-          <a:ln w="12700">
-            <a:solidFill>
-              <a:srgbClr val="DDE5EE"/>
-            </a:solidFill>
-          </a:ln>
-          <a:effectLst/>
-        </p:spPr>
-        <p:style>
-          <a:lnRef idx="1">
-            <a:schemeClr val="accent1"/>
-          </a:lnRef>
-          <a:fillRef idx="3">
-            <a:schemeClr val="accent1"/>
-          </a:fillRef>
-          <a:effectRef idx="2">
-            <a:schemeClr val="accent1"/>
-          </a:effectRef>
-          <a:fontRef idx="minor">
-            <a:schemeClr val="lt1"/>
-          </a:fontRef>
-        </p:style>
-        <p:txBody>
-          <a:bodyPr rtlCol="0" anchor="ctr"/>
-          <a:lstStyle/>
-          <a:p>
-            <a:pPr algn="ctr"/>
-          </a:p>
-        </p:txBody>
-      </p:sp>
-      <p:sp>
-        <p:nvSpPr>
-          <p:cNvPr id="17" name="Rectangle 16"/>
-          <p:cNvSpPr/>
-          <p:nvPr/>
-        </p:nvSpPr>
-        <p:spPr>
-          <a:xfrm>
-            <a:off x="7969250" y="1905000"/>
-            <a:ext cx="3175000" cy="76200"/>
-          </a:xfrm>
-          <a:prstGeom prst="rect">
-            <a:avLst/>
-          </a:prstGeom>
-          <a:solidFill>
-            <a:srgbClr val="8B5CF6"/>
-          </a:solidFill>
-          <a:ln>
-            <a:noFill/>
-          </a:ln>
-          <a:effectLst/>
-        </p:spPr>
-        <p:style>
-          <a:lnRef idx="1">
-            <a:schemeClr val="accent1"/>
-          </a:lnRef>
-          <a:fillRef idx="3">
-            <a:schemeClr val="accent1"/>
-          </a:fillRef>
-          <a:effectRef idx="2">
-            <a:schemeClr val="accent1"/>
-          </a:effectRef>
-          <a:fontRef idx="minor">
-            <a:schemeClr val="lt1"/>
-          </a:fontRef>
-        </p:style>
-        <p:txBody>
-          <a:bodyPr rtlCol="0" anchor="ctr"/>
-          <a:lstStyle/>
-          <a:p>
-            <a:pPr algn="ctr"/>
-          </a:p>
-        </p:txBody>
-      </p:sp>
-      <p:sp>
-        <p:nvSpPr>
-          <p:cNvPr id="18" name="TextBox 17"/>
-          <p:cNvSpPr txBox="1"/>
-          <p:nvPr/>
-        </p:nvSpPr>
-        <p:spPr>
-          <a:xfrm>
-            <a:off x="7969250" y="2286000"/>
-            <a:ext cx="3175000" cy="1047750"/>
-          </a:xfrm>
-          <a:prstGeom prst="rect">
-            <a:avLst/>
-          </a:prstGeom>
-          <a:noFill/>
-        </p:spPr>
-        <p:txBody>
-          <a:bodyPr wrap="square" anchor="ctr">
-            <a:spAutoFit/>
-          </a:bodyPr>
-          <a:lstStyle/>
-          <a:p>
-            <a:pPr algn="ctr">
-              <a:lnSpc>
-                <a:spcPct val="100000"/>
-              </a:lnSpc>
-            </a:pPr>
-            <a:r>
-              <a:rPr sz="4000" b="1">
-                <a:solidFill>
-                  <a:srgbClr val="8B5CF6"/>
-                </a:solidFill>
-                <a:latin typeface="PingFang SC"/>
-              </a:rPr>
-              <a:t>24h</a:t>
-            </a:r>
-          </a:p>
-        </p:txBody>
-      </p:sp>
-      <p:sp>
-        <p:nvSpPr>
-          <p:cNvPr id="19" name="TextBox 18"/>
-          <p:cNvSpPr txBox="1"/>
-          <p:nvPr/>
-        </p:nvSpPr>
-        <p:spPr>
-          <a:xfrm>
-            <a:off x="7969250" y="3333750"/>
-            <a:ext cx="3175000" cy="323850"/>
-          </a:xfrm>
-          <a:prstGeom prst="rect">
-            <a:avLst/>
-          </a:prstGeom>
-          <a:noFill/>
-        </p:spPr>
-        <p:txBody>
-          <a:bodyPr wrap="square" anchor="ctr">
-            <a:spAutoFit/>
-          </a:bodyPr>
-          <a:lstStyle/>
-          <a:p>
-            <a:pPr algn="ctr">
-              <a:lnSpc>
-                <a:spcPct val="100000"/>
-              </a:lnSpc>
-            </a:pPr>
-            <a:r>
-              <a:rPr sz="1300" b="0">
-                <a:solidFill>
-                  <a:srgbClr val="94A3B8"/>
-                </a:solidFill>
-                <a:latin typeface="PingFang SC"/>
-              </a:rPr>
-              <a:t>TTL</a:t>
-            </a:r>
-          </a:p>
-        </p:txBody>
-      </p:sp>
-      <p:sp>
-        <p:nvSpPr>
-          <p:cNvPr id="20" name="TextBox 19"/>
-          <p:cNvSpPr txBox="1"/>
-          <p:nvPr/>
-        </p:nvSpPr>
-        <p:spPr>
-          <a:xfrm>
-            <a:off x="8121650" y="4057650"/>
-            <a:ext cx="2870200" cy="571500"/>
-          </a:xfrm>
-          <a:prstGeom prst="rect">
-            <a:avLst/>
-          </a:prstGeom>
-          <a:noFill/>
-        </p:spPr>
-        <p:txBody>
-          <a:bodyPr wrap="square" anchor="ctr">
-            <a:spAutoFit/>
-          </a:bodyPr>
-          <a:lstStyle/>
-          <a:p>
-            <a:pPr algn="ctr">
-              <a:lnSpc>
-                <a:spcPct val="100000"/>
-              </a:lnSpc>
-            </a:pPr>
-            <a:r>
-              <a:rPr sz="1300" b="1">
-                <a:solidFill>
-                  <a:srgbClr val="475569"/>
-                </a:solidFill>
-                <a:latin typeface="PingFang SC"/>
-              </a:rPr>
-              <a:t>时效记忆示例|项目级随 Git 演进</a:t>
-            </a:r>
-          </a:p>
-        </p:txBody>
-      </p:sp>
-      <p:sp>
-        <p:nvSpPr>
-          <p:cNvPr id="21" name="TextBox 20"/>
-          <p:cNvSpPr txBox="1"/>
-          <p:nvPr/>
-        </p:nvSpPr>
-        <p:spPr>
-          <a:xfrm>
-            <a:off x="10287000" y="6534150"/>
-            <a:ext cx="1619250" cy="266700"/>
-          </a:xfrm>
-          <a:prstGeom prst="rect">
-            <a:avLst/>
-          </a:prstGeom>
-          <a:noFill/>
-        </p:spPr>
-        <p:txBody>
-          <a:bodyPr wrap="square" anchor="ctr">
-            <a:spAutoFit/>
-          </a:bodyPr>
-          <a:lstStyle/>
-          <a:p>
-            <a:pPr algn="r">
-              <a:lnSpc>
-                <a:spcPct val="100000"/>
-              </a:lnSpc>
-            </a:pPr>
-            <a:r>
               <a:rPr sz="900" b="0">
                 <a:solidFill>
                   <a:srgbClr val="94A3B8"/>
@@ -25928,7 +25781,7 @@
       </p:sp>
       <p:sp>
         <p:nvSpPr>
-          <p:cNvPr id="22" name="TextBox 21"/>
+          <p:cNvPr id="21" name="TextBox 20"/>
           <p:cNvSpPr txBox="1"/>
           <p:nvPr/>
         </p:nvSpPr>
